--- a/docs/OpenAlex_DBMS_Comparison_Sapienza.pptx
+++ b/docs/OpenAlex_DBMS_Comparison_Sapienza.pptx
@@ -23,6 +23,9 @@
     <p:sldId id="271" r:id="rId22"/>
     <p:sldId id="272" r:id="rId23"/>
     <p:sldId id="273" r:id="rId24"/>
+    <p:sldId id="274" r:id="rId25"/>
+    <p:sldId id="275" r:id="rId26"/>
+    <p:sldId id="276" r:id="rId27"/>
   </p:sldIdLst>
   <p:sldSz cx="12191695" cy="6858000" type="screen4x3"/>
   <p:notesSz cx="6858000" cy="9144000"/>
@@ -8241,13 +8244,13 @@
           <a:p>
             <a:pPr algn="l"/>
             <a:r>
-              <a:rPr sz="2300" b="1">
-                <a:solidFill>
-                  <a:srgbClr val="1A202C"/>
-                </a:solidFill>
-                <a:latin typeface="Arial"/>
-              </a:rPr>
-              <a:t>PostgreSQL is the better fit for structured tabular analysis and most aggregations in our benchmark. Neo4j is more natural for graph-style questions such as citation paths and author relationship networks.</a:t>
+              <a:rPr sz="2100" b="1">
+                <a:solidFill>
+                  <a:srgbClr val="1F2430"/>
+                </a:solidFill>
+                <a:latin typeface="Aptos"/>
+              </a:rPr>
+              <a:t>PostgreSQL is the better fit for structured tabular analysis and most aggregations. Neo4j is more natural for citation paths and author networks.</a:t>
             </a:r>
           </a:p>
         </p:txBody>
@@ -8276,11 +8279,11 @@
           <a:p>
             <a:pPr algn="l"/>
             <a:r>
-              <a:rPr sz="1600" b="0">
-                <a:solidFill>
-                  <a:srgbClr val="5C6876"/>
-                </a:solidFill>
-                <a:latin typeface="Arial"/>
+              <a:rPr sz="1500" b="0">
+                <a:solidFill>
+                  <a:srgbClr val="566373"/>
+                </a:solidFill>
+                <a:latin typeface="Aptos"/>
               </a:rPr>
               <a:t>The choice depends on the data access pattern, not on one database being universally better.</a:t>
             </a:r>
@@ -8396,6 +8399,679 @@
                 <a:latin typeface="Arial"/>
               </a:rPr>
               <a:t>18</a:t>
+            </a:r>
+          </a:p>
+        </p:txBody>
+      </p:sp>
+    </p:spTree>
+  </p:cSld>
+  <p:clrMapOvr>
+    <a:masterClrMapping/>
+  </p:clrMapOvr>
+</p:sld>
+</file>
+
+<file path=ppt/slides/slide19.xml><?xml version="1.0" encoding="utf-8"?>
+<p:sld xmlns:a="http://schemas.openxmlformats.org/drawingml/2006/main" xmlns:p="http://schemas.openxmlformats.org/presentationml/2006/main" xmlns:r="http://schemas.openxmlformats.org/officeDocument/2006/relationships">
+  <p:cSld>
+    <p:spTree>
+      <p:nvGrpSpPr>
+        <p:cNvPr id="1" name=""/>
+        <p:cNvGrpSpPr/>
+        <p:nvPr/>
+      </p:nvGrpSpPr>
+      <p:grpSpPr/>
+      <p:sp>
+        <p:nvSpPr>
+          <p:cNvPr id="2" name="Rectangle 1"/>
+          <p:cNvSpPr/>
+          <p:nvPr/>
+        </p:nvSpPr>
+        <p:spPr>
+          <a:xfrm>
+            <a:off x="0" y="0"/>
+            <a:ext cx="12191695" cy="457200"/>
+          </a:xfrm>
+          <a:prstGeom prst="rect">
+            <a:avLst/>
+          </a:prstGeom>
+          <a:solidFill>
+            <a:srgbClr val="822332"/>
+          </a:solidFill>
+          <a:ln>
+            <a:noFill/>
+          </a:ln>
+        </p:spPr>
+        <p:style>
+          <a:lnRef idx="1">
+            <a:schemeClr val="accent1"/>
+          </a:lnRef>
+          <a:fillRef idx="3">
+            <a:schemeClr val="accent1"/>
+          </a:fillRef>
+          <a:effectRef idx="2">
+            <a:schemeClr val="accent1"/>
+          </a:effectRef>
+          <a:fontRef idx="minor">
+            <a:schemeClr val="lt1"/>
+          </a:fontRef>
+        </p:style>
+        <p:txBody>
+          <a:bodyPr rtlCol="0" anchor="ctr"/>
+          <a:lstStyle/>
+          <a:p>
+            <a:pPr algn="ctr"/>
+          </a:p>
+        </p:txBody>
+      </p:sp>
+      <p:sp>
+        <p:nvSpPr>
+          <p:cNvPr id="3" name="TextBox 2"/>
+          <p:cNvSpPr txBox="1"/>
+          <p:nvPr/>
+        </p:nvSpPr>
+        <p:spPr>
+          <a:xfrm>
+            <a:off x="502920" y="594360"/>
+            <a:ext cx="8961120" cy="411480"/>
+          </a:xfrm>
+          <a:prstGeom prst="rect">
+            <a:avLst/>
+          </a:prstGeom>
+          <a:noFill/>
+        </p:spPr>
+        <p:txBody>
+          <a:bodyPr wrap="square" lIns="54864" rIns="54864" tIns="27432" bIns="27432">
+            <a:spAutoFit/>
+          </a:bodyPr>
+          <a:lstStyle/>
+          <a:p>
+            <a:pPr algn="l"/>
+            <a:r>
+              <a:rPr sz="2700" b="1">
+                <a:solidFill>
+                  <a:srgbClr val="52121E"/>
+                </a:solidFill>
+                <a:latin typeface="Arial"/>
+              </a:rPr>
+              <a:t>Course Connection: Graph Databases</a:t>
+            </a:r>
+          </a:p>
+        </p:txBody>
+      </p:sp>
+      <p:sp>
+        <p:nvSpPr>
+          <p:cNvPr id="4" name="TextBox 3"/>
+          <p:cNvSpPr txBox="1"/>
+          <p:nvPr/>
+        </p:nvSpPr>
+        <p:spPr>
+          <a:xfrm>
+            <a:off x="530352" y="987552"/>
+            <a:ext cx="8686800" cy="256032"/>
+          </a:xfrm>
+          <a:prstGeom prst="rect">
+            <a:avLst/>
+          </a:prstGeom>
+          <a:noFill/>
+        </p:spPr>
+        <p:txBody>
+          <a:bodyPr wrap="square" lIns="54864" rIns="54864" tIns="27432" bIns="27432">
+            <a:spAutoFit/>
+          </a:bodyPr>
+          <a:lstStyle/>
+          <a:p>
+            <a:pPr algn="l"/>
+            <a:r>
+              <a:rPr sz="1200" b="0">
+                <a:solidFill>
+                  <a:srgbClr val="5C6876"/>
+                </a:solidFill>
+                <a:latin typeface="Arial"/>
+              </a:rPr>
+              <a:t>How the lecture concepts appear in our implementation</a:t>
+            </a:r>
+          </a:p>
+        </p:txBody>
+      </p:sp>
+      <p:pic>
+        <p:nvPicPr>
+          <p:cNvPr id="5" name="Picture 4" descr="image.png"/>
+          <p:cNvPicPr>
+            <a:picLocks noChangeAspect="1"/>
+          </p:cNvPicPr>
+          <p:nvPr/>
+        </p:nvPicPr>
+        <p:blipFill>
+          <a:blip r:embed="rId2"/>
+          <a:stretch>
+            <a:fillRect/>
+          </a:stretch>
+        </p:blipFill>
+        <p:spPr>
+          <a:xfrm>
+            <a:off x="11018520" y="566928"/>
+            <a:ext cx="566928" cy="679252"/>
+          </a:xfrm>
+          <a:prstGeom prst="rect">
+            <a:avLst/>
+          </a:prstGeom>
+        </p:spPr>
+      </p:pic>
+      <p:sp>
+        <p:nvSpPr>
+          <p:cNvPr id="6" name="TextBox 5"/>
+          <p:cNvSpPr txBox="1"/>
+          <p:nvPr/>
+        </p:nvSpPr>
+        <p:spPr>
+          <a:xfrm>
+            <a:off x="502920" y="6446520"/>
+            <a:ext cx="4206240" cy="201168"/>
+          </a:xfrm>
+          <a:prstGeom prst="rect">
+            <a:avLst/>
+          </a:prstGeom>
+          <a:noFill/>
+        </p:spPr>
+        <p:txBody>
+          <a:bodyPr wrap="square" lIns="54864" rIns="54864" tIns="27432" bIns="27432">
+            <a:spAutoFit/>
+          </a:bodyPr>
+          <a:lstStyle/>
+          <a:p>
+            <a:pPr algn="l"/>
+            <a:r>
+              <a:rPr sz="800" b="0">
+                <a:solidFill>
+                  <a:srgbClr val="5C6876"/>
+                </a:solidFill>
+                <a:latin typeface="Arial"/>
+              </a:rPr>
+              <a:t>OpenAlex AI DBMS Comparison</a:t>
+            </a:r>
+          </a:p>
+        </p:txBody>
+      </p:sp>
+      <p:sp>
+        <p:nvSpPr>
+          <p:cNvPr id="7" name="TextBox 6"/>
+          <p:cNvSpPr txBox="1"/>
+          <p:nvPr/>
+        </p:nvSpPr>
+        <p:spPr>
+          <a:xfrm>
+            <a:off x="11292840" y="6446520"/>
+            <a:ext cx="411480" cy="201168"/>
+          </a:xfrm>
+          <a:prstGeom prst="rect">
+            <a:avLst/>
+          </a:prstGeom>
+          <a:noFill/>
+        </p:spPr>
+        <p:txBody>
+          <a:bodyPr wrap="square" lIns="54864" rIns="54864" tIns="27432" bIns="27432">
+            <a:spAutoFit/>
+          </a:bodyPr>
+          <a:lstStyle/>
+          <a:p>
+            <a:pPr algn="r"/>
+            <a:r>
+              <a:rPr sz="800" b="0">
+                <a:solidFill>
+                  <a:srgbClr val="5C6876"/>
+                </a:solidFill>
+                <a:latin typeface="Arial"/>
+              </a:rPr>
+              <a:t>19</a:t>
+            </a:r>
+          </a:p>
+        </p:txBody>
+      </p:sp>
+      <p:sp>
+        <p:nvSpPr>
+          <p:cNvPr id="8" name="Rounded Rectangle 7"/>
+          <p:cNvSpPr/>
+          <p:nvPr/>
+        </p:nvSpPr>
+        <p:spPr>
+          <a:xfrm>
+            <a:off x="685800" y="1417320"/>
+            <a:ext cx="3291840" cy="4343400"/>
+          </a:xfrm>
+          <a:prstGeom prst="roundRect">
+            <a:avLst/>
+          </a:prstGeom>
+          <a:solidFill>
+            <a:srgbClr val="FBFBFB"/>
+          </a:solidFill>
+          <a:ln w="15240">
+            <a:solidFill>
+              <a:srgbClr val="DCDCDC"/>
+            </a:solidFill>
+          </a:ln>
+        </p:spPr>
+        <p:style>
+          <a:lnRef idx="1">
+            <a:schemeClr val="accent1"/>
+          </a:lnRef>
+          <a:fillRef idx="3">
+            <a:schemeClr val="accent1"/>
+          </a:fillRef>
+          <a:effectRef idx="2">
+            <a:schemeClr val="accent1"/>
+          </a:effectRef>
+          <a:fontRef idx="minor">
+            <a:schemeClr val="lt1"/>
+          </a:fontRef>
+        </p:style>
+        <p:txBody>
+          <a:bodyPr rtlCol="0" anchor="ctr"/>
+          <a:lstStyle/>
+          <a:p>
+            <a:pPr algn="ctr"/>
+          </a:p>
+        </p:txBody>
+      </p:sp>
+      <p:sp>
+        <p:nvSpPr>
+          <p:cNvPr id="9" name="TextBox 8"/>
+          <p:cNvSpPr txBox="1"/>
+          <p:nvPr/>
+        </p:nvSpPr>
+        <p:spPr>
+          <a:xfrm>
+            <a:off x="960120" y="1664208"/>
+            <a:ext cx="2103120" cy="274320"/>
+          </a:xfrm>
+          <a:prstGeom prst="rect">
+            <a:avLst/>
+          </a:prstGeom>
+          <a:noFill/>
+        </p:spPr>
+        <p:txBody>
+          <a:bodyPr wrap="square" lIns="54864" rIns="54864" tIns="27432" bIns="27432">
+            <a:spAutoFit/>
+          </a:bodyPr>
+          <a:lstStyle/>
+          <a:p>
+            <a:pPr algn="l"/>
+            <a:r>
+              <a:rPr sz="1700" b="1">
+                <a:solidFill>
+                  <a:srgbClr val="52121E"/>
+                </a:solidFill>
+                <a:latin typeface="Arial"/>
+              </a:rPr>
+              <a:t>Lecture idea</a:t>
+            </a:r>
+          </a:p>
+        </p:txBody>
+      </p:sp>
+      <p:sp>
+        <p:nvSpPr>
+          <p:cNvPr id="10" name="TextBox 9"/>
+          <p:cNvSpPr txBox="1"/>
+          <p:nvPr/>
+        </p:nvSpPr>
+        <p:spPr>
+          <a:xfrm>
+            <a:off x="960120" y="2084831"/>
+            <a:ext cx="2606040" cy="2560320"/>
+          </a:xfrm>
+          <a:prstGeom prst="rect">
+            <a:avLst/>
+          </a:prstGeom>
+          <a:noFill/>
+        </p:spPr>
+        <p:txBody>
+          <a:bodyPr wrap="square" lIns="54864" rIns="54864" tIns="27432" bIns="27432">
+            <a:spAutoFit/>
+          </a:bodyPr>
+          <a:lstStyle/>
+          <a:p>
+            <a:pPr algn="l">
+              <a:spcAft>
+                <a:spcPts val="500"/>
+              </a:spcAft>
+            </a:pPr>
+            <a:r>
+              <a:rPr sz="1600" b="0">
+                <a:solidFill>
+                  <a:srgbClr val="1A202C"/>
+                </a:solidFill>
+                <a:latin typeface="Arial"/>
+              </a:rPr>
+              <a:t>- Relationships can be represented as explicit graph edges</a:t>
+            </a:r>
+            <a:br/>
+            <a:r>
+              <a:rPr sz="1600" b="0">
+                <a:solidFill>
+                  <a:srgbClr val="1A202C"/>
+                </a:solidFill>
+                <a:latin typeface="Arial"/>
+              </a:rPr>
+              <a:t>- Graph data is useful when paths and networks matter</a:t>
+            </a:r>
+            <a:br/>
+            <a:r>
+              <a:rPr sz="1600" b="0">
+                <a:solidFill>
+                  <a:srgbClr val="1A202C"/>
+                </a:solidFill>
+                <a:latin typeface="Arial"/>
+              </a:rPr>
+              <a:t>- Traversal follows connected nodes and relationships</a:t>
+            </a:r>
+          </a:p>
+        </p:txBody>
+      </p:sp>
+      <p:sp>
+        <p:nvSpPr>
+          <p:cNvPr id="11" name="Rounded Rectangle 10"/>
+          <p:cNvSpPr/>
+          <p:nvPr/>
+        </p:nvSpPr>
+        <p:spPr>
+          <a:xfrm>
+            <a:off x="4434840" y="1417320"/>
+            <a:ext cx="3291840" cy="4343400"/>
+          </a:xfrm>
+          <a:prstGeom prst="roundRect">
+            <a:avLst/>
+          </a:prstGeom>
+          <a:solidFill>
+            <a:srgbClr val="FBFBFB"/>
+          </a:solidFill>
+          <a:ln w="15240">
+            <a:solidFill>
+              <a:srgbClr val="DCDCDC"/>
+            </a:solidFill>
+          </a:ln>
+        </p:spPr>
+        <p:style>
+          <a:lnRef idx="1">
+            <a:schemeClr val="accent1"/>
+          </a:lnRef>
+          <a:fillRef idx="3">
+            <a:schemeClr val="accent1"/>
+          </a:fillRef>
+          <a:effectRef idx="2">
+            <a:schemeClr val="accent1"/>
+          </a:effectRef>
+          <a:fontRef idx="minor">
+            <a:schemeClr val="lt1"/>
+          </a:fontRef>
+        </p:style>
+        <p:txBody>
+          <a:bodyPr rtlCol="0" anchor="ctr"/>
+          <a:lstStyle/>
+          <a:p>
+            <a:pPr algn="ctr"/>
+          </a:p>
+        </p:txBody>
+      </p:sp>
+      <p:sp>
+        <p:nvSpPr>
+          <p:cNvPr id="12" name="TextBox 11"/>
+          <p:cNvSpPr txBox="1"/>
+          <p:nvPr/>
+        </p:nvSpPr>
+        <p:spPr>
+          <a:xfrm>
+            <a:off x="4709160" y="1664208"/>
+            <a:ext cx="2286000" cy="274320"/>
+          </a:xfrm>
+          <a:prstGeom prst="rect">
+            <a:avLst/>
+          </a:prstGeom>
+          <a:noFill/>
+        </p:spPr>
+        <p:txBody>
+          <a:bodyPr wrap="square" lIns="54864" rIns="54864" tIns="27432" bIns="27432">
+            <a:spAutoFit/>
+          </a:bodyPr>
+          <a:lstStyle/>
+          <a:p>
+            <a:pPr algn="l"/>
+            <a:r>
+              <a:rPr sz="1700" b="1">
+                <a:solidFill>
+                  <a:srgbClr val="52121E"/>
+                </a:solidFill>
+                <a:latin typeface="Arial"/>
+              </a:rPr>
+              <a:t>Our Neo4j model</a:t>
+            </a:r>
+          </a:p>
+        </p:txBody>
+      </p:sp>
+      <p:sp>
+        <p:nvSpPr>
+          <p:cNvPr id="13" name="TextBox 12"/>
+          <p:cNvSpPr txBox="1"/>
+          <p:nvPr/>
+        </p:nvSpPr>
+        <p:spPr>
+          <a:xfrm>
+            <a:off x="4709160" y="2084831"/>
+            <a:ext cx="2606040" cy="2560320"/>
+          </a:xfrm>
+          <a:prstGeom prst="rect">
+            <a:avLst/>
+          </a:prstGeom>
+          <a:noFill/>
+        </p:spPr>
+        <p:txBody>
+          <a:bodyPr wrap="square" lIns="54864" rIns="54864" tIns="27432" bIns="27432">
+            <a:spAutoFit/>
+          </a:bodyPr>
+          <a:lstStyle/>
+          <a:p>
+            <a:pPr algn="l">
+              <a:spcAft>
+                <a:spcPts val="500"/>
+              </a:spcAft>
+            </a:pPr>
+            <a:r>
+              <a:rPr sz="1600" b="0">
+                <a:solidFill>
+                  <a:srgbClr val="1A202C"/>
+                </a:solidFill>
+                <a:latin typeface="Arial"/>
+              </a:rPr>
+              <a:t>- Nodes: Paper, Author, Topic</a:t>
+            </a:r>
+            <a:br/>
+            <a:r>
+              <a:rPr sz="1600" b="0">
+                <a:solidFill>
+                  <a:srgbClr val="1A202C"/>
+                </a:solidFill>
+                <a:latin typeface="Arial"/>
+              </a:rPr>
+              <a:t>- Edges: AUTHORED, HAS_TOPIC, CITES</a:t>
+            </a:r>
+            <a:br/>
+            <a:r>
+              <a:rPr sz="1600" b="0">
+                <a:solidFill>
+                  <a:srgbClr val="1A202C"/>
+                </a:solidFill>
+                <a:latin typeface="Arial"/>
+              </a:rPr>
+              <a:t>- Citation and authorship paths are visible in Neo4j Browser</a:t>
+            </a:r>
+          </a:p>
+        </p:txBody>
+      </p:sp>
+      <p:sp>
+        <p:nvSpPr>
+          <p:cNvPr id="14" name="Rounded Rectangle 13"/>
+          <p:cNvSpPr/>
+          <p:nvPr/>
+        </p:nvSpPr>
+        <p:spPr>
+          <a:xfrm>
+            <a:off x="8183879" y="1417320"/>
+            <a:ext cx="3291840" cy="4343400"/>
+          </a:xfrm>
+          <a:prstGeom prst="roundRect">
+            <a:avLst/>
+          </a:prstGeom>
+          <a:solidFill>
+            <a:srgbClr val="FBFBFB"/>
+          </a:solidFill>
+          <a:ln w="15240">
+            <a:solidFill>
+              <a:srgbClr val="DCDCDC"/>
+            </a:solidFill>
+          </a:ln>
+        </p:spPr>
+        <p:style>
+          <a:lnRef idx="1">
+            <a:schemeClr val="accent1"/>
+          </a:lnRef>
+          <a:fillRef idx="3">
+            <a:schemeClr val="accent1"/>
+          </a:fillRef>
+          <a:effectRef idx="2">
+            <a:schemeClr val="accent1"/>
+          </a:effectRef>
+          <a:fontRef idx="minor">
+            <a:schemeClr val="lt1"/>
+          </a:fontRef>
+        </p:style>
+        <p:txBody>
+          <a:bodyPr rtlCol="0" anchor="ctr"/>
+          <a:lstStyle/>
+          <a:p>
+            <a:pPr algn="ctr"/>
+          </a:p>
+        </p:txBody>
+      </p:sp>
+      <p:sp>
+        <p:nvSpPr>
+          <p:cNvPr id="15" name="TextBox 14"/>
+          <p:cNvSpPr txBox="1"/>
+          <p:nvPr/>
+        </p:nvSpPr>
+        <p:spPr>
+          <a:xfrm>
+            <a:off x="8458200" y="1664208"/>
+            <a:ext cx="2286000" cy="274320"/>
+          </a:xfrm>
+          <a:prstGeom prst="rect">
+            <a:avLst/>
+          </a:prstGeom>
+          <a:noFill/>
+        </p:spPr>
+        <p:txBody>
+          <a:bodyPr wrap="square" lIns="54864" rIns="54864" tIns="27432" bIns="27432">
+            <a:spAutoFit/>
+          </a:bodyPr>
+          <a:lstStyle/>
+          <a:p>
+            <a:pPr algn="l"/>
+            <a:r>
+              <a:rPr sz="1700" b="1">
+                <a:solidFill>
+                  <a:srgbClr val="52121E"/>
+                </a:solidFill>
+                <a:latin typeface="Arial"/>
+              </a:rPr>
+              <a:t>Project example</a:t>
+            </a:r>
+          </a:p>
+        </p:txBody>
+      </p:sp>
+      <p:sp>
+        <p:nvSpPr>
+          <p:cNvPr id="16" name="TextBox 15"/>
+          <p:cNvSpPr txBox="1"/>
+          <p:nvPr/>
+        </p:nvSpPr>
+        <p:spPr>
+          <a:xfrm>
+            <a:off x="8458200" y="2194560"/>
+            <a:ext cx="2606040" cy="1234440"/>
+          </a:xfrm>
+          <a:prstGeom prst="rect">
+            <a:avLst/>
+          </a:prstGeom>
+          <a:noFill/>
+        </p:spPr>
+        <p:txBody>
+          <a:bodyPr wrap="square" lIns="54864" rIns="54864" tIns="27432" bIns="27432">
+            <a:spAutoFit/>
+          </a:bodyPr>
+          <a:lstStyle/>
+          <a:p>
+            <a:pPr algn="l"/>
+            <a:r>
+              <a:rPr sz="1500" b="1">
+                <a:solidFill>
+                  <a:srgbClr val="1A202C"/>
+                </a:solidFill>
+                <a:latin typeface="Arial"/>
+              </a:rPr>
+              <a:t>(Author)-[:AUTHORED]-&gt;(Paper)</a:t>
+            </a:r>
+            <a:br/>
+            <a:r>
+              <a:rPr sz="1500" b="1">
+                <a:solidFill>
+                  <a:srgbClr val="1A202C"/>
+                </a:solidFill>
+                <a:latin typeface="Arial"/>
+              </a:rPr>
+              <a:t>(Paper)-[:CITES]-&gt;(Paper)</a:t>
+            </a:r>
+            <a:br/>
+            <a:r>
+              <a:rPr sz="1500" b="1">
+                <a:solidFill>
+                  <a:srgbClr val="1A202C"/>
+                </a:solidFill>
+                <a:latin typeface="Arial"/>
+              </a:rPr>
+              <a:t>(Paper)-[:HAS_TOPIC]-&gt;(Topic)</a:t>
+            </a:r>
+          </a:p>
+        </p:txBody>
+      </p:sp>
+      <p:sp>
+        <p:nvSpPr>
+          <p:cNvPr id="17" name="TextBox 16"/>
+          <p:cNvSpPr txBox="1"/>
+          <p:nvPr/>
+        </p:nvSpPr>
+        <p:spPr>
+          <a:xfrm>
+            <a:off x="8458200" y="4069080"/>
+            <a:ext cx="2606040" cy="640080"/>
+          </a:xfrm>
+          <a:prstGeom prst="rect">
+            <a:avLst/>
+          </a:prstGeom>
+          <a:noFill/>
+        </p:spPr>
+        <p:txBody>
+          <a:bodyPr wrap="square" lIns="54864" rIns="54864" tIns="27432" bIns="27432">
+            <a:spAutoFit/>
+          </a:bodyPr>
+          <a:lstStyle/>
+          <a:p>
+            <a:pPr algn="l"/>
+            <a:r>
+              <a:rPr sz="1600" b="0">
+                <a:solidFill>
+                  <a:srgbClr val="1A202C"/>
+                </a:solidFill>
+                <a:latin typeface="Arial"/>
+              </a:rPr>
+              <a:t>This directly applies the property graph model explained in class.</a:t>
             </a:r>
           </a:p>
         </p:txBody>
@@ -8925,6 +9601,1231 @@
                 <a:latin typeface="Arial"/>
               </a:rPr>
               <a:t>2</a:t>
+            </a:r>
+          </a:p>
+        </p:txBody>
+      </p:sp>
+    </p:spTree>
+  </p:cSld>
+  <p:clrMapOvr>
+    <a:masterClrMapping/>
+  </p:clrMapOvr>
+</p:sld>
+</file>
+
+<file path=ppt/slides/slide20.xml><?xml version="1.0" encoding="utf-8"?>
+<p:sld xmlns:a="http://schemas.openxmlformats.org/drawingml/2006/main" xmlns:p="http://schemas.openxmlformats.org/presentationml/2006/main" xmlns:r="http://schemas.openxmlformats.org/officeDocument/2006/relationships">
+  <p:cSld>
+    <p:spTree>
+      <p:nvGrpSpPr>
+        <p:cNvPr id="1" name=""/>
+        <p:cNvGrpSpPr/>
+        <p:nvPr/>
+      </p:nvGrpSpPr>
+      <p:grpSpPr/>
+      <p:sp>
+        <p:nvSpPr>
+          <p:cNvPr id="2" name="Rectangle 1"/>
+          <p:cNvSpPr/>
+          <p:nvPr/>
+        </p:nvSpPr>
+        <p:spPr>
+          <a:xfrm>
+            <a:off x="0" y="0"/>
+            <a:ext cx="12191695" cy="457200"/>
+          </a:xfrm>
+          <a:prstGeom prst="rect">
+            <a:avLst/>
+          </a:prstGeom>
+          <a:solidFill>
+            <a:srgbClr val="822332"/>
+          </a:solidFill>
+          <a:ln>
+            <a:noFill/>
+          </a:ln>
+        </p:spPr>
+        <p:style>
+          <a:lnRef idx="1">
+            <a:schemeClr val="accent1"/>
+          </a:lnRef>
+          <a:fillRef idx="3">
+            <a:schemeClr val="accent1"/>
+          </a:fillRef>
+          <a:effectRef idx="2">
+            <a:schemeClr val="accent1"/>
+          </a:effectRef>
+          <a:fontRef idx="minor">
+            <a:schemeClr val="lt1"/>
+          </a:fontRef>
+        </p:style>
+        <p:txBody>
+          <a:bodyPr rtlCol="0" anchor="ctr"/>
+          <a:lstStyle/>
+          <a:p>
+            <a:pPr algn="ctr"/>
+          </a:p>
+        </p:txBody>
+      </p:sp>
+      <p:sp>
+        <p:nvSpPr>
+          <p:cNvPr id="3" name="TextBox 2"/>
+          <p:cNvSpPr txBox="1"/>
+          <p:nvPr/>
+        </p:nvSpPr>
+        <p:spPr>
+          <a:xfrm>
+            <a:off x="502920" y="594360"/>
+            <a:ext cx="8961120" cy="411480"/>
+          </a:xfrm>
+          <a:prstGeom prst="rect">
+            <a:avLst/>
+          </a:prstGeom>
+          <a:noFill/>
+        </p:spPr>
+        <p:txBody>
+          <a:bodyPr wrap="square" lIns="54864" rIns="54864" tIns="27432" bIns="27432">
+            <a:spAutoFit/>
+          </a:bodyPr>
+          <a:lstStyle/>
+          <a:p>
+            <a:pPr algn="l"/>
+            <a:r>
+              <a:rPr sz="2700" b="1">
+                <a:solidFill>
+                  <a:srgbClr val="52121E"/>
+                </a:solidFill>
+                <a:latin typeface="Arial"/>
+              </a:rPr>
+              <a:t>Course Connection: Joins vs Traversal</a:t>
+            </a:r>
+          </a:p>
+        </p:txBody>
+      </p:sp>
+      <p:sp>
+        <p:nvSpPr>
+          <p:cNvPr id="4" name="TextBox 3"/>
+          <p:cNvSpPr txBox="1"/>
+          <p:nvPr/>
+        </p:nvSpPr>
+        <p:spPr>
+          <a:xfrm>
+            <a:off x="530352" y="987552"/>
+            <a:ext cx="8686800" cy="256032"/>
+          </a:xfrm>
+          <a:prstGeom prst="rect">
+            <a:avLst/>
+          </a:prstGeom>
+          <a:noFill/>
+        </p:spPr>
+        <p:txBody>
+          <a:bodyPr wrap="square" lIns="54864" rIns="54864" tIns="27432" bIns="27432">
+            <a:spAutoFit/>
+          </a:bodyPr>
+          <a:lstStyle/>
+          <a:p>
+            <a:pPr algn="l"/>
+            <a:r>
+              <a:rPr sz="1200" b="0">
+                <a:solidFill>
+                  <a:srgbClr val="5C6876"/>
+                </a:solidFill>
+                <a:latin typeface="Arial"/>
+              </a:rPr>
+              <a:t>Same relationship question, two database perspectives</a:t>
+            </a:r>
+          </a:p>
+        </p:txBody>
+      </p:sp>
+      <p:pic>
+        <p:nvPicPr>
+          <p:cNvPr id="5" name="Picture 4" descr="image.png"/>
+          <p:cNvPicPr>
+            <a:picLocks noChangeAspect="1"/>
+          </p:cNvPicPr>
+          <p:nvPr/>
+        </p:nvPicPr>
+        <p:blipFill>
+          <a:blip r:embed="rId2"/>
+          <a:stretch>
+            <a:fillRect/>
+          </a:stretch>
+        </p:blipFill>
+        <p:spPr>
+          <a:xfrm>
+            <a:off x="11018520" y="566928"/>
+            <a:ext cx="566928" cy="679252"/>
+          </a:xfrm>
+          <a:prstGeom prst="rect">
+            <a:avLst/>
+          </a:prstGeom>
+        </p:spPr>
+      </p:pic>
+      <p:sp>
+        <p:nvSpPr>
+          <p:cNvPr id="6" name="TextBox 5"/>
+          <p:cNvSpPr txBox="1"/>
+          <p:nvPr/>
+        </p:nvSpPr>
+        <p:spPr>
+          <a:xfrm>
+            <a:off x="502920" y="6446520"/>
+            <a:ext cx="4206240" cy="201168"/>
+          </a:xfrm>
+          <a:prstGeom prst="rect">
+            <a:avLst/>
+          </a:prstGeom>
+          <a:noFill/>
+        </p:spPr>
+        <p:txBody>
+          <a:bodyPr wrap="square" lIns="54864" rIns="54864" tIns="27432" bIns="27432">
+            <a:spAutoFit/>
+          </a:bodyPr>
+          <a:lstStyle/>
+          <a:p>
+            <a:pPr algn="l"/>
+            <a:r>
+              <a:rPr sz="800" b="0">
+                <a:solidFill>
+                  <a:srgbClr val="5C6876"/>
+                </a:solidFill>
+                <a:latin typeface="Arial"/>
+              </a:rPr>
+              <a:t>OpenAlex AI DBMS Comparison</a:t>
+            </a:r>
+          </a:p>
+        </p:txBody>
+      </p:sp>
+      <p:sp>
+        <p:nvSpPr>
+          <p:cNvPr id="7" name="TextBox 6"/>
+          <p:cNvSpPr txBox="1"/>
+          <p:nvPr/>
+        </p:nvSpPr>
+        <p:spPr>
+          <a:xfrm>
+            <a:off x="11292840" y="6446520"/>
+            <a:ext cx="411480" cy="201168"/>
+          </a:xfrm>
+          <a:prstGeom prst="rect">
+            <a:avLst/>
+          </a:prstGeom>
+          <a:noFill/>
+        </p:spPr>
+        <p:txBody>
+          <a:bodyPr wrap="square" lIns="54864" rIns="54864" tIns="27432" bIns="27432">
+            <a:spAutoFit/>
+          </a:bodyPr>
+          <a:lstStyle/>
+          <a:p>
+            <a:pPr algn="r"/>
+            <a:r>
+              <a:rPr sz="800" b="0">
+                <a:solidFill>
+                  <a:srgbClr val="5C6876"/>
+                </a:solidFill>
+                <a:latin typeface="Arial"/>
+              </a:rPr>
+              <a:t>20</a:t>
+            </a:r>
+          </a:p>
+        </p:txBody>
+      </p:sp>
+      <p:sp>
+        <p:nvSpPr>
+          <p:cNvPr id="8" name="Rounded Rectangle 7"/>
+          <p:cNvSpPr/>
+          <p:nvPr/>
+        </p:nvSpPr>
+        <p:spPr>
+          <a:xfrm>
+            <a:off x="685800" y="1417320"/>
+            <a:ext cx="5120640" cy="4434840"/>
+          </a:xfrm>
+          <a:prstGeom prst="roundRect">
+            <a:avLst/>
+          </a:prstGeom>
+          <a:solidFill>
+            <a:srgbClr val="FBFBFB"/>
+          </a:solidFill>
+          <a:ln w="15240">
+            <a:solidFill>
+              <a:srgbClr val="DCDCDC"/>
+            </a:solidFill>
+          </a:ln>
+        </p:spPr>
+        <p:style>
+          <a:lnRef idx="1">
+            <a:schemeClr val="accent1"/>
+          </a:lnRef>
+          <a:fillRef idx="3">
+            <a:schemeClr val="accent1"/>
+          </a:fillRef>
+          <a:effectRef idx="2">
+            <a:schemeClr val="accent1"/>
+          </a:effectRef>
+          <a:fontRef idx="minor">
+            <a:schemeClr val="lt1"/>
+          </a:fontRef>
+        </p:style>
+        <p:txBody>
+          <a:bodyPr rtlCol="0" anchor="ctr"/>
+          <a:lstStyle/>
+          <a:p>
+            <a:pPr algn="ctr"/>
+          </a:p>
+        </p:txBody>
+      </p:sp>
+      <p:sp>
+        <p:nvSpPr>
+          <p:cNvPr id="9" name="TextBox 8"/>
+          <p:cNvSpPr txBox="1"/>
+          <p:nvPr/>
+        </p:nvSpPr>
+        <p:spPr>
+          <a:xfrm>
+            <a:off x="960120" y="1691640"/>
+            <a:ext cx="3840480" cy="274320"/>
+          </a:xfrm>
+          <a:prstGeom prst="rect">
+            <a:avLst/>
+          </a:prstGeom>
+          <a:noFill/>
+        </p:spPr>
+        <p:txBody>
+          <a:bodyPr wrap="square" lIns="54864" rIns="54864" tIns="27432" bIns="27432">
+            <a:spAutoFit/>
+          </a:bodyPr>
+          <a:lstStyle/>
+          <a:p>
+            <a:pPr algn="l"/>
+            <a:r>
+              <a:rPr sz="1800" b="1">
+                <a:solidFill>
+                  <a:srgbClr val="52121E"/>
+                </a:solidFill>
+                <a:latin typeface="Arial"/>
+              </a:rPr>
+              <a:t>PostgreSQL: relationships through joins</a:t>
+            </a:r>
+          </a:p>
+        </p:txBody>
+      </p:sp>
+      <p:sp>
+        <p:nvSpPr>
+          <p:cNvPr id="10" name="TextBox 9"/>
+          <p:cNvSpPr txBox="1"/>
+          <p:nvPr/>
+        </p:nvSpPr>
+        <p:spPr>
+          <a:xfrm>
+            <a:off x="960120" y="2148840"/>
+            <a:ext cx="4343400" cy="2286000"/>
+          </a:xfrm>
+          <a:prstGeom prst="rect">
+            <a:avLst/>
+          </a:prstGeom>
+          <a:noFill/>
+        </p:spPr>
+        <p:txBody>
+          <a:bodyPr wrap="square" lIns="54864" rIns="54864" tIns="27432" bIns="27432">
+            <a:spAutoFit/>
+          </a:bodyPr>
+          <a:lstStyle/>
+          <a:p>
+            <a:pPr algn="l">
+              <a:spcAft>
+                <a:spcPts val="500"/>
+              </a:spcAft>
+            </a:pPr>
+            <a:r>
+              <a:rPr sz="1700" b="0">
+                <a:solidFill>
+                  <a:srgbClr val="1A202C"/>
+                </a:solidFill>
+                <a:latin typeface="Arial"/>
+              </a:rPr>
+              <a:t>- Relationships are stored in tables and bridge tables</a:t>
+            </a:r>
+            <a:br/>
+            <a:r>
+              <a:rPr sz="1700" b="0">
+                <a:solidFill>
+                  <a:srgbClr val="1A202C"/>
+                </a:solidFill>
+                <a:latin typeface="Arial"/>
+              </a:rPr>
+              <a:t>- Author citation network requires joins across paper_authors, citations, and authors</a:t>
+            </a:r>
+            <a:br/>
+            <a:r>
+              <a:rPr sz="1700" b="0">
+                <a:solidFill>
+                  <a:srgbClr val="1A202C"/>
+                </a:solidFill>
+                <a:latin typeface="Arial"/>
+              </a:rPr>
+              <a:t>- Good for structured aggregation, sorting, and filtering</a:t>
+            </a:r>
+          </a:p>
+        </p:txBody>
+      </p:sp>
+      <p:sp>
+        <p:nvSpPr>
+          <p:cNvPr id="11" name="TextBox 10"/>
+          <p:cNvSpPr txBox="1"/>
+          <p:nvPr/>
+        </p:nvSpPr>
+        <p:spPr>
+          <a:xfrm>
+            <a:off x="960120" y="4892040"/>
+            <a:ext cx="4343400" cy="502920"/>
+          </a:xfrm>
+          <a:prstGeom prst="rect">
+            <a:avLst/>
+          </a:prstGeom>
+          <a:noFill/>
+        </p:spPr>
+        <p:txBody>
+          <a:bodyPr wrap="square" lIns="54864" rIns="54864" tIns="27432" bIns="27432">
+            <a:spAutoFit/>
+          </a:bodyPr>
+          <a:lstStyle/>
+          <a:p>
+            <a:pPr algn="l"/>
+            <a:r>
+              <a:rPr sz="1500" b="0">
+                <a:solidFill>
+                  <a:srgbClr val="1A202C"/>
+                </a:solidFill>
+                <a:latin typeface="Arial"/>
+              </a:rPr>
+              <a:t>Course link: relational query processing uses operators such as join, selection, grouping, and ordering.</a:t>
+            </a:r>
+          </a:p>
+        </p:txBody>
+      </p:sp>
+      <p:sp>
+        <p:nvSpPr>
+          <p:cNvPr id="12" name="Rounded Rectangle 11"/>
+          <p:cNvSpPr/>
+          <p:nvPr/>
+        </p:nvSpPr>
+        <p:spPr>
+          <a:xfrm>
+            <a:off x="6355080" y="1417320"/>
+            <a:ext cx="5120640" cy="4434840"/>
+          </a:xfrm>
+          <a:prstGeom prst="roundRect">
+            <a:avLst/>
+          </a:prstGeom>
+          <a:solidFill>
+            <a:srgbClr val="FBFBFB"/>
+          </a:solidFill>
+          <a:ln w="15240">
+            <a:solidFill>
+              <a:srgbClr val="DCDCDC"/>
+            </a:solidFill>
+          </a:ln>
+        </p:spPr>
+        <p:style>
+          <a:lnRef idx="1">
+            <a:schemeClr val="accent1"/>
+          </a:lnRef>
+          <a:fillRef idx="3">
+            <a:schemeClr val="accent1"/>
+          </a:fillRef>
+          <a:effectRef idx="2">
+            <a:schemeClr val="accent1"/>
+          </a:effectRef>
+          <a:fontRef idx="minor">
+            <a:schemeClr val="lt1"/>
+          </a:fontRef>
+        </p:style>
+        <p:txBody>
+          <a:bodyPr rtlCol="0" anchor="ctr"/>
+          <a:lstStyle/>
+          <a:p>
+            <a:pPr algn="ctr"/>
+          </a:p>
+        </p:txBody>
+      </p:sp>
+      <p:sp>
+        <p:nvSpPr>
+          <p:cNvPr id="13" name="TextBox 12"/>
+          <p:cNvSpPr txBox="1"/>
+          <p:nvPr/>
+        </p:nvSpPr>
+        <p:spPr>
+          <a:xfrm>
+            <a:off x="6629400" y="1691640"/>
+            <a:ext cx="3840480" cy="274320"/>
+          </a:xfrm>
+          <a:prstGeom prst="rect">
+            <a:avLst/>
+          </a:prstGeom>
+          <a:noFill/>
+        </p:spPr>
+        <p:txBody>
+          <a:bodyPr wrap="square" lIns="54864" rIns="54864" tIns="27432" bIns="27432">
+            <a:spAutoFit/>
+          </a:bodyPr>
+          <a:lstStyle/>
+          <a:p>
+            <a:pPr algn="l"/>
+            <a:r>
+              <a:rPr sz="1800" b="1">
+                <a:solidFill>
+                  <a:srgbClr val="52121E"/>
+                </a:solidFill>
+                <a:latin typeface="Arial"/>
+              </a:rPr>
+              <a:t>Neo4j: relationships as edges</a:t>
+            </a:r>
+          </a:p>
+        </p:txBody>
+      </p:sp>
+      <p:sp>
+        <p:nvSpPr>
+          <p:cNvPr id="14" name="TextBox 13"/>
+          <p:cNvSpPr txBox="1"/>
+          <p:nvPr/>
+        </p:nvSpPr>
+        <p:spPr>
+          <a:xfrm>
+            <a:off x="6629400" y="2148840"/>
+            <a:ext cx="4343400" cy="2286000"/>
+          </a:xfrm>
+          <a:prstGeom prst="rect">
+            <a:avLst/>
+          </a:prstGeom>
+          <a:noFill/>
+        </p:spPr>
+        <p:txBody>
+          <a:bodyPr wrap="square" lIns="54864" rIns="54864" tIns="27432" bIns="27432">
+            <a:spAutoFit/>
+          </a:bodyPr>
+          <a:lstStyle/>
+          <a:p>
+            <a:pPr algn="l">
+              <a:spcAft>
+                <a:spcPts val="500"/>
+              </a:spcAft>
+            </a:pPr>
+            <a:r>
+              <a:rPr sz="1700" b="0">
+                <a:solidFill>
+                  <a:srgbClr val="1A202C"/>
+                </a:solidFill>
+                <a:latin typeface="Arial"/>
+              </a:rPr>
+              <a:t>- Relationships are stored directly as graph edges</a:t>
+            </a:r>
+            <a:br/>
+            <a:r>
+              <a:rPr sz="1700" b="0">
+                <a:solidFill>
+                  <a:srgbClr val="1A202C"/>
+                </a:solidFill>
+                <a:latin typeface="Arial"/>
+              </a:rPr>
+              <a:t>- Cypher expresses paths with MATCH patterns</a:t>
+            </a:r>
+            <a:br/>
+            <a:r>
+              <a:rPr sz="1700" b="0">
+                <a:solidFill>
+                  <a:srgbClr val="1A202C"/>
+                </a:solidFill>
+                <a:latin typeface="Arial"/>
+              </a:rPr>
+              <a:t>- Good for citation paths and author networks</a:t>
+            </a:r>
+          </a:p>
+        </p:txBody>
+      </p:sp>
+      <p:sp>
+        <p:nvSpPr>
+          <p:cNvPr id="15" name="TextBox 14"/>
+          <p:cNvSpPr txBox="1"/>
+          <p:nvPr/>
+        </p:nvSpPr>
+        <p:spPr>
+          <a:xfrm>
+            <a:off x="6629400" y="4892040"/>
+            <a:ext cx="4343400" cy="502920"/>
+          </a:xfrm>
+          <a:prstGeom prst="rect">
+            <a:avLst/>
+          </a:prstGeom>
+          <a:noFill/>
+        </p:spPr>
+        <p:txBody>
+          <a:bodyPr wrap="square" lIns="54864" rIns="54864" tIns="27432" bIns="27432">
+            <a:spAutoFit/>
+          </a:bodyPr>
+          <a:lstStyle/>
+          <a:p>
+            <a:pPr algn="l"/>
+            <a:r>
+              <a:rPr sz="1500" b="0">
+                <a:solidFill>
+                  <a:srgbClr val="1A202C"/>
+                </a:solidFill>
+                <a:latin typeface="Arial"/>
+              </a:rPr>
+              <a:t>Course link: graph databases query by traversing paths instead of reconstructing paths through joins.</a:t>
+            </a:r>
+          </a:p>
+        </p:txBody>
+      </p:sp>
+    </p:spTree>
+  </p:cSld>
+  <p:clrMapOvr>
+    <a:masterClrMapping/>
+  </p:clrMapOvr>
+</p:sld>
+</file>
+
+<file path=ppt/slides/slide21.xml><?xml version="1.0" encoding="utf-8"?>
+<p:sld xmlns:a="http://schemas.openxmlformats.org/drawingml/2006/main" xmlns:p="http://schemas.openxmlformats.org/presentationml/2006/main" xmlns:r="http://schemas.openxmlformats.org/officeDocument/2006/relationships">
+  <p:cSld>
+    <p:spTree>
+      <p:nvGrpSpPr>
+        <p:cNvPr id="1" name=""/>
+        <p:cNvGrpSpPr/>
+        <p:nvPr/>
+      </p:nvGrpSpPr>
+      <p:grpSpPr/>
+      <p:sp>
+        <p:nvSpPr>
+          <p:cNvPr id="2" name="Rectangle 1"/>
+          <p:cNvSpPr/>
+          <p:nvPr/>
+        </p:nvSpPr>
+        <p:spPr>
+          <a:xfrm>
+            <a:off x="0" y="0"/>
+            <a:ext cx="12191695" cy="457200"/>
+          </a:xfrm>
+          <a:prstGeom prst="rect">
+            <a:avLst/>
+          </a:prstGeom>
+          <a:solidFill>
+            <a:srgbClr val="822332"/>
+          </a:solidFill>
+          <a:ln>
+            <a:noFill/>
+          </a:ln>
+        </p:spPr>
+        <p:style>
+          <a:lnRef idx="1">
+            <a:schemeClr val="accent1"/>
+          </a:lnRef>
+          <a:fillRef idx="3">
+            <a:schemeClr val="accent1"/>
+          </a:fillRef>
+          <a:effectRef idx="2">
+            <a:schemeClr val="accent1"/>
+          </a:effectRef>
+          <a:fontRef idx="minor">
+            <a:schemeClr val="lt1"/>
+          </a:fontRef>
+        </p:style>
+        <p:txBody>
+          <a:bodyPr rtlCol="0" anchor="ctr"/>
+          <a:lstStyle/>
+          <a:p>
+            <a:pPr algn="ctr"/>
+          </a:p>
+        </p:txBody>
+      </p:sp>
+      <p:sp>
+        <p:nvSpPr>
+          <p:cNvPr id="3" name="TextBox 2"/>
+          <p:cNvSpPr txBox="1"/>
+          <p:nvPr/>
+        </p:nvSpPr>
+        <p:spPr>
+          <a:xfrm>
+            <a:off x="502920" y="594360"/>
+            <a:ext cx="8961120" cy="411480"/>
+          </a:xfrm>
+          <a:prstGeom prst="rect">
+            <a:avLst/>
+          </a:prstGeom>
+          <a:noFill/>
+        </p:spPr>
+        <p:txBody>
+          <a:bodyPr wrap="square" lIns="54864" rIns="54864" tIns="27432" bIns="27432">
+            <a:spAutoFit/>
+          </a:bodyPr>
+          <a:lstStyle/>
+          <a:p>
+            <a:pPr algn="l"/>
+            <a:r>
+              <a:rPr sz="2700" b="1">
+                <a:solidFill>
+                  <a:srgbClr val="52121E"/>
+                </a:solidFill>
+                <a:latin typeface="Arial"/>
+              </a:rPr>
+              <a:t>Course Connection: Scope Choices</a:t>
+            </a:r>
+          </a:p>
+        </p:txBody>
+      </p:sp>
+      <p:sp>
+        <p:nvSpPr>
+          <p:cNvPr id="4" name="TextBox 3"/>
+          <p:cNvSpPr txBox="1"/>
+          <p:nvPr/>
+        </p:nvSpPr>
+        <p:spPr>
+          <a:xfrm>
+            <a:off x="530352" y="987552"/>
+            <a:ext cx="8686800" cy="256032"/>
+          </a:xfrm>
+          <a:prstGeom prst="rect">
+            <a:avLst/>
+          </a:prstGeom>
+          <a:noFill/>
+        </p:spPr>
+        <p:txBody>
+          <a:bodyPr wrap="square" lIns="54864" rIns="54864" tIns="27432" bIns="27432">
+            <a:spAutoFit/>
+          </a:bodyPr>
+          <a:lstStyle/>
+          <a:p>
+            <a:pPr algn="l"/>
+            <a:r>
+              <a:rPr sz="1200" b="0">
+                <a:solidFill>
+                  <a:srgbClr val="5C6876"/>
+                </a:solidFill>
+                <a:latin typeface="Arial"/>
+              </a:rPr>
+              <a:t>Why the project uses property graphs, not every course topic</a:t>
+            </a:r>
+          </a:p>
+        </p:txBody>
+      </p:sp>
+      <p:pic>
+        <p:nvPicPr>
+          <p:cNvPr id="5" name="Picture 4" descr="image.png"/>
+          <p:cNvPicPr>
+            <a:picLocks noChangeAspect="1"/>
+          </p:cNvPicPr>
+          <p:nvPr/>
+        </p:nvPicPr>
+        <p:blipFill>
+          <a:blip r:embed="rId2"/>
+          <a:stretch>
+            <a:fillRect/>
+          </a:stretch>
+        </p:blipFill>
+        <p:spPr>
+          <a:xfrm>
+            <a:off x="11018520" y="566928"/>
+            <a:ext cx="566928" cy="679252"/>
+          </a:xfrm>
+          <a:prstGeom prst="rect">
+            <a:avLst/>
+          </a:prstGeom>
+        </p:spPr>
+      </p:pic>
+      <p:sp>
+        <p:nvSpPr>
+          <p:cNvPr id="6" name="TextBox 5"/>
+          <p:cNvSpPr txBox="1"/>
+          <p:nvPr/>
+        </p:nvSpPr>
+        <p:spPr>
+          <a:xfrm>
+            <a:off x="502920" y="6446520"/>
+            <a:ext cx="4206240" cy="201168"/>
+          </a:xfrm>
+          <a:prstGeom prst="rect">
+            <a:avLst/>
+          </a:prstGeom>
+          <a:noFill/>
+        </p:spPr>
+        <p:txBody>
+          <a:bodyPr wrap="square" lIns="54864" rIns="54864" tIns="27432" bIns="27432">
+            <a:spAutoFit/>
+          </a:bodyPr>
+          <a:lstStyle/>
+          <a:p>
+            <a:pPr algn="l"/>
+            <a:r>
+              <a:rPr sz="800" b="0">
+                <a:solidFill>
+                  <a:srgbClr val="5C6876"/>
+                </a:solidFill>
+                <a:latin typeface="Arial"/>
+              </a:rPr>
+              <a:t>OpenAlex AI DBMS Comparison</a:t>
+            </a:r>
+          </a:p>
+        </p:txBody>
+      </p:sp>
+      <p:sp>
+        <p:nvSpPr>
+          <p:cNvPr id="7" name="TextBox 6"/>
+          <p:cNvSpPr txBox="1"/>
+          <p:nvPr/>
+        </p:nvSpPr>
+        <p:spPr>
+          <a:xfrm>
+            <a:off x="11292840" y="6446520"/>
+            <a:ext cx="411480" cy="201168"/>
+          </a:xfrm>
+          <a:prstGeom prst="rect">
+            <a:avLst/>
+          </a:prstGeom>
+          <a:noFill/>
+        </p:spPr>
+        <p:txBody>
+          <a:bodyPr wrap="square" lIns="54864" rIns="54864" tIns="27432" bIns="27432">
+            <a:spAutoFit/>
+          </a:bodyPr>
+          <a:lstStyle/>
+          <a:p>
+            <a:pPr algn="r"/>
+            <a:r>
+              <a:rPr sz="800" b="0">
+                <a:solidFill>
+                  <a:srgbClr val="5C6876"/>
+                </a:solidFill>
+                <a:latin typeface="Arial"/>
+              </a:rPr>
+              <a:t>21</a:t>
+            </a:r>
+          </a:p>
+        </p:txBody>
+      </p:sp>
+      <p:sp>
+        <p:nvSpPr>
+          <p:cNvPr id="8" name="Rounded Rectangle 7"/>
+          <p:cNvSpPr/>
+          <p:nvPr/>
+        </p:nvSpPr>
+        <p:spPr>
+          <a:xfrm>
+            <a:off x="685800" y="1417320"/>
+            <a:ext cx="3337560" cy="4434840"/>
+          </a:xfrm>
+          <a:prstGeom prst="roundRect">
+            <a:avLst/>
+          </a:prstGeom>
+          <a:solidFill>
+            <a:srgbClr val="FBFBFB"/>
+          </a:solidFill>
+          <a:ln w="15240">
+            <a:solidFill>
+              <a:srgbClr val="DCDCDC"/>
+            </a:solidFill>
+          </a:ln>
+        </p:spPr>
+        <p:style>
+          <a:lnRef idx="1">
+            <a:schemeClr val="accent1"/>
+          </a:lnRef>
+          <a:fillRef idx="3">
+            <a:schemeClr val="accent1"/>
+          </a:fillRef>
+          <a:effectRef idx="2">
+            <a:schemeClr val="accent1"/>
+          </a:effectRef>
+          <a:fontRef idx="minor">
+            <a:schemeClr val="lt1"/>
+          </a:fontRef>
+        </p:style>
+        <p:txBody>
+          <a:bodyPr rtlCol="0" anchor="ctr"/>
+          <a:lstStyle/>
+          <a:p>
+            <a:pPr algn="ctr"/>
+          </a:p>
+        </p:txBody>
+      </p:sp>
+      <p:sp>
+        <p:nvSpPr>
+          <p:cNvPr id="9" name="TextBox 8"/>
+          <p:cNvSpPr txBox="1"/>
+          <p:nvPr/>
+        </p:nvSpPr>
+        <p:spPr>
+          <a:xfrm>
+            <a:off x="960120" y="1691640"/>
+            <a:ext cx="2286000" cy="274320"/>
+          </a:xfrm>
+          <a:prstGeom prst="rect">
+            <a:avLst/>
+          </a:prstGeom>
+          <a:noFill/>
+        </p:spPr>
+        <p:txBody>
+          <a:bodyPr wrap="square" lIns="54864" rIns="54864" tIns="27432" bIns="27432">
+            <a:spAutoFit/>
+          </a:bodyPr>
+          <a:lstStyle/>
+          <a:p>
+            <a:pPr algn="l"/>
+            <a:r>
+              <a:rPr sz="1800" b="1">
+                <a:solidFill>
+                  <a:srgbClr val="52121E"/>
+                </a:solidFill>
+                <a:latin typeface="Arial"/>
+              </a:rPr>
+              <a:t>RDF databases</a:t>
+            </a:r>
+          </a:p>
+        </p:txBody>
+      </p:sp>
+      <p:sp>
+        <p:nvSpPr>
+          <p:cNvPr id="10" name="TextBox 9"/>
+          <p:cNvSpPr txBox="1"/>
+          <p:nvPr/>
+        </p:nvSpPr>
+        <p:spPr>
+          <a:xfrm>
+            <a:off x="960120" y="2148840"/>
+            <a:ext cx="2651760" cy="2514600"/>
+          </a:xfrm>
+          <a:prstGeom prst="rect">
+            <a:avLst/>
+          </a:prstGeom>
+          <a:noFill/>
+        </p:spPr>
+        <p:txBody>
+          <a:bodyPr wrap="square" lIns="54864" rIns="54864" tIns="27432" bIns="27432">
+            <a:spAutoFit/>
+          </a:bodyPr>
+          <a:lstStyle/>
+          <a:p>
+            <a:pPr algn="l">
+              <a:spcAft>
+                <a:spcPts val="500"/>
+              </a:spcAft>
+            </a:pPr>
+            <a:r>
+              <a:rPr sz="1600" b="0">
+                <a:solidFill>
+                  <a:srgbClr val="1A202C"/>
+                </a:solidFill>
+                <a:latin typeface="Arial"/>
+              </a:rPr>
+              <a:t>- RDF uses triples and semantic vocabularies</a:t>
+            </a:r>
+            <a:br/>
+            <a:r>
+              <a:rPr sz="1600" b="0">
+                <a:solidFill>
+                  <a:srgbClr val="1A202C"/>
+                </a:solidFill>
+                <a:latin typeface="Arial"/>
+              </a:rPr>
+              <a:t>- Useful for ontology-oriented data</a:t>
+            </a:r>
+            <a:br/>
+            <a:r>
+              <a:rPr sz="1600" b="0">
+                <a:solidFill>
+                  <a:srgbClr val="1A202C"/>
+                </a:solidFill>
+                <a:latin typeface="Arial"/>
+              </a:rPr>
+              <a:t>- We did not use RDF because the project compares PostgreSQL with Neo4j property graphs</a:t>
+            </a:r>
+          </a:p>
+        </p:txBody>
+      </p:sp>
+      <p:sp>
+        <p:nvSpPr>
+          <p:cNvPr id="11" name="Rounded Rectangle 10"/>
+          <p:cNvSpPr/>
+          <p:nvPr/>
+        </p:nvSpPr>
+        <p:spPr>
+          <a:xfrm>
+            <a:off x="4480560" y="1417320"/>
+            <a:ext cx="3337560" cy="4434840"/>
+          </a:xfrm>
+          <a:prstGeom prst="roundRect">
+            <a:avLst/>
+          </a:prstGeom>
+          <a:solidFill>
+            <a:srgbClr val="FBFBFB"/>
+          </a:solidFill>
+          <a:ln w="15240">
+            <a:solidFill>
+              <a:srgbClr val="DCDCDC"/>
+            </a:solidFill>
+          </a:ln>
+        </p:spPr>
+        <p:style>
+          <a:lnRef idx="1">
+            <a:schemeClr val="accent1"/>
+          </a:lnRef>
+          <a:fillRef idx="3">
+            <a:schemeClr val="accent1"/>
+          </a:fillRef>
+          <a:effectRef idx="2">
+            <a:schemeClr val="accent1"/>
+          </a:effectRef>
+          <a:fontRef idx="minor">
+            <a:schemeClr val="lt1"/>
+          </a:fontRef>
+        </p:style>
+        <p:txBody>
+          <a:bodyPr rtlCol="0" anchor="ctr"/>
+          <a:lstStyle/>
+          <a:p>
+            <a:pPr algn="ctr"/>
+          </a:p>
+        </p:txBody>
+      </p:sp>
+      <p:sp>
+        <p:nvSpPr>
+          <p:cNvPr id="12" name="TextBox 11"/>
+          <p:cNvSpPr txBox="1"/>
+          <p:nvPr/>
+        </p:nvSpPr>
+        <p:spPr>
+          <a:xfrm>
+            <a:off x="4754880" y="1691640"/>
+            <a:ext cx="2377440" cy="274320"/>
+          </a:xfrm>
+          <a:prstGeom prst="rect">
+            <a:avLst/>
+          </a:prstGeom>
+          <a:noFill/>
+        </p:spPr>
+        <p:txBody>
+          <a:bodyPr wrap="square" lIns="54864" rIns="54864" tIns="27432" bIns="27432">
+            <a:spAutoFit/>
+          </a:bodyPr>
+          <a:lstStyle/>
+          <a:p>
+            <a:pPr algn="l"/>
+            <a:r>
+              <a:rPr sz="1800" b="1">
+                <a:solidFill>
+                  <a:srgbClr val="52121E"/>
+                </a:solidFill>
+                <a:latin typeface="Arial"/>
+              </a:rPr>
+              <a:t>Data warehousing</a:t>
+            </a:r>
+          </a:p>
+        </p:txBody>
+      </p:sp>
+      <p:sp>
+        <p:nvSpPr>
+          <p:cNvPr id="13" name="TextBox 12"/>
+          <p:cNvSpPr txBox="1"/>
+          <p:nvPr/>
+        </p:nvSpPr>
+        <p:spPr>
+          <a:xfrm>
+            <a:off x="4754880" y="2148840"/>
+            <a:ext cx="2651760" cy="2514600"/>
+          </a:xfrm>
+          <a:prstGeom prst="rect">
+            <a:avLst/>
+          </a:prstGeom>
+          <a:noFill/>
+        </p:spPr>
+        <p:txBody>
+          <a:bodyPr wrap="square" lIns="54864" rIns="54864" tIns="27432" bIns="27432">
+            <a:spAutoFit/>
+          </a:bodyPr>
+          <a:lstStyle/>
+          <a:p>
+            <a:pPr algn="l">
+              <a:spcAft>
+                <a:spcPts val="500"/>
+              </a:spcAft>
+            </a:pPr>
+            <a:r>
+              <a:rPr sz="1600" b="0">
+                <a:solidFill>
+                  <a:srgbClr val="1A202C"/>
+                </a:solidFill>
+                <a:latin typeface="Arial"/>
+              </a:rPr>
+              <a:t>- DW focuses on fact tables, dimensions, star schemas, and OLAP</a:t>
+            </a:r>
+            <a:br/>
+            <a:r>
+              <a:rPr sz="1600" b="0">
+                <a:solidFill>
+                  <a:srgbClr val="1A202C"/>
+                </a:solidFill>
+                <a:latin typeface="Arial"/>
+              </a:rPr>
+              <a:t>- Our approved topic is DBMS comparison</a:t>
+            </a:r>
+            <a:br/>
+            <a:r>
+              <a:rPr sz="1600" b="0">
+                <a:solidFill>
+                  <a:srgbClr val="1A202C"/>
+                </a:solidFill>
+                <a:latin typeface="Arial"/>
+              </a:rPr>
+              <a:t>- So we do not present this as a warehouse project</a:t>
+            </a:r>
+          </a:p>
+        </p:txBody>
+      </p:sp>
+      <p:sp>
+        <p:nvSpPr>
+          <p:cNvPr id="14" name="Rounded Rectangle 13"/>
+          <p:cNvSpPr/>
+          <p:nvPr/>
+        </p:nvSpPr>
+        <p:spPr>
+          <a:xfrm>
+            <a:off x="8275320" y="1417320"/>
+            <a:ext cx="3337560" cy="4434840"/>
+          </a:xfrm>
+          <a:prstGeom prst="roundRect">
+            <a:avLst/>
+          </a:prstGeom>
+          <a:solidFill>
+            <a:srgbClr val="FBFBFB"/>
+          </a:solidFill>
+          <a:ln w="15240">
+            <a:solidFill>
+              <a:srgbClr val="DCDCDC"/>
+            </a:solidFill>
+          </a:ln>
+        </p:spPr>
+        <p:style>
+          <a:lnRef idx="1">
+            <a:schemeClr val="accent1"/>
+          </a:lnRef>
+          <a:fillRef idx="3">
+            <a:schemeClr val="accent1"/>
+          </a:fillRef>
+          <a:effectRef idx="2">
+            <a:schemeClr val="accent1"/>
+          </a:effectRef>
+          <a:fontRef idx="minor">
+            <a:schemeClr val="lt1"/>
+          </a:fontRef>
+        </p:style>
+        <p:txBody>
+          <a:bodyPr rtlCol="0" anchor="ctr"/>
+          <a:lstStyle/>
+          <a:p>
+            <a:pPr algn="ctr"/>
+          </a:p>
+        </p:txBody>
+      </p:sp>
+      <p:sp>
+        <p:nvSpPr>
+          <p:cNvPr id="15" name="TextBox 14"/>
+          <p:cNvSpPr txBox="1"/>
+          <p:nvPr/>
+        </p:nvSpPr>
+        <p:spPr>
+          <a:xfrm>
+            <a:off x="8549640" y="1691640"/>
+            <a:ext cx="2377440" cy="274320"/>
+          </a:xfrm>
+          <a:prstGeom prst="rect">
+            <a:avLst/>
+          </a:prstGeom>
+          <a:noFill/>
+        </p:spPr>
+        <p:txBody>
+          <a:bodyPr wrap="square" lIns="54864" rIns="54864" tIns="27432" bIns="27432">
+            <a:spAutoFit/>
+          </a:bodyPr>
+          <a:lstStyle/>
+          <a:p>
+            <a:pPr algn="l"/>
+            <a:r>
+              <a:rPr sz="1800" b="1">
+                <a:solidFill>
+                  <a:srgbClr val="52121E"/>
+                </a:solidFill>
+                <a:latin typeface="Arial"/>
+              </a:rPr>
+              <a:t>Query evaluation</a:t>
+            </a:r>
+          </a:p>
+        </p:txBody>
+      </p:sp>
+      <p:sp>
+        <p:nvSpPr>
+          <p:cNvPr id="16" name="TextBox 15"/>
+          <p:cNvSpPr txBox="1"/>
+          <p:nvPr/>
+        </p:nvSpPr>
+        <p:spPr>
+          <a:xfrm>
+            <a:off x="8549640" y="2148840"/>
+            <a:ext cx="2651760" cy="2514600"/>
+          </a:xfrm>
+          <a:prstGeom prst="rect">
+            <a:avLst/>
+          </a:prstGeom>
+          <a:noFill/>
+        </p:spPr>
+        <p:txBody>
+          <a:bodyPr wrap="square" lIns="54864" rIns="54864" tIns="27432" bIns="27432">
+            <a:spAutoFit/>
+          </a:bodyPr>
+          <a:lstStyle/>
+          <a:p>
+            <a:pPr algn="l">
+              <a:spcAft>
+                <a:spcPts val="500"/>
+              </a:spcAft>
+            </a:pPr>
+            <a:r>
+              <a:rPr sz="1600" b="0">
+                <a:solidFill>
+                  <a:srgbClr val="1A202C"/>
+                </a:solidFill>
+                <a:latin typeface="Arial"/>
+              </a:rPr>
+              <a:t>- Benchmarks connect to operator evaluation</a:t>
+            </a:r>
+            <a:br/>
+            <a:r>
+              <a:rPr sz="1600" b="0">
+                <a:solidFill>
+                  <a:srgbClr val="1A202C"/>
+                </a:solidFill>
+                <a:latin typeface="Arial"/>
+              </a:rPr>
+              <a:t>- PostgreSQL uses EXPLAIN ANALYZE</a:t>
+            </a:r>
+            <a:br/>
+            <a:r>
+              <a:rPr sz="1600" b="0">
+                <a:solidFill>
+                  <a:srgbClr val="1A202C"/>
+                </a:solidFill>
+                <a:latin typeface="Arial"/>
+              </a:rPr>
+              <a:t>- Neo4j uses PROFILE</a:t>
+            </a:r>
+            <a:br/>
+            <a:r>
+              <a:rPr sz="1600" b="0">
+                <a:solidFill>
+                  <a:srgbClr val="1A202C"/>
+                </a:solidFill>
+                <a:latin typeface="Arial"/>
+              </a:rPr>
+              <a:t>- Indexes and constraints influence access paths</a:t>
             </a:r>
           </a:p>
         </p:txBody>

--- a/docs/OpenAlex_DBMS_Comparison_Sapienza.pptx
+++ b/docs/OpenAlex_DBMS_Comparison_Sapienza.pptx
@@ -26,6 +26,7 @@
     <p:sldId id="274" r:id="rId25"/>
     <p:sldId id="275" r:id="rId26"/>
     <p:sldId id="276" r:id="rId27"/>
+    <p:sldId id="277" r:id="rId28"/>
   </p:sldIdLst>
   <p:sldSz cx="12191695" cy="6858000" type="screen4x3"/>
   <p:notesSz cx="6858000" cy="9144000"/>
@@ -6894,43 +6895,80 @@
           <a:p>
             <a:pPr algn="l">
               <a:spcAft>
-                <a:spcPts val="600"/>
+                <a:spcPts val="200"/>
               </a:spcAft>
               <a:defRPr sz="1600"/>
             </a:pPr>
             <a:r>
-              <a:rPr sz="1600" b="0">
-                <a:solidFill>
-                  <a:srgbClr val="1A202C"/>
-                </a:solidFill>
-                <a:latin typeface="Arial"/>
+              <a:rPr sz="1400">
+                <a:solidFill>
+                  <a:srgbClr val="1F2430"/>
+                </a:solidFill>
+                <a:latin typeface="Aptos"/>
               </a:rPr>
               <a:t>- Author citation network</a:t>
             </a:r>
-            <a:br/>
-            <a:r>
-              <a:rPr sz="1600">
-                <a:solidFill>
-                  <a:srgbClr val="1A202C"/>
-                </a:solidFill>
-              </a:rPr>
-              <a:t>- Relationship traversal</a:t>
-            </a:r>
-            <a:br/>
-            <a:r>
-              <a:rPr sz="1600">
-                <a:solidFill>
-                  <a:srgbClr val="1A202C"/>
-                </a:solidFill>
+          </a:p>
+          <a:p>
+            <a:pPr>
+              <a:spcAft>
+                <a:spcPts val="200"/>
+              </a:spcAft>
+            </a:pPr>
+            <a:r>
+              <a:rPr sz="1400">
+                <a:solidFill>
+                  <a:srgbClr val="1F2430"/>
+                </a:solidFill>
+                <a:latin typeface="Aptos"/>
+              </a:rPr>
+              <a:t>- Two supplemental graph-heavy wins</a:t>
+            </a:r>
+          </a:p>
+          <a:p>
+            <a:pPr>
+              <a:spcAft>
+                <a:spcPts val="200"/>
+              </a:spcAft>
+            </a:pPr>
+            <a:r>
+              <a:rPr sz="1400">
+                <a:solidFill>
+                  <a:srgbClr val="1F2430"/>
+                </a:solidFill>
+                <a:latin typeface="Aptos"/>
+              </a:rPr>
+              <a:t>- Multi-hop traversal + topic overlap</a:t>
+            </a:r>
+          </a:p>
+          <a:p>
+            <a:pPr>
+              <a:spcAft>
+                <a:spcPts val="200"/>
+              </a:spcAft>
+            </a:pPr>
+            <a:r>
+              <a:rPr sz="1400">
+                <a:solidFill>
+                  <a:srgbClr val="1F2430"/>
+                </a:solidFill>
+                <a:latin typeface="Aptos"/>
               </a:rPr>
               <a:t>- Path-style graph questions</a:t>
             </a:r>
-            <a:br/>
-            <a:r>
-              <a:rPr sz="1600">
-                <a:solidFill>
-                  <a:srgbClr val="1A202C"/>
-                </a:solidFill>
+          </a:p>
+          <a:p>
+            <a:pPr>
+              <a:spcAft>
+                <a:spcPts val="200"/>
+              </a:spcAft>
+            </a:pPr>
+            <a:r>
+              <a:rPr sz="1400">
+                <a:solidFill>
+                  <a:srgbClr val="1F2430"/>
+                </a:solidFill>
+                <a:latin typeface="Aptos"/>
               </a:rPr>
               <a:t>- Visual exploration</a:t>
             </a:r>
@@ -8244,13 +8282,13 @@
           <a:p>
             <a:pPr algn="l"/>
             <a:r>
-              <a:rPr sz="2100" b="1">
+              <a:rPr sz="2000" b="1">
                 <a:solidFill>
                   <a:srgbClr val="1F2430"/>
                 </a:solidFill>
                 <a:latin typeface="Aptos"/>
               </a:rPr>
-              <a:t>PostgreSQL is the better fit for structured tabular analysis and most aggregations. Neo4j is more natural for citation paths and author networks.</a:t>
+              <a:t>PostgreSQL is the better fit for structured tabular analysis in the main workload. Neo4j becomes stronger when relationship traversal is central, especially citation networks and shared-topic citation paths.</a:t>
             </a:r>
           </a:p>
         </p:txBody>
@@ -10826,6 +10864,660 @@
                 <a:latin typeface="Arial"/>
               </a:rPr>
               <a:t>- Indexes and constraints influence access paths</a:t>
+            </a:r>
+          </a:p>
+        </p:txBody>
+      </p:sp>
+    </p:spTree>
+  </p:cSld>
+  <p:clrMapOvr>
+    <a:masterClrMapping/>
+  </p:clrMapOvr>
+</p:sld>
+</file>
+
+<file path=ppt/slides/slide22.xml><?xml version="1.0" encoding="utf-8"?>
+<p:sld xmlns:a="http://schemas.openxmlformats.org/drawingml/2006/main" xmlns:p="http://schemas.openxmlformats.org/presentationml/2006/main" xmlns:r="http://schemas.openxmlformats.org/officeDocument/2006/relationships">
+  <p:cSld>
+    <p:bg>
+      <p:bgPr>
+        <a:solidFill>
+          <a:srgbClr val="FFFFFF"/>
+        </a:solidFill>
+        <a:effectLst/>
+      </p:bgPr>
+    </p:bg>
+    <p:spTree>
+      <p:nvGrpSpPr>
+        <p:cNvPr id="1" name=""/>
+        <p:cNvGrpSpPr/>
+        <p:nvPr/>
+      </p:nvGrpSpPr>
+      <p:grpSpPr/>
+      <p:sp>
+        <p:nvSpPr>
+          <p:cNvPr id="2" name="Rectangle 1"/>
+          <p:cNvSpPr/>
+          <p:nvPr/>
+        </p:nvSpPr>
+        <p:spPr>
+          <a:xfrm>
+            <a:off x="0" y="0"/>
+            <a:ext cx="12191695" cy="310896"/>
+          </a:xfrm>
+          <a:prstGeom prst="rect">
+            <a:avLst/>
+          </a:prstGeom>
+          <a:solidFill>
+            <a:srgbClr val="822332"/>
+          </a:solidFill>
+          <a:ln>
+            <a:noFill/>
+          </a:ln>
+        </p:spPr>
+        <p:style>
+          <a:lnRef idx="1">
+            <a:schemeClr val="accent1"/>
+          </a:lnRef>
+          <a:fillRef idx="3">
+            <a:schemeClr val="accent1"/>
+          </a:fillRef>
+          <a:effectRef idx="2">
+            <a:schemeClr val="accent1"/>
+          </a:effectRef>
+          <a:fontRef idx="minor">
+            <a:schemeClr val="lt1"/>
+          </a:fontRef>
+        </p:style>
+        <p:txBody>
+          <a:bodyPr rtlCol="0" anchor="ctr"/>
+          <a:lstStyle/>
+          <a:p>
+            <a:pPr algn="ctr"/>
+          </a:p>
+        </p:txBody>
+      </p:sp>
+      <p:pic>
+        <p:nvPicPr>
+          <p:cNvPr id="3" name="Picture 2" descr="image.png"/>
+          <p:cNvPicPr>
+            <a:picLocks noChangeAspect="1"/>
+          </p:cNvPicPr>
+          <p:nvPr/>
+        </p:nvPicPr>
+        <p:blipFill>
+          <a:blip r:embed="rId2"/>
+          <a:stretch>
+            <a:fillRect/>
+          </a:stretch>
+        </p:blipFill>
+        <p:spPr>
+          <a:xfrm>
+            <a:off x="10287000" y="438912"/>
+            <a:ext cx="530352" cy="530352"/>
+          </a:xfrm>
+          <a:prstGeom prst="rect">
+            <a:avLst/>
+          </a:prstGeom>
+        </p:spPr>
+      </p:pic>
+      <p:sp>
+        <p:nvSpPr>
+          <p:cNvPr id="4" name="TextBox 3"/>
+          <p:cNvSpPr txBox="1"/>
+          <p:nvPr/>
+        </p:nvSpPr>
+        <p:spPr>
+          <a:xfrm>
+            <a:off x="502920" y="530352"/>
+            <a:ext cx="8961120" cy="384048"/>
+          </a:xfrm>
+          <a:prstGeom prst="rect">
+            <a:avLst/>
+          </a:prstGeom>
+          <a:noFill/>
+        </p:spPr>
+        <p:txBody>
+          <a:bodyPr wrap="none">
+            <a:spAutoFit/>
+          </a:bodyPr>
+          <a:lstStyle/>
+          <a:p>
+            <a:r>
+              <a:rPr sz="2500" b="1">
+                <a:solidFill>
+                  <a:srgbClr val="822332"/>
+                </a:solidFill>
+                <a:latin typeface="Aptos Display"/>
+              </a:rPr>
+              <a:t>Supplemental Benchmark: Graph-Focused Workload</a:t>
+            </a:r>
+          </a:p>
+        </p:txBody>
+      </p:sp>
+      <p:sp>
+        <p:nvSpPr>
+          <p:cNvPr id="5" name="TextBox 4"/>
+          <p:cNvSpPr txBox="1"/>
+          <p:nvPr/>
+        </p:nvSpPr>
+        <p:spPr>
+          <a:xfrm>
+            <a:off x="512064" y="932688"/>
+            <a:ext cx="8686800" cy="256032"/>
+          </a:xfrm>
+          <a:prstGeom prst="rect">
+            <a:avLst/>
+          </a:prstGeom>
+          <a:noFill/>
+        </p:spPr>
+        <p:txBody>
+          <a:bodyPr wrap="none">
+            <a:spAutoFit/>
+          </a:bodyPr>
+          <a:lstStyle/>
+          <a:p>
+            <a:r>
+              <a:rPr sz="1000">
+                <a:solidFill>
+                  <a:srgbClr val="566373"/>
+                </a:solidFill>
+                <a:latin typeface="Aptos"/>
+              </a:rPr>
+              <a:t>Extra query pairs added to test whether Neo4j improves on more graph-shaped questions</a:t>
+            </a:r>
+          </a:p>
+        </p:txBody>
+      </p:sp>
+      <p:sp>
+        <p:nvSpPr>
+          <p:cNvPr id="6" name="Rounded Rectangle 5"/>
+          <p:cNvSpPr/>
+          <p:nvPr/>
+        </p:nvSpPr>
+        <p:spPr>
+          <a:xfrm>
+            <a:off x="658368" y="1481328"/>
+            <a:ext cx="2880360" cy="3977639"/>
+          </a:xfrm>
+          <a:prstGeom prst="roundRect">
+            <a:avLst/>
+          </a:prstGeom>
+          <a:solidFill>
+            <a:srgbClr val="FFFFFF"/>
+          </a:solidFill>
+          <a:ln w="12700">
+            <a:solidFill>
+              <a:srgbClr val="E0D2D6"/>
+            </a:solidFill>
+          </a:ln>
+        </p:spPr>
+        <p:style>
+          <a:lnRef idx="1">
+            <a:schemeClr val="accent1"/>
+          </a:lnRef>
+          <a:fillRef idx="3">
+            <a:schemeClr val="accent1"/>
+          </a:fillRef>
+          <a:effectRef idx="2">
+            <a:schemeClr val="accent1"/>
+          </a:effectRef>
+          <a:fontRef idx="minor">
+            <a:schemeClr val="lt1"/>
+          </a:fontRef>
+        </p:style>
+        <p:txBody>
+          <a:bodyPr rtlCol="0" anchor="ctr"/>
+          <a:lstStyle/>
+          <a:p>
+            <a:pPr algn="ctr"/>
+          </a:p>
+        </p:txBody>
+      </p:sp>
+      <p:sp>
+        <p:nvSpPr>
+          <p:cNvPr id="7" name="TextBox 6"/>
+          <p:cNvSpPr txBox="1"/>
+          <p:nvPr/>
+        </p:nvSpPr>
+        <p:spPr>
+          <a:xfrm>
+            <a:off x="859536" y="1682496"/>
+            <a:ext cx="2478024" cy="3657599"/>
+          </a:xfrm>
+          <a:prstGeom prst="rect">
+            <a:avLst/>
+          </a:prstGeom>
+          <a:noFill/>
+        </p:spPr>
+        <p:txBody>
+          <a:bodyPr wrap="square">
+            <a:spAutoFit/>
+          </a:bodyPr>
+          <a:lstStyle/>
+          <a:p>
+            <a:r>
+              <a:rPr sz="1400" b="1">
+                <a:solidFill>
+                  <a:srgbClr val="822332"/>
+                </a:solidFill>
+                <a:latin typeface="Aptos"/>
+              </a:rPr>
+              <a:t>What changed</a:t>
+            </a:r>
+          </a:p>
+          <a:p>
+            <a:pPr>
+              <a:spcBef>
+                <a:spcPts val="500"/>
+              </a:spcBef>
+            </a:pPr>
+            <a:r>
+              <a:rPr sz="1100">
+                <a:solidFill>
+                  <a:srgbClr val="1F2430"/>
+                </a:solidFill>
+                <a:latin typeface="Aptos"/>
+              </a:rPr>
+              <a:t>- Original 11-query benchmark kept unchanged</a:t>
+            </a:r>
+          </a:p>
+          <a:p>
+            <a:pPr>
+              <a:spcBef>
+                <a:spcPts val="500"/>
+              </a:spcBef>
+            </a:pPr>
+            <a:r>
+              <a:rPr sz="1100">
+                <a:solidFill>
+                  <a:srgbClr val="1F2430"/>
+                </a:solidFill>
+                <a:latin typeface="Aptos"/>
+              </a:rPr>
+              <a:t>- Added 7 supplemental graph-focused query pairs</a:t>
+            </a:r>
+          </a:p>
+          <a:p>
+            <a:pPr>
+              <a:spcBef>
+                <a:spcPts val="500"/>
+              </a:spcBef>
+            </a:pPr>
+            <a:r>
+              <a:rPr sz="1100">
+                <a:solidFill>
+                  <a:srgbClr val="1F2430"/>
+                </a:solidFill>
+                <a:latin typeface="Aptos"/>
+              </a:rPr>
+              <a:t>- Workload includes neighborhoods, two-hop citation paths, and topic-overlap citation networks</a:t>
+            </a:r>
+          </a:p>
+        </p:txBody>
+      </p:sp>
+      <p:sp>
+        <p:nvSpPr>
+          <p:cNvPr id="8" name="Rounded Rectangle 7"/>
+          <p:cNvSpPr/>
+          <p:nvPr/>
+        </p:nvSpPr>
+        <p:spPr>
+          <a:xfrm>
+            <a:off x="3794760" y="1481328"/>
+            <a:ext cx="3063240" cy="3977639"/>
+          </a:xfrm>
+          <a:prstGeom prst="roundRect">
+            <a:avLst/>
+          </a:prstGeom>
+          <a:solidFill>
+            <a:srgbClr val="FFFFFF"/>
+          </a:solidFill>
+          <a:ln w="12700">
+            <a:solidFill>
+              <a:srgbClr val="E0D2D6"/>
+            </a:solidFill>
+          </a:ln>
+        </p:spPr>
+        <p:style>
+          <a:lnRef idx="1">
+            <a:schemeClr val="accent1"/>
+          </a:lnRef>
+          <a:fillRef idx="3">
+            <a:schemeClr val="accent1"/>
+          </a:fillRef>
+          <a:effectRef idx="2">
+            <a:schemeClr val="accent1"/>
+          </a:effectRef>
+          <a:fontRef idx="minor">
+            <a:schemeClr val="lt1"/>
+          </a:fontRef>
+        </p:style>
+        <p:txBody>
+          <a:bodyPr rtlCol="0" anchor="ctr"/>
+          <a:lstStyle/>
+          <a:p>
+            <a:pPr algn="ctr"/>
+          </a:p>
+        </p:txBody>
+      </p:sp>
+      <p:sp>
+        <p:nvSpPr>
+          <p:cNvPr id="9" name="TextBox 8"/>
+          <p:cNvSpPr txBox="1"/>
+          <p:nvPr/>
+        </p:nvSpPr>
+        <p:spPr>
+          <a:xfrm>
+            <a:off x="3995928" y="1682496"/>
+            <a:ext cx="2660904" cy="3657599"/>
+          </a:xfrm>
+          <a:prstGeom prst="rect">
+            <a:avLst/>
+          </a:prstGeom>
+          <a:noFill/>
+        </p:spPr>
+        <p:txBody>
+          <a:bodyPr wrap="square">
+            <a:spAutoFit/>
+          </a:bodyPr>
+          <a:lstStyle/>
+          <a:p>
+            <a:r>
+              <a:rPr sz="1400" b="1">
+                <a:solidFill>
+                  <a:srgbClr val="822332"/>
+                </a:solidFill>
+                <a:latin typeface="Aptos"/>
+              </a:rPr>
+              <a:t>Measured result</a:t>
+            </a:r>
+          </a:p>
+          <a:p>
+            <a:pPr>
+              <a:spcBef>
+                <a:spcPts val="500"/>
+              </a:spcBef>
+            </a:pPr>
+            <a:r>
+              <a:rPr sz="1100">
+                <a:solidFill>
+                  <a:srgbClr val="1F2430"/>
+                </a:solidFill>
+                <a:latin typeface="Aptos"/>
+              </a:rPr>
+              <a:t>- PostgreSQL still wins small anchored lookups</a:t>
+            </a:r>
+          </a:p>
+          <a:p>
+            <a:pPr>
+              <a:spcBef>
+                <a:spcPts val="500"/>
+              </a:spcBef>
+            </a:pPr>
+            <a:r>
+              <a:rPr sz="1100">
+                <a:solidFill>
+                  <a:srgbClr val="1F2430"/>
+                </a:solidFill>
+                <a:latin typeface="Aptos"/>
+              </a:rPr>
+              <a:t>- Neo4j wins two-hop author citation network: 39.2 ms vs 43.0 ms</a:t>
+            </a:r>
+          </a:p>
+          <a:p>
+            <a:pPr>
+              <a:spcBef>
+                <a:spcPts val="500"/>
+              </a:spcBef>
+            </a:pPr>
+            <a:r>
+              <a:rPr sz="1100">
+                <a:solidFill>
+                  <a:srgbClr val="1F2430"/>
+                </a:solidFill>
+                <a:latin typeface="Aptos"/>
+              </a:rPr>
+              <a:t>- Neo4j wins author citation + shared topic: 338.0 ms vs 783.0 ms</a:t>
+            </a:r>
+          </a:p>
+        </p:txBody>
+      </p:sp>
+      <p:sp>
+        <p:nvSpPr>
+          <p:cNvPr id="10" name="Rounded Rectangle 9"/>
+          <p:cNvSpPr/>
+          <p:nvPr/>
+        </p:nvSpPr>
+        <p:spPr>
+          <a:xfrm>
+            <a:off x="7114032" y="1481328"/>
+            <a:ext cx="3337560" cy="3977639"/>
+          </a:xfrm>
+          <a:prstGeom prst="roundRect">
+            <a:avLst/>
+          </a:prstGeom>
+          <a:solidFill>
+            <a:srgbClr val="FFFFFF"/>
+          </a:solidFill>
+          <a:ln w="12700">
+            <a:solidFill>
+              <a:srgbClr val="E0D2D6"/>
+            </a:solidFill>
+          </a:ln>
+        </p:spPr>
+        <p:style>
+          <a:lnRef idx="1">
+            <a:schemeClr val="accent1"/>
+          </a:lnRef>
+          <a:fillRef idx="3">
+            <a:schemeClr val="accent1"/>
+          </a:fillRef>
+          <a:effectRef idx="2">
+            <a:schemeClr val="accent1"/>
+          </a:effectRef>
+          <a:fontRef idx="minor">
+            <a:schemeClr val="lt1"/>
+          </a:fontRef>
+        </p:style>
+        <p:txBody>
+          <a:bodyPr rtlCol="0" anchor="ctr"/>
+          <a:lstStyle/>
+          <a:p>
+            <a:pPr algn="ctr"/>
+          </a:p>
+        </p:txBody>
+      </p:sp>
+      <p:sp>
+        <p:nvSpPr>
+          <p:cNvPr id="11" name="TextBox 10"/>
+          <p:cNvSpPr txBox="1"/>
+          <p:nvPr/>
+        </p:nvSpPr>
+        <p:spPr>
+          <a:xfrm>
+            <a:off x="7315200" y="1682496"/>
+            <a:ext cx="2935224" cy="3657599"/>
+          </a:xfrm>
+          <a:prstGeom prst="rect">
+            <a:avLst/>
+          </a:prstGeom>
+          <a:noFill/>
+        </p:spPr>
+        <p:txBody>
+          <a:bodyPr wrap="square">
+            <a:spAutoFit/>
+          </a:bodyPr>
+          <a:lstStyle/>
+          <a:p>
+            <a:r>
+              <a:rPr sz="1400" b="1">
+                <a:solidFill>
+                  <a:srgbClr val="822332"/>
+                </a:solidFill>
+                <a:latin typeface="Aptos"/>
+              </a:rPr>
+              <a:t>Interpretation</a:t>
+            </a:r>
+          </a:p>
+          <a:p>
+            <a:pPr>
+              <a:spcBef>
+                <a:spcPts val="500"/>
+              </a:spcBef>
+            </a:pPr>
+            <a:r>
+              <a:rPr sz="1100">
+                <a:solidFill>
+                  <a:srgbClr val="1F2430"/>
+                </a:solidFill>
+                <a:latin typeface="Aptos"/>
+              </a:rPr>
+              <a:t>- Neo4j is not automatically faster for every graph-looking query</a:t>
+            </a:r>
+          </a:p>
+          <a:p>
+            <a:pPr>
+              <a:spcBef>
+                <a:spcPts val="500"/>
+              </a:spcBef>
+            </a:pPr>
+            <a:r>
+              <a:rPr sz="1100">
+                <a:solidFill>
+                  <a:srgbClr val="1F2430"/>
+                </a:solidFill>
+                <a:latin typeface="Aptos"/>
+              </a:rPr>
+              <a:t>- Advantage appears when traversal combines several relationship types</a:t>
+            </a:r>
+          </a:p>
+          <a:p>
+            <a:pPr>
+              <a:spcBef>
+                <a:spcPts val="500"/>
+              </a:spcBef>
+            </a:pPr>
+            <a:r>
+              <a:rPr sz="1100">
+                <a:solidFill>
+                  <a:srgbClr val="1F2430"/>
+                </a:solidFill>
+                <a:latin typeface="Aptos"/>
+              </a:rPr>
+              <a:t>- This supports the balanced model-choice conclusion</a:t>
+            </a:r>
+          </a:p>
+        </p:txBody>
+      </p:sp>
+      <p:sp>
+        <p:nvSpPr>
+          <p:cNvPr id="12" name="Rectangle 11"/>
+          <p:cNvSpPr/>
+          <p:nvPr/>
+        </p:nvSpPr>
+        <p:spPr>
+          <a:xfrm>
+            <a:off x="457200" y="6309360"/>
+            <a:ext cx="10058400" cy="12700"/>
+          </a:xfrm>
+          <a:prstGeom prst="rect">
+            <a:avLst/>
+          </a:prstGeom>
+          <a:solidFill>
+            <a:srgbClr val="E6E6E6"/>
+          </a:solidFill>
+          <a:ln>
+            <a:noFill/>
+          </a:ln>
+        </p:spPr>
+        <p:style>
+          <a:lnRef idx="1">
+            <a:schemeClr val="accent1"/>
+          </a:lnRef>
+          <a:fillRef idx="3">
+            <a:schemeClr val="accent1"/>
+          </a:fillRef>
+          <a:effectRef idx="2">
+            <a:schemeClr val="accent1"/>
+          </a:effectRef>
+          <a:fontRef idx="minor">
+            <a:schemeClr val="lt1"/>
+          </a:fontRef>
+        </p:style>
+        <p:txBody>
+          <a:bodyPr rtlCol="0" anchor="ctr"/>
+          <a:lstStyle/>
+          <a:p>
+            <a:pPr algn="ctr"/>
+          </a:p>
+        </p:txBody>
+      </p:sp>
+      <p:sp>
+        <p:nvSpPr>
+          <p:cNvPr id="13" name="TextBox 12"/>
+          <p:cNvSpPr txBox="1"/>
+          <p:nvPr/>
+        </p:nvSpPr>
+        <p:spPr>
+          <a:xfrm>
+            <a:off x="502920" y="6419088"/>
+            <a:ext cx="4114800" cy="182880"/>
+          </a:xfrm>
+          <a:prstGeom prst="rect">
+            <a:avLst/>
+          </a:prstGeom>
+          <a:noFill/>
+        </p:spPr>
+        <p:txBody>
+          <a:bodyPr wrap="none">
+            <a:spAutoFit/>
+          </a:bodyPr>
+          <a:lstStyle/>
+          <a:p>
+            <a:r>
+              <a:rPr sz="600">
+                <a:solidFill>
+                  <a:srgbClr val="566373"/>
+                </a:solidFill>
+                <a:latin typeface="Aptos"/>
+              </a:rPr>
+              <a:t>OpenAlex AI DBMS Comparison</a:t>
+            </a:r>
+          </a:p>
+        </p:txBody>
+      </p:sp>
+      <p:sp>
+        <p:nvSpPr>
+          <p:cNvPr id="14" name="TextBox 13"/>
+          <p:cNvSpPr txBox="1"/>
+          <p:nvPr/>
+        </p:nvSpPr>
+        <p:spPr>
+          <a:xfrm>
+            <a:off x="10378440" y="6400800"/>
+            <a:ext cx="228600" cy="182880"/>
+          </a:xfrm>
+          <a:prstGeom prst="rect">
+            <a:avLst/>
+          </a:prstGeom>
+          <a:noFill/>
+        </p:spPr>
+        <p:txBody>
+          <a:bodyPr wrap="none">
+            <a:spAutoFit/>
+          </a:bodyPr>
+          <a:lstStyle/>
+          <a:p>
+            <a:pPr algn="r"/>
+            <a:r>
+              <a:rPr sz="700">
+                <a:solidFill>
+                  <a:srgbClr val="566373"/>
+                </a:solidFill>
+                <a:latin typeface="Aptos"/>
+              </a:rPr>
+              <a:t>22</a:t>
             </a:r>
           </a:p>
         </p:txBody>

--- a/docs/OpenAlex_DBMS_Comparison_Sapienza.pptx
+++ b/docs/OpenAlex_DBMS_Comparison_Sapienza.pptx
@@ -26,7 +26,6 @@
     <p:sldId id="274" r:id="rId25"/>
     <p:sldId id="275" r:id="rId26"/>
     <p:sldId id="276" r:id="rId27"/>
-    <p:sldId id="277" r:id="rId28"/>
   </p:sldIdLst>
   <p:sldSz cx="12191695" cy="6858000" type="screen4x3"/>
   <p:notesSz cx="6858000" cy="9144000"/>
@@ -3491,7 +3490,7 @@
                 </a:solidFill>
                 <a:latin typeface="Arial"/>
               </a:rPr>
-              <a:t>PostgreSQL Evidence</a:t>
+              <a:t>Implementation Setup</a:t>
             </a:r>
           </a:p>
         </p:txBody>
@@ -3526,7 +3525,7 @@
                 </a:solidFill>
                 <a:latin typeface="Arial"/>
               </a:rPr>
-              <a:t>Tables and SQL query result in Adminer</a:t>
+              <a:t>Local reproducible environment with Docker Compose</a:t>
             </a:r>
           </a:p>
         </p:txBody>
@@ -3598,8 +3597,8 @@
         </p:nvSpPr>
         <p:spPr>
           <a:xfrm>
-            <a:off x="566928" y="1766811"/>
-            <a:ext cx="6775703" cy="3653561"/>
+            <a:off x="707367" y="1389888"/>
+            <a:ext cx="10838225" cy="1792224"/>
           </a:xfrm>
           <a:prstGeom prst="rect">
             <a:avLst/>
@@ -3637,7 +3636,7 @@
       </p:sp>
       <p:pic>
         <p:nvPicPr>
-          <p:cNvPr id="8" name="Picture 7" descr="SQL Query Example.png"/>
+          <p:cNvPr id="8" name="Picture 7" descr="docker1.png"/>
           <p:cNvPicPr>
             <a:picLocks noChangeAspect="1"/>
           </p:cNvPicPr>
@@ -3651,8 +3650,8 @@
         </p:blipFill>
         <p:spPr>
           <a:xfrm>
-            <a:off x="594360" y="1794243"/>
-            <a:ext cx="6720840" cy="3598697"/>
+            <a:off x="734799" y="1417320"/>
+            <a:ext cx="10783361" cy="1737360"/>
           </a:xfrm>
           <a:prstGeom prst="rect">
             <a:avLst/>
@@ -3661,24 +3660,24 @@
       </p:pic>
       <p:sp>
         <p:nvSpPr>
-          <p:cNvPr id="9" name="Rectangle 8"/>
+          <p:cNvPr id="9" name="Rounded Rectangle 8"/>
           <p:cNvSpPr/>
           <p:nvPr/>
         </p:nvSpPr>
         <p:spPr>
           <a:xfrm>
-            <a:off x="7635240" y="1508760"/>
-            <a:ext cx="3474720" cy="1508760"/>
-          </a:xfrm>
-          <a:prstGeom prst="rect">
+            <a:off x="960120" y="3703320"/>
+            <a:ext cx="2926080" cy="1005840"/>
+          </a:xfrm>
+          <a:prstGeom prst="roundRect">
             <a:avLst/>
           </a:prstGeom>
           <a:solidFill>
-            <a:srgbClr val="F7F7F7"/>
+            <a:srgbClr val="FBFBFB"/>
           </a:solidFill>
           <a:ln w="15875">
             <a:solidFill>
-              <a:srgbClr val="D7D7D7"/>
+              <a:srgbClr val="E4E4E4"/>
             </a:solidFill>
           </a:ln>
         </p:spPr>
@@ -3697,32 +3696,10 @@
           </a:fontRef>
         </p:style>
         <p:txBody>
-          <a:bodyPr rtlCol="0" anchor="ctr" wrap="square" lIns="109728" rIns="73152" tIns="73152"/>
-          <a:lstStyle/>
-          <a:p>
-            <a:pPr algn="ctr">
-              <a:defRPr sz="1200">
-                <a:solidFill>
-                  <a:srgbClr val="0F0F0F"/>
-                </a:solidFill>
-                <a:latin typeface="Consolas"/>
-              </a:defRPr>
-            </a:pPr>
-            <a:r>
-              <a:t>SELECT title, publication_year, cited_by_count</a:t>
-            </a:r>
-            <a:br/>
-            <a:r>
-              <a:t>FROM papers</a:t>
-            </a:r>
-            <a:br/>
-            <a:r>
-              <a:t>ORDER BY cited_by_count DESC</a:t>
-            </a:r>
-            <a:br/>
-            <a:r>
-              <a:t>LIMIT 10;</a:t>
-            </a:r>
+          <a:bodyPr rtlCol="0" anchor="ctr"/>
+          <a:lstStyle/>
+          <a:p>
+            <a:pPr algn="ctr"/>
           </a:p>
         </p:txBody>
       </p:sp>
@@ -3734,8 +3711,8 @@
         </p:nvSpPr>
         <p:spPr>
           <a:xfrm>
-            <a:off x="7635240" y="3337560"/>
-            <a:ext cx="3520440" cy="777240"/>
+            <a:off x="1234440" y="3886200"/>
+            <a:ext cx="2103120" cy="274320"/>
           </a:xfrm>
           <a:prstGeom prst="rect">
             <a:avLst/>
@@ -3752,35 +3729,70 @@
             <a:r>
               <a:rPr sz="1800" b="1">
                 <a:solidFill>
+                  <a:srgbClr val="52121E"/>
+                </a:solidFill>
+                <a:latin typeface="Arial"/>
+              </a:rPr>
+              <a:t>PostgreSQL 16</a:t>
+            </a:r>
+          </a:p>
+        </p:txBody>
+      </p:sp>
+      <p:sp>
+        <p:nvSpPr>
+          <p:cNvPr id="11" name="TextBox 10"/>
+          <p:cNvSpPr txBox="1"/>
+          <p:nvPr/>
+        </p:nvSpPr>
+        <p:spPr>
+          <a:xfrm>
+            <a:off x="1234440" y="4251960"/>
+            <a:ext cx="2103120" cy="228600"/>
+          </a:xfrm>
+          <a:prstGeom prst="rect">
+            <a:avLst/>
+          </a:prstGeom>
+          <a:noFill/>
+        </p:spPr>
+        <p:txBody>
+          <a:bodyPr wrap="square" lIns="73152" rIns="73152" tIns="36576" bIns="36576">
+            <a:spAutoFit/>
+          </a:bodyPr>
+          <a:lstStyle/>
+          <a:p>
+            <a:pPr algn="l"/>
+            <a:r>
+              <a:rPr sz="1400" b="0">
+                <a:solidFill>
                   <a:srgbClr val="1A202C"/>
                 </a:solidFill>
                 <a:latin typeface="Arial"/>
               </a:rPr>
-              <a:t>This query uses the relational table of papers and orders by citation count.</a:t>
-            </a:r>
-          </a:p>
-        </p:txBody>
-      </p:sp>
-      <p:sp>
-        <p:nvSpPr>
-          <p:cNvPr id="11" name="Rectangle 10"/>
+              <a:t>Relational DBMS</a:t>
+            </a:r>
+          </a:p>
+        </p:txBody>
+      </p:sp>
+      <p:sp>
+        <p:nvSpPr>
+          <p:cNvPr id="12" name="Rounded Rectangle 11"/>
           <p:cNvSpPr/>
           <p:nvPr/>
         </p:nvSpPr>
         <p:spPr>
           <a:xfrm>
-            <a:off x="7953786" y="4407407"/>
-            <a:ext cx="2791907" cy="1289304"/>
-          </a:xfrm>
-          <a:prstGeom prst="rect">
+            <a:off x="4617720" y="3703320"/>
+            <a:ext cx="2926080" cy="1005840"/>
+          </a:xfrm>
+          <a:prstGeom prst="roundRect">
             <a:avLst/>
           </a:prstGeom>
           <a:solidFill>
-            <a:srgbClr val="FFFFFF"/>
+            <a:srgbClr val="FBFBFB"/>
           </a:solidFill>
           <a:ln w="15875">
             <a:solidFill>
-              <a:srgbClr val="DCDCDC"/>
+              <a:srgbClr val="E4E4E4"/>
             </a:solidFill>
           </a:ln>
         </p:spPr>
@@ -3806,33 +3818,194 @@
           </a:p>
         </p:txBody>
       </p:sp>
-      <p:pic>
-        <p:nvPicPr>
-          <p:cNvPr id="12" name="Picture 11" descr="PostgreSQL .png"/>
-          <p:cNvPicPr>
-            <a:picLocks noChangeAspect="1"/>
-          </p:cNvPicPr>
-          <p:nvPr/>
-        </p:nvPicPr>
-        <p:blipFill>
-          <a:blip r:embed="rId4"/>
-          <a:stretch>
-            <a:fillRect/>
-          </a:stretch>
-        </p:blipFill>
-        <p:spPr>
-          <a:xfrm>
-            <a:off x="7981218" y="4434840"/>
-            <a:ext cx="2737043" cy="1234440"/>
-          </a:xfrm>
-          <a:prstGeom prst="rect">
-            <a:avLst/>
-          </a:prstGeom>
-        </p:spPr>
-      </p:pic>
-      <p:sp>
-        <p:nvSpPr>
-          <p:cNvPr id="13" name="Rectangle 12"/>
+      <p:sp>
+        <p:nvSpPr>
+          <p:cNvPr id="13" name="TextBox 12"/>
+          <p:cNvSpPr txBox="1"/>
+          <p:nvPr/>
+        </p:nvSpPr>
+        <p:spPr>
+          <a:xfrm>
+            <a:off x="4892040" y="3886200"/>
+            <a:ext cx="2103120" cy="274320"/>
+          </a:xfrm>
+          <a:prstGeom prst="rect">
+            <a:avLst/>
+          </a:prstGeom>
+          <a:noFill/>
+        </p:spPr>
+        <p:txBody>
+          <a:bodyPr wrap="square" lIns="73152" rIns="73152" tIns="36576" bIns="36576">
+            <a:spAutoFit/>
+          </a:bodyPr>
+          <a:lstStyle/>
+          <a:p>
+            <a:pPr algn="l"/>
+            <a:r>
+              <a:rPr sz="1800" b="1">
+                <a:solidFill>
+                  <a:srgbClr val="52121E"/>
+                </a:solidFill>
+                <a:latin typeface="Arial"/>
+              </a:rPr>
+              <a:t>Neo4j 5</a:t>
+            </a:r>
+          </a:p>
+        </p:txBody>
+      </p:sp>
+      <p:sp>
+        <p:nvSpPr>
+          <p:cNvPr id="14" name="TextBox 13"/>
+          <p:cNvSpPr txBox="1"/>
+          <p:nvPr/>
+        </p:nvSpPr>
+        <p:spPr>
+          <a:xfrm>
+            <a:off x="4892040" y="4251960"/>
+            <a:ext cx="2103120" cy="228600"/>
+          </a:xfrm>
+          <a:prstGeom prst="rect">
+            <a:avLst/>
+          </a:prstGeom>
+          <a:noFill/>
+        </p:spPr>
+        <p:txBody>
+          <a:bodyPr wrap="square" lIns="73152" rIns="73152" tIns="36576" bIns="36576">
+            <a:spAutoFit/>
+          </a:bodyPr>
+          <a:lstStyle/>
+          <a:p>
+            <a:pPr algn="l"/>
+            <a:r>
+              <a:rPr sz="1400" b="0">
+                <a:solidFill>
+                  <a:srgbClr val="1A202C"/>
+                </a:solidFill>
+                <a:latin typeface="Arial"/>
+              </a:rPr>
+              <a:t>Graph database</a:t>
+            </a:r>
+          </a:p>
+        </p:txBody>
+      </p:sp>
+      <p:sp>
+        <p:nvSpPr>
+          <p:cNvPr id="15" name="Rounded Rectangle 14"/>
+          <p:cNvSpPr/>
+          <p:nvPr/>
+        </p:nvSpPr>
+        <p:spPr>
+          <a:xfrm>
+            <a:off x="8275320" y="3703320"/>
+            <a:ext cx="2926080" cy="1005840"/>
+          </a:xfrm>
+          <a:prstGeom prst="roundRect">
+            <a:avLst/>
+          </a:prstGeom>
+          <a:solidFill>
+            <a:srgbClr val="FBFBFB"/>
+          </a:solidFill>
+          <a:ln w="15875">
+            <a:solidFill>
+              <a:srgbClr val="E4E4E4"/>
+            </a:solidFill>
+          </a:ln>
+        </p:spPr>
+        <p:style>
+          <a:lnRef idx="1">
+            <a:schemeClr val="accent1"/>
+          </a:lnRef>
+          <a:fillRef idx="3">
+            <a:schemeClr val="accent1"/>
+          </a:fillRef>
+          <a:effectRef idx="2">
+            <a:schemeClr val="accent1"/>
+          </a:effectRef>
+          <a:fontRef idx="minor">
+            <a:schemeClr val="lt1"/>
+          </a:fontRef>
+        </p:style>
+        <p:txBody>
+          <a:bodyPr rtlCol="0" anchor="ctr"/>
+          <a:lstStyle/>
+          <a:p>
+            <a:pPr algn="ctr"/>
+          </a:p>
+        </p:txBody>
+      </p:sp>
+      <p:sp>
+        <p:nvSpPr>
+          <p:cNvPr id="16" name="TextBox 15"/>
+          <p:cNvSpPr txBox="1"/>
+          <p:nvPr/>
+        </p:nvSpPr>
+        <p:spPr>
+          <a:xfrm>
+            <a:off x="8549640" y="3886200"/>
+            <a:ext cx="2103120" cy="274320"/>
+          </a:xfrm>
+          <a:prstGeom prst="rect">
+            <a:avLst/>
+          </a:prstGeom>
+          <a:noFill/>
+        </p:spPr>
+        <p:txBody>
+          <a:bodyPr wrap="square" lIns="73152" rIns="73152" tIns="36576" bIns="36576">
+            <a:spAutoFit/>
+          </a:bodyPr>
+          <a:lstStyle/>
+          <a:p>
+            <a:pPr algn="l"/>
+            <a:r>
+              <a:rPr sz="1800" b="1">
+                <a:solidFill>
+                  <a:srgbClr val="52121E"/>
+                </a:solidFill>
+                <a:latin typeface="Arial"/>
+              </a:rPr>
+              <a:t>Adminer</a:t>
+            </a:r>
+          </a:p>
+        </p:txBody>
+      </p:sp>
+      <p:sp>
+        <p:nvSpPr>
+          <p:cNvPr id="17" name="TextBox 16"/>
+          <p:cNvSpPr txBox="1"/>
+          <p:nvPr/>
+        </p:nvSpPr>
+        <p:spPr>
+          <a:xfrm>
+            <a:off x="8549640" y="4251960"/>
+            <a:ext cx="2103120" cy="228600"/>
+          </a:xfrm>
+          <a:prstGeom prst="rect">
+            <a:avLst/>
+          </a:prstGeom>
+          <a:noFill/>
+        </p:spPr>
+        <p:txBody>
+          <a:bodyPr wrap="square" lIns="73152" rIns="73152" tIns="36576" bIns="36576">
+            <a:spAutoFit/>
+          </a:bodyPr>
+          <a:lstStyle/>
+          <a:p>
+            <a:pPr algn="l"/>
+            <a:r>
+              <a:rPr sz="1400" b="0">
+                <a:solidFill>
+                  <a:srgbClr val="1A202C"/>
+                </a:solidFill>
+                <a:latin typeface="Arial"/>
+              </a:rPr>
+              <a:t>PostgreSQL UI</a:t>
+            </a:r>
+          </a:p>
+        </p:txBody>
+      </p:sp>
+      <p:sp>
+        <p:nvSpPr>
+          <p:cNvPr id="18" name="Rectangle 17"/>
           <p:cNvSpPr/>
           <p:nvPr/>
         </p:nvSpPr>
@@ -3875,7 +4048,7 @@
       </p:sp>
       <p:sp>
         <p:nvSpPr>
-          <p:cNvPr id="14" name="TextBox 13"/>
+          <p:cNvPr id="19" name="TextBox 18"/>
           <p:cNvSpPr txBox="1"/>
           <p:nvPr/>
         </p:nvSpPr>
@@ -3910,7 +4083,7 @@
       </p:sp>
       <p:sp>
         <p:nvSpPr>
-          <p:cNvPr id="15" name="TextBox 14"/>
+          <p:cNvPr id="20" name="TextBox 19"/>
           <p:cNvSpPr txBox="1"/>
           <p:nvPr/>
         </p:nvSpPr>
@@ -4034,7 +4207,7 @@
                 </a:solidFill>
                 <a:latin typeface="Arial"/>
               </a:rPr>
-              <a:t>Neo4j Evidence: Author-Paper-Topic</a:t>
+              <a:t>PostgreSQL Evidence</a:t>
             </a:r>
           </a:p>
         </p:txBody>
@@ -4069,7 +4242,7 @@
                 </a:solidFill>
                 <a:latin typeface="Arial"/>
               </a:rPr>
-              <a:t>Graph query with visible relationships</a:t>
+              <a:t>Tables and SQL query result in Adminer</a:t>
             </a:r>
           </a:p>
         </p:txBody>
@@ -4141,8 +4314,8 @@
         </p:nvSpPr>
         <p:spPr>
           <a:xfrm>
-            <a:off x="566928" y="1796669"/>
-            <a:ext cx="7370064" cy="3630420"/>
+            <a:off x="566928" y="1766811"/>
+            <a:ext cx="6775703" cy="3653561"/>
           </a:xfrm>
           <a:prstGeom prst="rect">
             <a:avLst/>
@@ -4180,7 +4353,7 @@
       </p:sp>
       <p:pic>
         <p:nvPicPr>
-          <p:cNvPr id="8" name="Picture 7" descr="neoj43.png"/>
+          <p:cNvPr id="8" name="Picture 7" descr="SQL Query Example.png"/>
           <p:cNvPicPr>
             <a:picLocks noChangeAspect="1"/>
           </p:cNvPicPr>
@@ -4194,8 +4367,8 @@
         </p:blipFill>
         <p:spPr>
           <a:xfrm>
-            <a:off x="594360" y="1824101"/>
-            <a:ext cx="7315200" cy="3575556"/>
+            <a:off x="594360" y="1794243"/>
+            <a:ext cx="6720840" cy="3598697"/>
           </a:xfrm>
           <a:prstGeom prst="rect">
             <a:avLst/>
@@ -4210,8 +4383,8 @@
         </p:nvSpPr>
         <p:spPr>
           <a:xfrm>
-            <a:off x="8229600" y="1508760"/>
-            <a:ext cx="2834640" cy="1874519"/>
+            <a:off x="7635240" y="1508760"/>
+            <a:ext cx="3474720" cy="1508760"/>
           </a:xfrm>
           <a:prstGeom prst="rect">
             <a:avLst/>
@@ -4244,7 +4417,7 @@
           <a:lstStyle/>
           <a:p>
             <a:pPr algn="ctr">
-              <a:defRPr sz="1100">
+              <a:defRPr sz="1200">
                 <a:solidFill>
                   <a:srgbClr val="0F0F0F"/>
                 </a:solidFill>
@@ -4252,26 +4425,18 @@
               </a:defRPr>
             </a:pPr>
             <a:r>
-              <a:t>MATCH path =</a:t>
+              <a:t>SELECT title, publication_year, cited_by_count</a:t>
             </a:r>
             <a:br/>
             <a:r>
-              <a:t>  (a:Author)-[:AUTHORED]-&gt;</a:t>
+              <a:t>FROM papers</a:t>
             </a:r>
             <a:br/>
             <a:r>
-              <a:t>  (p:Paper)-[:HAS_TOPIC]-&gt;</a:t>
+              <a:t>ORDER BY cited_by_count DESC</a:t>
             </a:r>
             <a:br/>
             <a:r>
-              <a:t>  (t:Topic)</a:t>
-            </a:r>
-            <a:br/>
-            <a:r>
-              <a:t>RETURN path</a:t>
-            </a:r>
-            <a:br/>
-            <a:r>
               <a:t>LIMIT 10;</a:t>
             </a:r>
           </a:p>
@@ -4285,8 +4450,8 @@
         </p:nvSpPr>
         <p:spPr>
           <a:xfrm>
-            <a:off x="8229600" y="3703320"/>
-            <a:ext cx="2834640" cy="868680"/>
+            <a:off x="7635240" y="3337560"/>
+            <a:ext cx="3520440" cy="777240"/>
           </a:xfrm>
           <a:prstGeom prst="rect">
             <a:avLst/>
@@ -4301,13 +4466,13 @@
           <a:p>
             <a:pPr algn="l"/>
             <a:r>
-              <a:rPr sz="1700" b="1">
+              <a:rPr sz="1800" b="1">
                 <a:solidFill>
                   <a:srgbClr val="1A202C"/>
                 </a:solidFill>
                 <a:latin typeface="Arial"/>
               </a:rPr>
-              <a:t>The query returns paths, so Neo4j shows both nodes and relationships.</a:t>
+              <a:t>This query uses the relational table of papers and orders by citation count.</a:t>
             </a:r>
           </a:p>
         </p:txBody>
@@ -4315,6 +4480,75 @@
       <p:sp>
         <p:nvSpPr>
           <p:cNvPr id="11" name="Rectangle 10"/>
+          <p:cNvSpPr/>
+          <p:nvPr/>
+        </p:nvSpPr>
+        <p:spPr>
+          <a:xfrm>
+            <a:off x="7953786" y="4407407"/>
+            <a:ext cx="2791907" cy="1289304"/>
+          </a:xfrm>
+          <a:prstGeom prst="rect">
+            <a:avLst/>
+          </a:prstGeom>
+          <a:solidFill>
+            <a:srgbClr val="FFFFFF"/>
+          </a:solidFill>
+          <a:ln w="15875">
+            <a:solidFill>
+              <a:srgbClr val="DCDCDC"/>
+            </a:solidFill>
+          </a:ln>
+        </p:spPr>
+        <p:style>
+          <a:lnRef idx="1">
+            <a:schemeClr val="accent1"/>
+          </a:lnRef>
+          <a:fillRef idx="3">
+            <a:schemeClr val="accent1"/>
+          </a:fillRef>
+          <a:effectRef idx="2">
+            <a:schemeClr val="accent1"/>
+          </a:effectRef>
+          <a:fontRef idx="minor">
+            <a:schemeClr val="lt1"/>
+          </a:fontRef>
+        </p:style>
+        <p:txBody>
+          <a:bodyPr rtlCol="0" anchor="ctr"/>
+          <a:lstStyle/>
+          <a:p>
+            <a:pPr algn="ctr"/>
+          </a:p>
+        </p:txBody>
+      </p:sp>
+      <p:pic>
+        <p:nvPicPr>
+          <p:cNvPr id="12" name="Picture 11" descr="PostgreSQL .png"/>
+          <p:cNvPicPr>
+            <a:picLocks noChangeAspect="1"/>
+          </p:cNvPicPr>
+          <p:nvPr/>
+        </p:nvPicPr>
+        <p:blipFill>
+          <a:blip r:embed="rId4"/>
+          <a:stretch>
+            <a:fillRect/>
+          </a:stretch>
+        </p:blipFill>
+        <p:spPr>
+          <a:xfrm>
+            <a:off x="7981218" y="4434840"/>
+            <a:ext cx="2737043" cy="1234440"/>
+          </a:xfrm>
+          <a:prstGeom prst="rect">
+            <a:avLst/>
+          </a:prstGeom>
+        </p:spPr>
+      </p:pic>
+      <p:sp>
+        <p:nvSpPr>
+          <p:cNvPr id="13" name="Rectangle 12"/>
           <p:cNvSpPr/>
           <p:nvPr/>
         </p:nvSpPr>
@@ -4357,7 +4591,7 @@
       </p:sp>
       <p:sp>
         <p:nvSpPr>
-          <p:cNvPr id="12" name="TextBox 11"/>
+          <p:cNvPr id="14" name="TextBox 13"/>
           <p:cNvSpPr txBox="1"/>
           <p:nvPr/>
         </p:nvSpPr>
@@ -4392,7 +4626,7 @@
       </p:sp>
       <p:sp>
         <p:nvSpPr>
-          <p:cNvPr id="13" name="TextBox 12"/>
+          <p:cNvPr id="15" name="TextBox 14"/>
           <p:cNvSpPr txBox="1"/>
           <p:nvPr/>
         </p:nvSpPr>
@@ -4516,7 +4750,7 @@
                 </a:solidFill>
                 <a:latin typeface="Arial"/>
               </a:rPr>
-              <a:t>Neo4j Evidence: Citation Network</a:t>
+              <a:t>Neo4j Evidence: Author-Paper-Topic</a:t>
             </a:r>
           </a:p>
         </p:txBody>
@@ -4551,7 +4785,7 @@
                 </a:solidFill>
                 <a:latin typeface="Arial"/>
               </a:rPr>
-              <a:t>Paper-to-paper CITES relationships</a:t>
+              <a:t>Graph query with visible relationships</a:t>
             </a:r>
           </a:p>
         </p:txBody>
@@ -4623,8 +4857,8 @@
         </p:nvSpPr>
         <p:spPr>
           <a:xfrm>
-            <a:off x="566928" y="1605067"/>
-            <a:ext cx="7644384" cy="4059344"/>
+            <a:off x="566928" y="1796669"/>
+            <a:ext cx="7370064" cy="3630420"/>
           </a:xfrm>
           <a:prstGeom prst="rect">
             <a:avLst/>
@@ -4662,7 +4896,7 @@
       </p:sp>
       <p:pic>
         <p:nvPicPr>
-          <p:cNvPr id="8" name="Picture 7" descr="Citation Network.png"/>
+          <p:cNvPr id="8" name="Picture 7" descr="neoj43.png"/>
           <p:cNvPicPr>
             <a:picLocks noChangeAspect="1"/>
           </p:cNvPicPr>
@@ -4676,8 +4910,8 @@
         </p:blipFill>
         <p:spPr>
           <a:xfrm>
-            <a:off x="594360" y="1632499"/>
-            <a:ext cx="7589520" cy="4004480"/>
+            <a:off x="594360" y="1824101"/>
+            <a:ext cx="7315200" cy="3575556"/>
           </a:xfrm>
           <a:prstGeom prst="rect">
             <a:avLst/>
@@ -4692,8 +4926,8 @@
         </p:nvSpPr>
         <p:spPr>
           <a:xfrm>
-            <a:off x="8458200" y="1554480"/>
-            <a:ext cx="2697480" cy="1463040"/>
+            <a:off x="8229600" y="1508760"/>
+            <a:ext cx="2834640" cy="1874519"/>
           </a:xfrm>
           <a:prstGeom prst="rect">
             <a:avLst/>
@@ -4738,19 +4972,23 @@
             </a:r>
             <a:br/>
             <a:r>
-              <a:t>  (p:Paper)-[:CITES]-&gt;</a:t>
+              <a:t>  (a:Author)-[:AUTHORED]-&gt;</a:t>
             </a:r>
             <a:br/>
             <a:r>
-              <a:t>  (cited:Paper)</a:t>
+              <a:t>  (p:Paper)-[:HAS_TOPIC]-&gt;</a:t>
             </a:r>
             <a:br/>
             <a:r>
+              <a:t>  (t:Topic)</a:t>
+            </a:r>
+            <a:br/>
+            <a:r>
               <a:t>RETURN path</a:t>
             </a:r>
             <a:br/>
             <a:r>
-              <a:t>LIMIT 20;</a:t>
+              <a:t>LIMIT 10;</a:t>
             </a:r>
           </a:p>
         </p:txBody>
@@ -4763,8 +5001,8 @@
         </p:nvSpPr>
         <p:spPr>
           <a:xfrm>
-            <a:off x="8458200" y="3383280"/>
-            <a:ext cx="2743200" cy="960120"/>
+            <a:off x="8229600" y="3703320"/>
+            <a:ext cx="2834640" cy="868680"/>
           </a:xfrm>
           <a:prstGeom prst="rect">
             <a:avLst/>
@@ -4785,7 +5023,7 @@
                 </a:solidFill>
                 <a:latin typeface="Arial"/>
               </a:rPr>
-              <a:t>This is the graph-style view that is hard to understand from raw citation table rows alone.</a:t>
+              <a:t>The query returns paths, so Neo4j shows both nodes and relationships.</a:t>
             </a:r>
           </a:p>
         </p:txBody>
@@ -4994,7 +5232,7 @@
                 </a:solidFill>
                 <a:latin typeface="Arial"/>
               </a:rPr>
-              <a:t>Equivalent Query Example</a:t>
+              <a:t>Neo4j Evidence: Citation Network</a:t>
             </a:r>
           </a:p>
         </p:txBody>
@@ -5029,7 +5267,7 @@
                 </a:solidFill>
                 <a:latin typeface="Arial"/>
               </a:rPr>
-              <a:t>Same analytical question, SQL vs Cypher</a:t>
+              <a:t>Paper-to-paper CITES relationships</a:t>
             </a:r>
           </a:p>
         </p:txBody>
@@ -5095,74 +5333,73 @@
       </p:sp>
       <p:sp>
         <p:nvSpPr>
-          <p:cNvPr id="7" name="TextBox 6"/>
-          <p:cNvSpPr txBox="1"/>
-          <p:nvPr/>
-        </p:nvSpPr>
-        <p:spPr>
-          <a:xfrm>
-            <a:off x="685800" y="1325880"/>
-            <a:ext cx="9692640" cy="365760"/>
-          </a:xfrm>
-          <a:prstGeom prst="rect">
-            <a:avLst/>
-          </a:prstGeom>
-          <a:noFill/>
-        </p:spPr>
-        <p:txBody>
-          <a:bodyPr wrap="square" lIns="73152" rIns="73152" tIns="36576" bIns="36576">
-            <a:spAutoFit/>
-          </a:bodyPr>
-          <a:lstStyle/>
-          <a:p>
-            <a:pPr algn="l"/>
-            <a:r>
-              <a:rPr sz="2100" b="1">
-                <a:solidFill>
-                  <a:srgbClr val="1A202C"/>
-                </a:solidFill>
-                <a:latin typeface="Arial"/>
-              </a:rPr>
-              <a:t>Question: which authors cite other authors through their papers?</a:t>
-            </a:r>
-          </a:p>
-        </p:txBody>
-      </p:sp>
-      <p:sp>
-        <p:nvSpPr>
-          <p:cNvPr id="8" name="TextBox 7"/>
-          <p:cNvSpPr txBox="1"/>
-          <p:nvPr/>
-        </p:nvSpPr>
-        <p:spPr>
-          <a:xfrm>
-            <a:off x="731520" y="1920240"/>
-            <a:ext cx="3657600" cy="256032"/>
-          </a:xfrm>
-          <a:prstGeom prst="rect">
-            <a:avLst/>
-          </a:prstGeom>
-          <a:noFill/>
-        </p:spPr>
-        <p:txBody>
-          <a:bodyPr wrap="square" lIns="73152" rIns="73152" tIns="36576" bIns="36576">
-            <a:spAutoFit/>
-          </a:bodyPr>
-          <a:lstStyle/>
-          <a:p>
-            <a:pPr algn="l"/>
-            <a:r>
-              <a:rPr sz="1600" b="1">
-                <a:solidFill>
-                  <a:srgbClr val="52121E"/>
-                </a:solidFill>
-                <a:latin typeface="Arial"/>
-              </a:rPr>
-              <a:t>PostgreSQL SQL</a:t>
-            </a:r>
-          </a:p>
-        </p:txBody>
-      </p:sp>
+          <p:cNvPr id="7" name="Rectangle 6"/>
+          <p:cNvSpPr/>
+          <p:nvPr/>
+        </p:nvSpPr>
+        <p:spPr>
+          <a:xfrm>
+            <a:off x="566928" y="1605067"/>
+            <a:ext cx="7644384" cy="4059344"/>
+          </a:xfrm>
+          <a:prstGeom prst="rect">
+            <a:avLst/>
+          </a:prstGeom>
+          <a:solidFill>
+            <a:srgbClr val="FFFFFF"/>
+          </a:solidFill>
+          <a:ln w="15875">
+            <a:solidFill>
+              <a:srgbClr val="DCDCDC"/>
+            </a:solidFill>
+          </a:ln>
+        </p:spPr>
+        <p:style>
+          <a:lnRef idx="1">
+            <a:schemeClr val="accent1"/>
+          </a:lnRef>
+          <a:fillRef idx="3">
+            <a:schemeClr val="accent1"/>
+          </a:fillRef>
+          <a:effectRef idx="2">
+            <a:schemeClr val="accent1"/>
+          </a:effectRef>
+          <a:fontRef idx="minor">
+            <a:schemeClr val="lt1"/>
+          </a:fontRef>
+        </p:style>
+        <p:txBody>
+          <a:bodyPr rtlCol="0" anchor="ctr"/>
+          <a:lstStyle/>
+          <a:p>
+            <a:pPr algn="ctr"/>
+          </a:p>
+        </p:txBody>
+      </p:sp>
+      <p:pic>
+        <p:nvPicPr>
+          <p:cNvPr id="8" name="Picture 7" descr="Citation Network.png"/>
+          <p:cNvPicPr>
+            <a:picLocks noChangeAspect="1"/>
+          </p:cNvPicPr>
+          <p:nvPr/>
+        </p:nvPicPr>
+        <p:blipFill>
+          <a:blip r:embed="rId3"/>
+          <a:stretch>
+            <a:fillRect/>
+          </a:stretch>
+        </p:blipFill>
+        <p:spPr>
+          <a:xfrm>
+            <a:off x="594360" y="1632499"/>
+            <a:ext cx="7589520" cy="4004480"/>
+          </a:xfrm>
+          <a:prstGeom prst="rect">
+            <a:avLst/>
+          </a:prstGeom>
+        </p:spPr>
+      </p:pic>
       <p:sp>
         <p:nvSpPr>
           <p:cNvPr id="9" name="Rectangle 8"/>
@@ -5171,8 +5408,8 @@
         </p:nvSpPr>
         <p:spPr>
           <a:xfrm>
-            <a:off x="731520" y="2240280"/>
-            <a:ext cx="5303520" cy="3154680"/>
+            <a:off x="8458200" y="1554480"/>
+            <a:ext cx="2697480" cy="1463040"/>
           </a:xfrm>
           <a:prstGeom prst="rect">
             <a:avLst/>
@@ -5205,7 +5442,7 @@
           <a:lstStyle/>
           <a:p>
             <a:pPr algn="ctr">
-              <a:defRPr sz="800">
+              <a:defRPr sz="1100">
                 <a:solidFill>
                   <a:srgbClr val="0F0F0F"/>
                 </a:solidFill>
@@ -5213,31 +5450,23 @@
               </a:defRPr>
             </a:pPr>
             <a:r>
-              <a:t>SELECT source_author.display_name AS citing_author,</a:t>
+              <a:t>MATCH path =</a:t>
             </a:r>
             <a:br/>
             <a:r>
-              <a:t>       target_author.display_name AS cited_author,</a:t>
+              <a:t>  (p:Paper)-[:CITES]-&gt;</a:t>
             </a:r>
             <a:br/>
             <a:r>
-              <a:t>       COUNT(*) AS citation_edges</a:t>
+              <a:t>  (cited:Paper)</a:t>
             </a:r>
             <a:br/>
             <a:r>
-              <a:t>FROM paper_authors source_pa</a:t>
+              <a:t>RETURN path</a:t>
             </a:r>
             <a:br/>
             <a:r>
-              <a:t>JOIN citations c ON c.citing_paper_id = source_pa.paper_id</a:t>
-            </a:r>
-            <a:br/>
-            <a:r>
-              <a:t>JOIN paper_authors target_pa ON target_pa.paper_id = c.cited_paper_id</a:t>
-            </a:r>
-            <a:br/>
-            <a:r>
-              <a:t>GROUP BY source_author.display_name, target_author.display_name;</a:t>
+              <a:t>LIMIT 20;</a:t>
             </a:r>
           </a:p>
         </p:txBody>
@@ -5250,8 +5479,8 @@
         </p:nvSpPr>
         <p:spPr>
           <a:xfrm>
-            <a:off x="6309360" y="1920240"/>
-            <a:ext cx="3657600" cy="256032"/>
+            <a:off x="8458200" y="3383280"/>
+            <a:ext cx="2743200" cy="960120"/>
           </a:xfrm>
           <a:prstGeom prst="rect">
             <a:avLst/>
@@ -5266,13 +5495,13 @@
           <a:p>
             <a:pPr algn="l"/>
             <a:r>
-              <a:rPr sz="1600" b="1">
-                <a:solidFill>
-                  <a:srgbClr val="52121E"/>
-                </a:solidFill>
-                <a:latin typeface="Arial"/>
-              </a:rPr>
-              <a:t>Neo4j Cypher</a:t>
+              <a:rPr sz="1700" b="1">
+                <a:solidFill>
+                  <a:srgbClr val="1A202C"/>
+                </a:solidFill>
+                <a:latin typeface="Arial"/>
+              </a:rPr>
+              <a:t>This is the graph-style view that is hard to understand from raw citation table rows alone.</a:t>
             </a:r>
           </a:p>
         </p:txBody>
@@ -5280,81 +5509,6 @@
       <p:sp>
         <p:nvSpPr>
           <p:cNvPr id="11" name="Rectangle 10"/>
-          <p:cNvSpPr/>
-          <p:nvPr/>
-        </p:nvSpPr>
-        <p:spPr>
-          <a:xfrm>
-            <a:off x="6309360" y="2240280"/>
-            <a:ext cx="5074920" cy="3154680"/>
-          </a:xfrm>
-          <a:prstGeom prst="rect">
-            <a:avLst/>
-          </a:prstGeom>
-          <a:solidFill>
-            <a:srgbClr val="F7F7F7"/>
-          </a:solidFill>
-          <a:ln w="15875">
-            <a:solidFill>
-              <a:srgbClr val="D7D7D7"/>
-            </a:solidFill>
-          </a:ln>
-        </p:spPr>
-        <p:style>
-          <a:lnRef idx="1">
-            <a:schemeClr val="accent1"/>
-          </a:lnRef>
-          <a:fillRef idx="3">
-            <a:schemeClr val="accent1"/>
-          </a:fillRef>
-          <a:effectRef idx="2">
-            <a:schemeClr val="accent1"/>
-          </a:effectRef>
-          <a:fontRef idx="minor">
-            <a:schemeClr val="lt1"/>
-          </a:fontRef>
-        </p:style>
-        <p:txBody>
-          <a:bodyPr rtlCol="0" anchor="ctr" wrap="square" lIns="109728" rIns="73152" tIns="73152"/>
-          <a:lstStyle/>
-          <a:p>
-            <a:pPr algn="ctr">
-              <a:defRPr sz="900">
-                <a:solidFill>
-                  <a:srgbClr val="0F0F0F"/>
-                </a:solidFill>
-                <a:latin typeface="Consolas"/>
-              </a:defRPr>
-            </a:pPr>
-            <a:r>
-              <a:t>MATCH (source:Author)-[:AUTHORED]-&gt;(:Paper)</a:t>
-            </a:r>
-            <a:br/>
-            <a:r>
-              <a:t>      -[:CITES]-&gt;(:Paper)&lt;-[:AUTHORED]-(target:Author)</a:t>
-            </a:r>
-            <a:br/>
-            <a:r>
-              <a:t>WHERE source.author_id &lt;&gt; target.author_id</a:t>
-            </a:r>
-            <a:br/>
-            <a:r>
-              <a:t>RETURN source.display_name AS citing_author,</a:t>
-            </a:r>
-            <a:br/>
-            <a:r>
-              <a:t>       target.display_name AS cited_author,</a:t>
-            </a:r>
-            <a:br/>
-            <a:r>
-              <a:t>       count(*) AS citation_edges;</a:t>
-            </a:r>
-          </a:p>
-        </p:txBody>
-      </p:sp>
-      <p:sp>
-        <p:nvSpPr>
-          <p:cNvPr id="12" name="Rectangle 11"/>
           <p:cNvSpPr/>
           <p:nvPr/>
         </p:nvSpPr>
@@ -5397,7 +5551,7 @@
       </p:sp>
       <p:sp>
         <p:nvSpPr>
-          <p:cNvPr id="13" name="TextBox 12"/>
+          <p:cNvPr id="12" name="TextBox 11"/>
           <p:cNvSpPr txBox="1"/>
           <p:nvPr/>
         </p:nvSpPr>
@@ -5432,7 +5586,7 @@
       </p:sp>
       <p:sp>
         <p:nvSpPr>
-          <p:cNvPr id="14" name="TextBox 13"/>
+          <p:cNvPr id="13" name="TextBox 12"/>
           <p:cNvSpPr txBox="1"/>
           <p:nvPr/>
         </p:nvSpPr>
@@ -5556,7 +5710,7 @@
                 </a:solidFill>
                 <a:latin typeface="Arial"/>
               </a:rPr>
-              <a:t>Benchmark Methodology</a:t>
+              <a:t>Equivalent Query Example</a:t>
             </a:r>
           </a:p>
         </p:txBody>
@@ -5591,7 +5745,7 @@
                 </a:solidFill>
                 <a:latin typeface="Arial"/>
               </a:rPr>
-              <a:t>How the comparison was measured</a:t>
+              <a:t>Same analytical question, SQL vs Cypher</a:t>
             </a:r>
           </a:p>
         </p:txBody>
@@ -5657,24 +5811,94 @@
       </p:sp>
       <p:sp>
         <p:nvSpPr>
-          <p:cNvPr id="7" name="Rounded Rectangle 6"/>
+          <p:cNvPr id="7" name="TextBox 6"/>
+          <p:cNvSpPr txBox="1"/>
+          <p:nvPr/>
+        </p:nvSpPr>
+        <p:spPr>
+          <a:xfrm>
+            <a:off x="685800" y="1325880"/>
+            <a:ext cx="9692640" cy="365760"/>
+          </a:xfrm>
+          <a:prstGeom prst="rect">
+            <a:avLst/>
+          </a:prstGeom>
+          <a:noFill/>
+        </p:spPr>
+        <p:txBody>
+          <a:bodyPr wrap="square" lIns="73152" rIns="73152" tIns="36576" bIns="36576">
+            <a:spAutoFit/>
+          </a:bodyPr>
+          <a:lstStyle/>
+          <a:p>
+            <a:pPr algn="l"/>
+            <a:r>
+              <a:rPr sz="2100" b="1">
+                <a:solidFill>
+                  <a:srgbClr val="1A202C"/>
+                </a:solidFill>
+                <a:latin typeface="Arial"/>
+              </a:rPr>
+              <a:t>Question: which authors cite other authors through their papers?</a:t>
+            </a:r>
+          </a:p>
+        </p:txBody>
+      </p:sp>
+      <p:sp>
+        <p:nvSpPr>
+          <p:cNvPr id="8" name="TextBox 7"/>
+          <p:cNvSpPr txBox="1"/>
+          <p:nvPr/>
+        </p:nvSpPr>
+        <p:spPr>
+          <a:xfrm>
+            <a:off x="731520" y="1920240"/>
+            <a:ext cx="3657600" cy="256032"/>
+          </a:xfrm>
+          <a:prstGeom prst="rect">
+            <a:avLst/>
+          </a:prstGeom>
+          <a:noFill/>
+        </p:spPr>
+        <p:txBody>
+          <a:bodyPr wrap="square" lIns="73152" rIns="73152" tIns="36576" bIns="36576">
+            <a:spAutoFit/>
+          </a:bodyPr>
+          <a:lstStyle/>
+          <a:p>
+            <a:pPr algn="l"/>
+            <a:r>
+              <a:rPr sz="1600" b="1">
+                <a:solidFill>
+                  <a:srgbClr val="52121E"/>
+                </a:solidFill>
+                <a:latin typeface="Arial"/>
+              </a:rPr>
+              <a:t>PostgreSQL SQL</a:t>
+            </a:r>
+          </a:p>
+        </p:txBody>
+      </p:sp>
+      <p:sp>
+        <p:nvSpPr>
+          <p:cNvPr id="9" name="Rectangle 8"/>
           <p:cNvSpPr/>
           <p:nvPr/>
         </p:nvSpPr>
         <p:spPr>
           <a:xfrm>
-            <a:off x="777240" y="1463040"/>
-            <a:ext cx="4892040" cy="4023360"/>
-          </a:xfrm>
-          <a:prstGeom prst="roundRect">
+            <a:off x="731520" y="2240280"/>
+            <a:ext cx="5303520" cy="3154680"/>
+          </a:xfrm>
+          <a:prstGeom prst="rect">
             <a:avLst/>
           </a:prstGeom>
           <a:solidFill>
-            <a:srgbClr val="FBFBFB"/>
+            <a:srgbClr val="F7F7F7"/>
           </a:solidFill>
           <a:ln w="15875">
             <a:solidFill>
-              <a:srgbClr val="E4E4E4"/>
+              <a:srgbClr val="D7D7D7"/>
             </a:solidFill>
           </a:ln>
         </p:spPr>
@@ -5693,23 +5917,57 @@
           </a:fontRef>
         </p:style>
         <p:txBody>
-          <a:bodyPr rtlCol="0" anchor="ctr"/>
-          <a:lstStyle/>
-          <a:p>
-            <a:pPr algn="ctr"/>
-          </a:p>
-        </p:txBody>
-      </p:sp>
-      <p:sp>
-        <p:nvSpPr>
-          <p:cNvPr id="8" name="TextBox 7"/>
-          <p:cNvSpPr txBox="1"/>
-          <p:nvPr/>
-        </p:nvSpPr>
-        <p:spPr>
-          <a:xfrm>
-            <a:off x="1097280" y="1737360"/>
-            <a:ext cx="3200400" cy="292608"/>
+          <a:bodyPr rtlCol="0" anchor="ctr" wrap="square" lIns="109728" rIns="73152" tIns="73152"/>
+          <a:lstStyle/>
+          <a:p>
+            <a:pPr algn="ctr">
+              <a:defRPr sz="800">
+                <a:solidFill>
+                  <a:srgbClr val="0F0F0F"/>
+                </a:solidFill>
+                <a:latin typeface="Consolas"/>
+              </a:defRPr>
+            </a:pPr>
+            <a:r>
+              <a:t>SELECT source_author.display_name AS citing_author,</a:t>
+            </a:r>
+            <a:br/>
+            <a:r>
+              <a:t>       target_author.display_name AS cited_author,</a:t>
+            </a:r>
+            <a:br/>
+            <a:r>
+              <a:t>       COUNT(*) AS citation_edges</a:t>
+            </a:r>
+            <a:br/>
+            <a:r>
+              <a:t>FROM paper_authors source_pa</a:t>
+            </a:r>
+            <a:br/>
+            <a:r>
+              <a:t>JOIN citations c ON c.citing_paper_id = source_pa.paper_id</a:t>
+            </a:r>
+            <a:br/>
+            <a:r>
+              <a:t>JOIN paper_authors target_pa ON target_pa.paper_id = c.cited_paper_id</a:t>
+            </a:r>
+            <a:br/>
+            <a:r>
+              <a:t>GROUP BY source_author.display_name, target_author.display_name;</a:t>
+            </a:r>
+          </a:p>
+        </p:txBody>
+      </p:sp>
+      <p:sp>
+        <p:nvSpPr>
+          <p:cNvPr id="10" name="TextBox 9"/>
+          <p:cNvSpPr txBox="1"/>
+          <p:nvPr/>
+        </p:nvSpPr>
+        <p:spPr>
+          <a:xfrm>
+            <a:off x="6309360" y="1920240"/>
+            <a:ext cx="3657600" cy="256032"/>
           </a:xfrm>
           <a:prstGeom prst="rect">
             <a:avLst/>
@@ -5724,122 +5982,37 @@
           <a:p>
             <a:pPr algn="l"/>
             <a:r>
-              <a:rPr sz="1800" b="1">
+              <a:rPr sz="1600" b="1">
                 <a:solidFill>
                   <a:srgbClr val="52121E"/>
                 </a:solidFill>
                 <a:latin typeface="Arial"/>
               </a:rPr>
-              <a:t>Measurement setup</a:t>
-            </a:r>
-          </a:p>
-        </p:txBody>
-      </p:sp>
-      <p:sp>
-        <p:nvSpPr>
-          <p:cNvPr id="9" name="TextBox 8"/>
-          <p:cNvSpPr txBox="1"/>
-          <p:nvPr/>
-        </p:nvSpPr>
-        <p:spPr>
-          <a:xfrm>
-            <a:off x="1097280" y="2176272"/>
-            <a:ext cx="4114800" cy="2560320"/>
-          </a:xfrm>
-          <a:prstGeom prst="rect">
-            <a:avLst/>
-          </a:prstGeom>
-          <a:noFill/>
-        </p:spPr>
-        <p:txBody>
-          <a:bodyPr wrap="square" lIns="73152" rIns="73152" tIns="36576" bIns="36576">
-            <a:spAutoFit/>
-          </a:bodyPr>
-          <a:lstStyle/>
-          <a:p>
-            <a:pPr algn="l">
-              <a:spcAft>
-                <a:spcPts val="600"/>
-              </a:spcAft>
-              <a:defRPr sz="1800"/>
-            </a:pPr>
-            <a:r>
-              <a:rPr sz="1800" b="0">
-                <a:solidFill>
-                  <a:srgbClr val="1A202C"/>
-                </a:solidFill>
-                <a:latin typeface="Arial"/>
-              </a:rPr>
-              <a:t>- 11 equivalent query pairs</a:t>
-            </a:r>
-            <a:br/>
-            <a:r>
-              <a:rPr sz="1800">
-                <a:solidFill>
-                  <a:srgbClr val="1A202C"/>
-                </a:solidFill>
-              </a:rPr>
-              <a:t>- 1 warmup run</a:t>
-            </a:r>
-            <a:br/>
-            <a:r>
-              <a:rPr sz="1800">
-                <a:solidFill>
-                  <a:srgbClr val="1A202C"/>
-                </a:solidFill>
-              </a:rPr>
-              <a:t>- 5 measured runs</a:t>
-            </a:r>
-            <a:br/>
-            <a:r>
-              <a:rPr sz="1800">
-                <a:solidFill>
-                  <a:srgbClr val="1A202C"/>
-                </a:solidFill>
-              </a:rPr>
-              <a:t>- Same generated CSV dataset</a:t>
-            </a:r>
-            <a:br/>
-            <a:r>
-              <a:rPr sz="1800">
-                <a:solidFill>
-                  <a:srgbClr val="1A202C"/>
-                </a:solidFill>
-              </a:rPr>
-              <a:t>- PostgreSQL measured with EXPLAIN ANALYZE</a:t>
-            </a:r>
-            <a:br/>
-            <a:r>
-              <a:rPr sz="1800">
-                <a:solidFill>
-                  <a:srgbClr val="1A202C"/>
-                </a:solidFill>
-              </a:rPr>
-              <a:t>- Neo4j measured with PROFILE</a:t>
-            </a:r>
-          </a:p>
-        </p:txBody>
-      </p:sp>
-      <p:sp>
-        <p:nvSpPr>
-          <p:cNvPr id="10" name="Rounded Rectangle 9"/>
+              <a:t>Neo4j Cypher</a:t>
+            </a:r>
+          </a:p>
+        </p:txBody>
+      </p:sp>
+      <p:sp>
+        <p:nvSpPr>
+          <p:cNvPr id="11" name="Rectangle 10"/>
           <p:cNvSpPr/>
           <p:nvPr/>
         </p:nvSpPr>
         <p:spPr>
           <a:xfrm>
-            <a:off x="6172200" y="1463040"/>
-            <a:ext cx="4892040" cy="4023360"/>
-          </a:xfrm>
-          <a:prstGeom prst="roundRect">
+            <a:off x="6309360" y="2240280"/>
+            <a:ext cx="5074920" cy="3154680"/>
+          </a:xfrm>
+          <a:prstGeom prst="rect">
             <a:avLst/>
           </a:prstGeom>
           <a:solidFill>
-            <a:srgbClr val="FFFDFD"/>
+            <a:srgbClr val="F7F7F7"/>
           </a:solidFill>
           <a:ln w="15875">
             <a:solidFill>
-              <a:srgbClr val="EAD5D8"/>
+              <a:srgbClr val="D7D7D7"/>
             </a:solidFill>
           </a:ln>
         </p:spPr>
@@ -5858,156 +6031,46 @@
           </a:fontRef>
         </p:style>
         <p:txBody>
-          <a:bodyPr rtlCol="0" anchor="ctr"/>
-          <a:lstStyle/>
-          <a:p>
-            <a:pPr algn="ctr"/>
-          </a:p>
-        </p:txBody>
-      </p:sp>
-      <p:sp>
-        <p:nvSpPr>
-          <p:cNvPr id="11" name="TextBox 10"/>
-          <p:cNvSpPr txBox="1"/>
-          <p:nvPr/>
-        </p:nvSpPr>
-        <p:spPr>
-          <a:xfrm>
-            <a:off x="6492240" y="1737360"/>
-            <a:ext cx="3383280" cy="292608"/>
-          </a:xfrm>
-          <a:prstGeom prst="rect">
-            <a:avLst/>
-          </a:prstGeom>
-          <a:noFill/>
-        </p:spPr>
-        <p:txBody>
-          <a:bodyPr wrap="square" lIns="73152" rIns="73152" tIns="36576" bIns="36576">
-            <a:spAutoFit/>
-          </a:bodyPr>
-          <a:lstStyle/>
-          <a:p>
-            <a:pPr algn="l"/>
-            <a:r>
-              <a:rPr sz="1800" b="1">
-                <a:solidFill>
-                  <a:srgbClr val="52121E"/>
-                </a:solidFill>
-                <a:latin typeface="Arial"/>
-              </a:rPr>
-              <a:t>Important interpretation</a:t>
-            </a:r>
-          </a:p>
-        </p:txBody>
-      </p:sp>
-      <p:sp>
-        <p:nvSpPr>
-          <p:cNvPr id="12" name="TextBox 11"/>
-          <p:cNvSpPr txBox="1"/>
-          <p:nvPr/>
-        </p:nvSpPr>
-        <p:spPr>
-          <a:xfrm>
-            <a:off x="6492240" y="2212848"/>
-            <a:ext cx="4069080" cy="594360"/>
-          </a:xfrm>
-          <a:prstGeom prst="rect">
-            <a:avLst/>
-          </a:prstGeom>
-          <a:noFill/>
-        </p:spPr>
-        <p:txBody>
-          <a:bodyPr wrap="square" lIns="73152" rIns="73152" tIns="36576" bIns="36576">
-            <a:spAutoFit/>
-          </a:bodyPr>
-          <a:lstStyle/>
-          <a:p>
-            <a:pPr algn="l"/>
-            <a:r>
-              <a:rPr sz="2100" b="1">
-                <a:solidFill>
-                  <a:srgbClr val="1A202C"/>
-                </a:solidFill>
-                <a:latin typeface="Arial"/>
-              </a:rPr>
-              <a:t>This is not a universal ranking of PostgreSQL and Neo4j.</a:t>
-            </a:r>
-          </a:p>
-        </p:txBody>
-      </p:sp>
-      <p:sp>
-        <p:nvSpPr>
-          <p:cNvPr id="13" name="TextBox 12"/>
-          <p:cNvSpPr txBox="1"/>
-          <p:nvPr/>
-        </p:nvSpPr>
-        <p:spPr>
-          <a:xfrm>
-            <a:off x="6492240" y="2971800"/>
-            <a:ext cx="4069080" cy="777240"/>
-          </a:xfrm>
-          <a:prstGeom prst="rect">
-            <a:avLst/>
-          </a:prstGeom>
-          <a:noFill/>
-        </p:spPr>
-        <p:txBody>
-          <a:bodyPr wrap="square" lIns="73152" rIns="73152" tIns="36576" bIns="36576">
-            <a:spAutoFit/>
-          </a:bodyPr>
-          <a:lstStyle/>
-          <a:p>
-            <a:pPr algn="l"/>
-            <a:r>
-              <a:rPr sz="1700" b="0">
-                <a:solidFill>
-                  <a:srgbClr val="1A202C"/>
-                </a:solidFill>
-                <a:latin typeface="Arial"/>
-              </a:rPr>
-              <a:t>It is a local comparison on the same OpenAlex AI subset, hardware, indexes, and query workload.</a:t>
-            </a:r>
-          </a:p>
-        </p:txBody>
-      </p:sp>
-      <p:sp>
-        <p:nvSpPr>
-          <p:cNvPr id="14" name="TextBox 13"/>
-          <p:cNvSpPr txBox="1"/>
-          <p:nvPr/>
-        </p:nvSpPr>
-        <p:spPr>
-          <a:xfrm>
-            <a:off x="6492240" y="4160520"/>
-            <a:ext cx="4023360" cy="457200"/>
-          </a:xfrm>
-          <a:prstGeom prst="rect">
-            <a:avLst/>
-          </a:prstGeom>
-          <a:noFill/>
-        </p:spPr>
-        <p:txBody>
-          <a:bodyPr wrap="square" lIns="73152" rIns="73152" tIns="36576" bIns="36576">
-            <a:spAutoFit/>
-          </a:bodyPr>
-          <a:lstStyle/>
-          <a:p>
-            <a:pPr algn="l"/>
-            <a:r>
-              <a:rPr sz="1800" b="1">
-                <a:solidFill>
-                  <a:srgbClr val="1A202C"/>
-                </a:solidFill>
-                <a:latin typeface="Arial"/>
-              </a:rPr>
-              <a:t>The main goal is to connect query shape to database model.</a:t>
-            </a:r>
-          </a:p>
-        </p:txBody>
-      </p:sp>
-      <p:sp>
-        <p:nvSpPr>
-          <p:cNvPr id="15" name="Rectangle 14"/>
+          <a:bodyPr rtlCol="0" anchor="ctr" wrap="square" lIns="109728" rIns="73152" tIns="73152"/>
+          <a:lstStyle/>
+          <a:p>
+            <a:pPr algn="ctr">
+              <a:defRPr sz="900">
+                <a:solidFill>
+                  <a:srgbClr val="0F0F0F"/>
+                </a:solidFill>
+                <a:latin typeface="Consolas"/>
+              </a:defRPr>
+            </a:pPr>
+            <a:r>
+              <a:t>MATCH (source:Author)-[:AUTHORED]-&gt;(:Paper)</a:t>
+            </a:r>
+            <a:br/>
+            <a:r>
+              <a:t>      -[:CITES]-&gt;(:Paper)&lt;-[:AUTHORED]-(target:Author)</a:t>
+            </a:r>
+            <a:br/>
+            <a:r>
+              <a:t>WHERE source.author_id &lt;&gt; target.author_id</a:t>
+            </a:r>
+            <a:br/>
+            <a:r>
+              <a:t>RETURN source.display_name AS citing_author,</a:t>
+            </a:r>
+            <a:br/>
+            <a:r>
+              <a:t>       target.display_name AS cited_author,</a:t>
+            </a:r>
+            <a:br/>
+            <a:r>
+              <a:t>       count(*) AS citation_edges;</a:t>
+            </a:r>
+          </a:p>
+        </p:txBody>
+      </p:sp>
+      <p:sp>
+        <p:nvSpPr>
+          <p:cNvPr id="12" name="Rectangle 11"/>
           <p:cNvSpPr/>
           <p:nvPr/>
         </p:nvSpPr>
@@ -6050,7 +6113,7 @@
       </p:sp>
       <p:sp>
         <p:nvSpPr>
-          <p:cNvPr id="16" name="TextBox 15"/>
+          <p:cNvPr id="13" name="TextBox 12"/>
           <p:cNvSpPr txBox="1"/>
           <p:nvPr/>
         </p:nvSpPr>
@@ -6085,7 +6148,7 @@
       </p:sp>
       <p:sp>
         <p:nvSpPr>
-          <p:cNvPr id="17" name="TextBox 16"/>
+          <p:cNvPr id="14" name="TextBox 13"/>
           <p:cNvSpPr txBox="1"/>
           <p:nvPr/>
         </p:nvSpPr>
@@ -6209,7 +6272,7 @@
                 </a:solidFill>
                 <a:latin typeface="Arial"/>
               </a:rPr>
-              <a:t>Benchmark Results</a:t>
+              <a:t>Benchmark Methodology</a:t>
             </a:r>
           </a:p>
         </p:txBody>
@@ -6244,7 +6307,7 @@
                 </a:solidFill>
                 <a:latin typeface="Arial"/>
               </a:rPr>
-              <a:t>Average execution time across equivalent query pairs</a:t>
+              <a:t>How the comparison was measured</a:t>
             </a:r>
           </a:p>
         </p:txBody>
@@ -6308,33 +6371,359 @@
           </a:p>
         </p:txBody>
       </p:sp>
-      <p:pic>
-        <p:nvPicPr>
-          <p:cNvPr id="7" name="Picture 6" descr="benchmark_summary.png"/>
-          <p:cNvPicPr>
-            <a:picLocks noChangeAspect="1"/>
-          </p:cNvPicPr>
-          <p:nvPr/>
-        </p:nvPicPr>
-        <p:blipFill>
-          <a:blip r:embed="rId3"/>
-          <a:stretch>
-            <a:fillRect/>
-          </a:stretch>
-        </p:blipFill>
-        <p:spPr>
-          <a:xfrm>
-            <a:off x="1483359" y="1005840"/>
-            <a:ext cx="9103360" cy="5120640"/>
-          </a:xfrm>
-          <a:prstGeom prst="rect">
-            <a:avLst/>
-          </a:prstGeom>
-        </p:spPr>
-      </p:pic>
-      <p:sp>
-        <p:nvSpPr>
-          <p:cNvPr id="8" name="Rectangle 7"/>
+      <p:sp>
+        <p:nvSpPr>
+          <p:cNvPr id="7" name="Rounded Rectangle 6"/>
+          <p:cNvSpPr/>
+          <p:nvPr/>
+        </p:nvSpPr>
+        <p:spPr>
+          <a:xfrm>
+            <a:off x="777240" y="1463040"/>
+            <a:ext cx="4892040" cy="4023360"/>
+          </a:xfrm>
+          <a:prstGeom prst="roundRect">
+            <a:avLst/>
+          </a:prstGeom>
+          <a:solidFill>
+            <a:srgbClr val="FBFBFB"/>
+          </a:solidFill>
+          <a:ln w="15875">
+            <a:solidFill>
+              <a:srgbClr val="E4E4E4"/>
+            </a:solidFill>
+          </a:ln>
+        </p:spPr>
+        <p:style>
+          <a:lnRef idx="1">
+            <a:schemeClr val="accent1"/>
+          </a:lnRef>
+          <a:fillRef idx="3">
+            <a:schemeClr val="accent1"/>
+          </a:fillRef>
+          <a:effectRef idx="2">
+            <a:schemeClr val="accent1"/>
+          </a:effectRef>
+          <a:fontRef idx="minor">
+            <a:schemeClr val="lt1"/>
+          </a:fontRef>
+        </p:style>
+        <p:txBody>
+          <a:bodyPr rtlCol="0" anchor="ctr"/>
+          <a:lstStyle/>
+          <a:p>
+            <a:pPr algn="ctr"/>
+          </a:p>
+        </p:txBody>
+      </p:sp>
+      <p:sp>
+        <p:nvSpPr>
+          <p:cNvPr id="8" name="TextBox 7"/>
+          <p:cNvSpPr txBox="1"/>
+          <p:nvPr/>
+        </p:nvSpPr>
+        <p:spPr>
+          <a:xfrm>
+            <a:off x="1097280" y="1737360"/>
+            <a:ext cx="3200400" cy="292608"/>
+          </a:xfrm>
+          <a:prstGeom prst="rect">
+            <a:avLst/>
+          </a:prstGeom>
+          <a:noFill/>
+        </p:spPr>
+        <p:txBody>
+          <a:bodyPr wrap="square" lIns="73152" rIns="73152" tIns="36576" bIns="36576">
+            <a:spAutoFit/>
+          </a:bodyPr>
+          <a:lstStyle/>
+          <a:p>
+            <a:pPr algn="l"/>
+            <a:r>
+              <a:rPr sz="1800" b="1">
+                <a:solidFill>
+                  <a:srgbClr val="52121E"/>
+                </a:solidFill>
+                <a:latin typeface="Arial"/>
+              </a:rPr>
+              <a:t>Measurement setup</a:t>
+            </a:r>
+          </a:p>
+        </p:txBody>
+      </p:sp>
+      <p:sp>
+        <p:nvSpPr>
+          <p:cNvPr id="9" name="TextBox 8"/>
+          <p:cNvSpPr txBox="1"/>
+          <p:nvPr/>
+        </p:nvSpPr>
+        <p:spPr>
+          <a:xfrm>
+            <a:off x="1097280" y="2176272"/>
+            <a:ext cx="4114800" cy="2560320"/>
+          </a:xfrm>
+          <a:prstGeom prst="rect">
+            <a:avLst/>
+          </a:prstGeom>
+          <a:noFill/>
+        </p:spPr>
+        <p:txBody>
+          <a:bodyPr wrap="square" lIns="73152" rIns="73152" tIns="36576" bIns="36576">
+            <a:spAutoFit/>
+          </a:bodyPr>
+          <a:lstStyle/>
+          <a:p>
+            <a:pPr algn="l">
+              <a:spcAft>
+                <a:spcPts val="600"/>
+              </a:spcAft>
+              <a:defRPr sz="1700"/>
+            </a:pPr>
+            <a:r>
+              <a:rPr sz="1700" b="0">
+                <a:solidFill>
+                  <a:srgbClr val="1A202C"/>
+                </a:solidFill>
+                <a:latin typeface="Arial"/>
+              </a:rPr>
+              <a:t>- 11 main equivalent query pairs</a:t>
+            </a:r>
+            <a:br/>
+            <a:r>
+              <a:rPr sz="1700">
+                <a:solidFill>
+                  <a:srgbClr val="1A202C"/>
+                </a:solidFill>
+              </a:rPr>
+              <a:t>- 9 supplemental graph-focused query pairs</a:t>
+            </a:r>
+            <a:br/>
+            <a:r>
+              <a:rPr sz="1700">
+                <a:solidFill>
+                  <a:srgbClr val="1A202C"/>
+                </a:solidFill>
+              </a:rPr>
+              <a:t>- 1 warmup run and 5 measured runs</a:t>
+            </a:r>
+            <a:br/>
+            <a:r>
+              <a:rPr sz="1700">
+                <a:solidFill>
+                  <a:srgbClr val="1A202C"/>
+                </a:solidFill>
+              </a:rPr>
+              <a:t>- Same generated CSV dataset</a:t>
+            </a:r>
+            <a:br/>
+            <a:r>
+              <a:rPr sz="1700">
+                <a:solidFill>
+                  <a:srgbClr val="1A202C"/>
+                </a:solidFill>
+              </a:rPr>
+              <a:t>- PostgreSQL measured with EXPLAIN ANALYZE</a:t>
+            </a:r>
+            <a:br/>
+            <a:r>
+              <a:rPr sz="1700">
+                <a:solidFill>
+                  <a:srgbClr val="1A202C"/>
+                </a:solidFill>
+              </a:rPr>
+              <a:t>- Neo4j measured with PROFILE</a:t>
+            </a:r>
+          </a:p>
+        </p:txBody>
+      </p:sp>
+      <p:sp>
+        <p:nvSpPr>
+          <p:cNvPr id="10" name="Rounded Rectangle 9"/>
+          <p:cNvSpPr/>
+          <p:nvPr/>
+        </p:nvSpPr>
+        <p:spPr>
+          <a:xfrm>
+            <a:off x="6172200" y="1463040"/>
+            <a:ext cx="4892040" cy="4023360"/>
+          </a:xfrm>
+          <a:prstGeom prst="roundRect">
+            <a:avLst/>
+          </a:prstGeom>
+          <a:solidFill>
+            <a:srgbClr val="FFFDFD"/>
+          </a:solidFill>
+          <a:ln w="15875">
+            <a:solidFill>
+              <a:srgbClr val="EAD5D8"/>
+            </a:solidFill>
+          </a:ln>
+        </p:spPr>
+        <p:style>
+          <a:lnRef idx="1">
+            <a:schemeClr val="accent1"/>
+          </a:lnRef>
+          <a:fillRef idx="3">
+            <a:schemeClr val="accent1"/>
+          </a:fillRef>
+          <a:effectRef idx="2">
+            <a:schemeClr val="accent1"/>
+          </a:effectRef>
+          <a:fontRef idx="minor">
+            <a:schemeClr val="lt1"/>
+          </a:fontRef>
+        </p:style>
+        <p:txBody>
+          <a:bodyPr rtlCol="0" anchor="ctr"/>
+          <a:lstStyle/>
+          <a:p>
+            <a:pPr algn="ctr"/>
+          </a:p>
+        </p:txBody>
+      </p:sp>
+      <p:sp>
+        <p:nvSpPr>
+          <p:cNvPr id="11" name="TextBox 10"/>
+          <p:cNvSpPr txBox="1"/>
+          <p:nvPr/>
+        </p:nvSpPr>
+        <p:spPr>
+          <a:xfrm>
+            <a:off x="6492240" y="1737360"/>
+            <a:ext cx="3383280" cy="292608"/>
+          </a:xfrm>
+          <a:prstGeom prst="rect">
+            <a:avLst/>
+          </a:prstGeom>
+          <a:noFill/>
+        </p:spPr>
+        <p:txBody>
+          <a:bodyPr wrap="square" lIns="73152" rIns="73152" tIns="36576" bIns="36576">
+            <a:spAutoFit/>
+          </a:bodyPr>
+          <a:lstStyle/>
+          <a:p>
+            <a:pPr algn="l"/>
+            <a:r>
+              <a:rPr sz="1800" b="1">
+                <a:solidFill>
+                  <a:srgbClr val="52121E"/>
+                </a:solidFill>
+                <a:latin typeface="Arial"/>
+              </a:rPr>
+              <a:t>Important interpretation</a:t>
+            </a:r>
+          </a:p>
+        </p:txBody>
+      </p:sp>
+      <p:sp>
+        <p:nvSpPr>
+          <p:cNvPr id="12" name="TextBox 11"/>
+          <p:cNvSpPr txBox="1"/>
+          <p:nvPr/>
+        </p:nvSpPr>
+        <p:spPr>
+          <a:xfrm>
+            <a:off x="6492240" y="2212848"/>
+            <a:ext cx="4069080" cy="594360"/>
+          </a:xfrm>
+          <a:prstGeom prst="rect">
+            <a:avLst/>
+          </a:prstGeom>
+          <a:noFill/>
+        </p:spPr>
+        <p:txBody>
+          <a:bodyPr wrap="square" lIns="73152" rIns="73152" tIns="36576" bIns="36576">
+            <a:spAutoFit/>
+          </a:bodyPr>
+          <a:lstStyle/>
+          <a:p>
+            <a:pPr algn="l"/>
+            <a:r>
+              <a:rPr sz="2100" b="1">
+                <a:solidFill>
+                  <a:srgbClr val="1A202C"/>
+                </a:solidFill>
+                <a:latin typeface="Arial"/>
+              </a:rPr>
+              <a:t>This is not a universal ranking of PostgreSQL and Neo4j.</a:t>
+            </a:r>
+          </a:p>
+        </p:txBody>
+      </p:sp>
+      <p:sp>
+        <p:nvSpPr>
+          <p:cNvPr id="13" name="TextBox 12"/>
+          <p:cNvSpPr txBox="1"/>
+          <p:nvPr/>
+        </p:nvSpPr>
+        <p:spPr>
+          <a:xfrm>
+            <a:off x="6492240" y="2971800"/>
+            <a:ext cx="4069080" cy="777240"/>
+          </a:xfrm>
+          <a:prstGeom prst="rect">
+            <a:avLst/>
+          </a:prstGeom>
+          <a:noFill/>
+        </p:spPr>
+        <p:txBody>
+          <a:bodyPr wrap="square" lIns="73152" rIns="73152" tIns="36576" bIns="36576">
+            <a:spAutoFit/>
+          </a:bodyPr>
+          <a:lstStyle/>
+          <a:p>
+            <a:pPr algn="l"/>
+            <a:r>
+              <a:rPr sz="1700" b="0">
+                <a:solidFill>
+                  <a:srgbClr val="1A202C"/>
+                </a:solidFill>
+                <a:latin typeface="Arial"/>
+              </a:rPr>
+              <a:t>It is a local comparison on the same OpenAlex AI subset, hardware, indexes, and query workload.</a:t>
+            </a:r>
+          </a:p>
+        </p:txBody>
+      </p:sp>
+      <p:sp>
+        <p:nvSpPr>
+          <p:cNvPr id="14" name="TextBox 13"/>
+          <p:cNvSpPr txBox="1"/>
+          <p:nvPr/>
+        </p:nvSpPr>
+        <p:spPr>
+          <a:xfrm>
+            <a:off x="6492240" y="4160520"/>
+            <a:ext cx="4023360" cy="457200"/>
+          </a:xfrm>
+          <a:prstGeom prst="rect">
+            <a:avLst/>
+          </a:prstGeom>
+          <a:noFill/>
+        </p:spPr>
+        <p:txBody>
+          <a:bodyPr wrap="square" lIns="73152" rIns="73152" tIns="36576" bIns="36576">
+            <a:spAutoFit/>
+          </a:bodyPr>
+          <a:lstStyle/>
+          <a:p>
+            <a:pPr algn="l"/>
+            <a:r>
+              <a:rPr sz="1800" b="1">
+                <a:solidFill>
+                  <a:srgbClr val="1A202C"/>
+                </a:solidFill>
+                <a:latin typeface="Arial"/>
+              </a:rPr>
+              <a:t>The main goal is to connect query shape to database model.</a:t>
+            </a:r>
+          </a:p>
+        </p:txBody>
+      </p:sp>
+      <p:sp>
+        <p:nvSpPr>
+          <p:cNvPr id="15" name="Rectangle 14"/>
           <p:cNvSpPr/>
           <p:nvPr/>
         </p:nvSpPr>
@@ -6377,7 +6766,7 @@
       </p:sp>
       <p:sp>
         <p:nvSpPr>
-          <p:cNvPr id="9" name="TextBox 8"/>
+          <p:cNvPr id="16" name="TextBox 15"/>
           <p:cNvSpPr txBox="1"/>
           <p:nvPr/>
         </p:nvSpPr>
@@ -6412,7 +6801,7 @@
       </p:sp>
       <p:sp>
         <p:nvSpPr>
-          <p:cNvPr id="10" name="TextBox 9"/>
+          <p:cNvPr id="17" name="TextBox 16"/>
           <p:cNvSpPr txBox="1"/>
           <p:nvPr/>
         </p:nvSpPr>
@@ -6536,7 +6925,7 @@
                 </a:solidFill>
                 <a:latin typeface="Arial"/>
               </a:rPr>
-              <a:t>Interpretation</a:t>
+              <a:t>Main Benchmark Results</a:t>
             </a:r>
           </a:p>
         </p:txBody>
@@ -6571,7 +6960,7 @@
                 </a:solidFill>
                 <a:latin typeface="Arial"/>
               </a:rPr>
-              <a:t>The better database depends on the query type</a:t>
+              <a:t>Average execution time across 11 equivalent query pairs</a:t>
             </a:r>
           </a:p>
         </p:txBody>
@@ -6635,487 +7024,33 @@
           </a:p>
         </p:txBody>
       </p:sp>
-      <p:sp>
-        <p:nvSpPr>
-          <p:cNvPr id="7" name="Rounded Rectangle 6"/>
-          <p:cNvSpPr/>
-          <p:nvPr/>
-        </p:nvSpPr>
-        <p:spPr>
-          <a:xfrm>
-            <a:off x="594360" y="1508760"/>
-            <a:ext cx="3429000" cy="4343400"/>
-          </a:xfrm>
-          <a:prstGeom prst="roundRect">
-            <a:avLst/>
-          </a:prstGeom>
-          <a:solidFill>
-            <a:srgbClr val="FBFBFB"/>
-          </a:solidFill>
-          <a:ln w="15875">
-            <a:solidFill>
-              <a:srgbClr val="E4E4E4"/>
-            </a:solidFill>
-          </a:ln>
-        </p:spPr>
-        <p:style>
-          <a:lnRef idx="1">
-            <a:schemeClr val="accent1"/>
-          </a:lnRef>
-          <a:fillRef idx="3">
-            <a:schemeClr val="accent1"/>
-          </a:fillRef>
-          <a:effectRef idx="2">
-            <a:schemeClr val="accent1"/>
-          </a:effectRef>
-          <a:fontRef idx="minor">
-            <a:schemeClr val="lt1"/>
-          </a:fontRef>
-        </p:style>
-        <p:txBody>
-          <a:bodyPr rtlCol="0" anchor="ctr"/>
-          <a:lstStyle/>
-          <a:p>
-            <a:pPr algn="ctr"/>
-          </a:p>
-        </p:txBody>
-      </p:sp>
-      <p:sp>
-        <p:nvSpPr>
-          <p:cNvPr id="8" name="TextBox 7"/>
-          <p:cNvSpPr txBox="1"/>
-          <p:nvPr/>
-        </p:nvSpPr>
-        <p:spPr>
-          <a:xfrm>
-            <a:off x="822960" y="1783080"/>
-            <a:ext cx="2926080" cy="502920"/>
-          </a:xfrm>
-          <a:prstGeom prst="rect">
-            <a:avLst/>
-          </a:prstGeom>
-          <a:noFill/>
-        </p:spPr>
-        <p:txBody>
-          <a:bodyPr wrap="square" lIns="73152" rIns="73152" tIns="36576" bIns="36576">
-            <a:spAutoFit/>
-          </a:bodyPr>
-          <a:lstStyle/>
-          <a:p>
-            <a:pPr algn="l"/>
-            <a:r>
-              <a:rPr sz="1600" b="1">
-                <a:solidFill>
-                  <a:srgbClr val="52121E"/>
-                </a:solidFill>
-                <a:latin typeface="Arial"/>
-              </a:rPr>
-              <a:t>PostgreSQL performed best for</a:t>
-            </a:r>
-          </a:p>
-        </p:txBody>
-      </p:sp>
-      <p:sp>
-        <p:nvSpPr>
-          <p:cNvPr id="9" name="TextBox 8"/>
-          <p:cNvSpPr txBox="1"/>
-          <p:nvPr/>
-        </p:nvSpPr>
-        <p:spPr>
-          <a:xfrm>
-            <a:off x="822960" y="2514600"/>
-            <a:ext cx="2971800" cy="2468880"/>
-          </a:xfrm>
-          <a:prstGeom prst="rect">
-            <a:avLst/>
-          </a:prstGeom>
-          <a:noFill/>
-        </p:spPr>
-        <p:txBody>
-          <a:bodyPr wrap="square" lIns="73152" rIns="73152" tIns="36576" bIns="36576">
-            <a:spAutoFit/>
-          </a:bodyPr>
-          <a:lstStyle/>
-          <a:p>
-            <a:pPr algn="l">
-              <a:spcAft>
-                <a:spcPts val="600"/>
-              </a:spcAft>
-              <a:defRPr sz="1600"/>
-            </a:pPr>
-            <a:r>
-              <a:rPr sz="1600" b="0">
-                <a:solidFill>
-                  <a:srgbClr val="1A202C"/>
-                </a:solidFill>
-                <a:latin typeface="Arial"/>
-              </a:rPr>
-              <a:t>- Sorting and aggregation</a:t>
-            </a:r>
-            <a:br/>
-            <a:r>
-              <a:rPr sz="1600">
-                <a:solidFill>
-                  <a:srgbClr val="1A202C"/>
-                </a:solidFill>
-              </a:rPr>
-              <a:t>- Traditional joins</a:t>
-            </a:r>
-            <a:br/>
-            <a:r>
-              <a:rPr sz="1600">
-                <a:solidFill>
-                  <a:srgbClr val="1A202C"/>
-                </a:solidFill>
-              </a:rPr>
-              <a:t>- Most cited papers</a:t>
-            </a:r>
-            <a:br/>
-            <a:r>
-              <a:rPr sz="1600">
-                <a:solidFill>
-                  <a:srgbClr val="1A202C"/>
-                </a:solidFill>
-              </a:rPr>
-              <a:t>- Top authors/topics</a:t>
-            </a:r>
-            <a:br/>
-            <a:r>
-              <a:rPr sz="1600">
-                <a:solidFill>
-                  <a:srgbClr val="1A202C"/>
-                </a:solidFill>
-              </a:rPr>
-              <a:t>- Small structured dataset</a:t>
-            </a:r>
-          </a:p>
-        </p:txBody>
-      </p:sp>
-      <p:sp>
-        <p:nvSpPr>
-          <p:cNvPr id="10" name="Rounded Rectangle 9"/>
-          <p:cNvSpPr/>
-          <p:nvPr/>
-        </p:nvSpPr>
-        <p:spPr>
-          <a:xfrm>
-            <a:off x="4480560" y="1508760"/>
-            <a:ext cx="3429000" cy="4343400"/>
-          </a:xfrm>
-          <a:prstGeom prst="roundRect">
-            <a:avLst/>
-          </a:prstGeom>
-          <a:solidFill>
-            <a:srgbClr val="FBFBFB"/>
-          </a:solidFill>
-          <a:ln w="15875">
-            <a:solidFill>
-              <a:srgbClr val="E4E4E4"/>
-            </a:solidFill>
-          </a:ln>
-        </p:spPr>
-        <p:style>
-          <a:lnRef idx="1">
-            <a:schemeClr val="accent1"/>
-          </a:lnRef>
-          <a:fillRef idx="3">
-            <a:schemeClr val="accent1"/>
-          </a:fillRef>
-          <a:effectRef idx="2">
-            <a:schemeClr val="accent1"/>
-          </a:effectRef>
-          <a:fontRef idx="minor">
-            <a:schemeClr val="lt1"/>
-          </a:fontRef>
-        </p:style>
-        <p:txBody>
-          <a:bodyPr rtlCol="0" anchor="ctr"/>
-          <a:lstStyle/>
-          <a:p>
-            <a:pPr algn="ctr"/>
-          </a:p>
-        </p:txBody>
-      </p:sp>
-      <p:sp>
-        <p:nvSpPr>
-          <p:cNvPr id="11" name="TextBox 10"/>
-          <p:cNvSpPr txBox="1"/>
-          <p:nvPr/>
-        </p:nvSpPr>
-        <p:spPr>
-          <a:xfrm>
-            <a:off x="4709160" y="1783080"/>
-            <a:ext cx="2926080" cy="502920"/>
-          </a:xfrm>
-          <a:prstGeom prst="rect">
-            <a:avLst/>
-          </a:prstGeom>
-          <a:noFill/>
-        </p:spPr>
-        <p:txBody>
-          <a:bodyPr wrap="square" lIns="73152" rIns="73152" tIns="36576" bIns="36576">
-            <a:spAutoFit/>
-          </a:bodyPr>
-          <a:lstStyle/>
-          <a:p>
-            <a:pPr algn="l"/>
-            <a:r>
-              <a:rPr sz="1600" b="1">
-                <a:solidFill>
-                  <a:srgbClr val="52121E"/>
-                </a:solidFill>
-                <a:latin typeface="Arial"/>
-              </a:rPr>
-              <a:t>Neo4j performed best for</a:t>
-            </a:r>
-          </a:p>
-        </p:txBody>
-      </p:sp>
-      <p:sp>
-        <p:nvSpPr>
-          <p:cNvPr id="12" name="TextBox 11"/>
-          <p:cNvSpPr txBox="1"/>
-          <p:nvPr/>
-        </p:nvSpPr>
-        <p:spPr>
-          <a:xfrm>
-            <a:off x="4709160" y="2514600"/>
-            <a:ext cx="2971800" cy="2468880"/>
-          </a:xfrm>
-          <a:prstGeom prst="rect">
-            <a:avLst/>
-          </a:prstGeom>
-          <a:noFill/>
-        </p:spPr>
-        <p:txBody>
-          <a:bodyPr wrap="square" lIns="73152" rIns="73152" tIns="36576" bIns="36576">
-            <a:spAutoFit/>
-          </a:bodyPr>
-          <a:lstStyle/>
-          <a:p>
-            <a:pPr algn="l">
-              <a:spcAft>
-                <a:spcPts val="200"/>
-              </a:spcAft>
-              <a:defRPr sz="1600"/>
-            </a:pPr>
-            <a:r>
-              <a:rPr sz="1400">
-                <a:solidFill>
-                  <a:srgbClr val="1F2430"/>
-                </a:solidFill>
-                <a:latin typeface="Aptos"/>
-              </a:rPr>
-              <a:t>- Author citation network</a:t>
-            </a:r>
-          </a:p>
-          <a:p>
-            <a:pPr>
-              <a:spcAft>
-                <a:spcPts val="200"/>
-              </a:spcAft>
-            </a:pPr>
-            <a:r>
-              <a:rPr sz="1400">
-                <a:solidFill>
-                  <a:srgbClr val="1F2430"/>
-                </a:solidFill>
-                <a:latin typeface="Aptos"/>
-              </a:rPr>
-              <a:t>- Two supplemental graph-heavy wins</a:t>
-            </a:r>
-          </a:p>
-          <a:p>
-            <a:pPr>
-              <a:spcAft>
-                <a:spcPts val="200"/>
-              </a:spcAft>
-            </a:pPr>
-            <a:r>
-              <a:rPr sz="1400">
-                <a:solidFill>
-                  <a:srgbClr val="1F2430"/>
-                </a:solidFill>
-                <a:latin typeface="Aptos"/>
-              </a:rPr>
-              <a:t>- Multi-hop traversal + topic overlap</a:t>
-            </a:r>
-          </a:p>
-          <a:p>
-            <a:pPr>
-              <a:spcAft>
-                <a:spcPts val="200"/>
-              </a:spcAft>
-            </a:pPr>
-            <a:r>
-              <a:rPr sz="1400">
-                <a:solidFill>
-                  <a:srgbClr val="1F2430"/>
-                </a:solidFill>
-                <a:latin typeface="Aptos"/>
-              </a:rPr>
-              <a:t>- Path-style graph questions</a:t>
-            </a:r>
-          </a:p>
-          <a:p>
-            <a:pPr>
-              <a:spcAft>
-                <a:spcPts val="200"/>
-              </a:spcAft>
-            </a:pPr>
-            <a:r>
-              <a:rPr sz="1400">
-                <a:solidFill>
-                  <a:srgbClr val="1F2430"/>
-                </a:solidFill>
-                <a:latin typeface="Aptos"/>
-              </a:rPr>
-              <a:t>- Visual exploration</a:t>
-            </a:r>
-          </a:p>
-        </p:txBody>
-      </p:sp>
-      <p:sp>
-        <p:nvSpPr>
-          <p:cNvPr id="13" name="Rounded Rectangle 12"/>
-          <p:cNvSpPr/>
-          <p:nvPr/>
-        </p:nvSpPr>
-        <p:spPr>
-          <a:xfrm>
-            <a:off x="8366760" y="1508760"/>
-            <a:ext cx="3429000" cy="4343400"/>
-          </a:xfrm>
-          <a:prstGeom prst="roundRect">
-            <a:avLst/>
-          </a:prstGeom>
-          <a:solidFill>
-            <a:srgbClr val="FBFBFB"/>
-          </a:solidFill>
-          <a:ln w="15875">
-            <a:solidFill>
-              <a:srgbClr val="EAD5D8"/>
-            </a:solidFill>
-          </a:ln>
-        </p:spPr>
-        <p:style>
-          <a:lnRef idx="1">
-            <a:schemeClr val="accent1"/>
-          </a:lnRef>
-          <a:fillRef idx="3">
-            <a:schemeClr val="accent1"/>
-          </a:fillRef>
-          <a:effectRef idx="2">
-            <a:schemeClr val="accent1"/>
-          </a:effectRef>
-          <a:fontRef idx="minor">
-            <a:schemeClr val="lt1"/>
-          </a:fontRef>
-        </p:style>
-        <p:txBody>
-          <a:bodyPr rtlCol="0" anchor="ctr"/>
-          <a:lstStyle/>
-          <a:p>
-            <a:pPr algn="ctr"/>
-          </a:p>
-        </p:txBody>
-      </p:sp>
-      <p:sp>
-        <p:nvSpPr>
-          <p:cNvPr id="14" name="TextBox 13"/>
-          <p:cNvSpPr txBox="1"/>
-          <p:nvPr/>
-        </p:nvSpPr>
-        <p:spPr>
-          <a:xfrm>
-            <a:off x="8595360" y="1783080"/>
-            <a:ext cx="2926080" cy="502920"/>
-          </a:xfrm>
-          <a:prstGeom prst="rect">
-            <a:avLst/>
-          </a:prstGeom>
-          <a:noFill/>
-        </p:spPr>
-        <p:txBody>
-          <a:bodyPr wrap="square" lIns="73152" rIns="73152" tIns="36576" bIns="36576">
-            <a:spAutoFit/>
-          </a:bodyPr>
-          <a:lstStyle/>
-          <a:p>
-            <a:pPr algn="l"/>
-            <a:r>
-              <a:rPr sz="1600" b="1">
-                <a:solidFill>
-                  <a:srgbClr val="52121E"/>
-                </a:solidFill>
-                <a:latin typeface="Arial"/>
-              </a:rPr>
-              <a:t>Main lesson</a:t>
-            </a:r>
-          </a:p>
-        </p:txBody>
-      </p:sp>
-      <p:sp>
-        <p:nvSpPr>
-          <p:cNvPr id="15" name="TextBox 14"/>
-          <p:cNvSpPr txBox="1"/>
-          <p:nvPr/>
-        </p:nvSpPr>
-        <p:spPr>
-          <a:xfrm>
-            <a:off x="8595360" y="2514600"/>
-            <a:ext cx="2971800" cy="2468880"/>
-          </a:xfrm>
-          <a:prstGeom prst="rect">
-            <a:avLst/>
-          </a:prstGeom>
-          <a:noFill/>
-        </p:spPr>
-        <p:txBody>
-          <a:bodyPr wrap="square" lIns="73152" rIns="73152" tIns="36576" bIns="36576">
-            <a:spAutoFit/>
-          </a:bodyPr>
-          <a:lstStyle/>
-          <a:p>
-            <a:pPr algn="l">
-              <a:spcAft>
-                <a:spcPts val="600"/>
-              </a:spcAft>
-              <a:defRPr sz="1600"/>
-            </a:pPr>
-            <a:r>
-              <a:rPr sz="1600" b="0">
-                <a:solidFill>
-                  <a:srgbClr val="1A202C"/>
-                </a:solidFill>
-                <a:latin typeface="Arial"/>
-              </a:rPr>
-              <a:t>- Relational models are efficient for structured analysis.</a:t>
-            </a:r>
-            <a:br/>
-            <a:r>
-              <a:rPr sz="1600">
-                <a:solidFill>
-                  <a:srgbClr val="1A202C"/>
-                </a:solidFill>
-              </a:rPr>
-              <a:t>- Graph models are expressive for relationship-heavy questions.</a:t>
-            </a:r>
-            <a:br/>
-            <a:r>
-              <a:rPr sz="1600">
-                <a:solidFill>
-                  <a:srgbClr val="1A202C"/>
-                </a:solidFill>
-              </a:rPr>
-              <a:t>- Use the model that matches the question.</a:t>
-            </a:r>
-          </a:p>
-        </p:txBody>
-      </p:sp>
-      <p:sp>
-        <p:nvSpPr>
-          <p:cNvPr id="16" name="Rectangle 15"/>
+      <p:pic>
+        <p:nvPicPr>
+          <p:cNvPr id="7" name="Picture 6" descr="benchmark_summary.png"/>
+          <p:cNvPicPr>
+            <a:picLocks noChangeAspect="1"/>
+          </p:cNvPicPr>
+          <p:nvPr/>
+        </p:nvPicPr>
+        <p:blipFill>
+          <a:blip r:embed="rId3"/>
+          <a:stretch>
+            <a:fillRect/>
+          </a:stretch>
+        </p:blipFill>
+        <p:spPr>
+          <a:xfrm>
+            <a:off x="1483359" y="1005840"/>
+            <a:ext cx="9103360" cy="5120640"/>
+          </a:xfrm>
+          <a:prstGeom prst="rect">
+            <a:avLst/>
+          </a:prstGeom>
+        </p:spPr>
+      </p:pic>
+      <p:sp>
+        <p:nvSpPr>
+          <p:cNvPr id="8" name="Rectangle 7"/>
           <p:cNvSpPr/>
           <p:nvPr/>
         </p:nvSpPr>
@@ -7158,7 +7093,7 @@
       </p:sp>
       <p:sp>
         <p:nvSpPr>
-          <p:cNvPr id="17" name="TextBox 16"/>
+          <p:cNvPr id="9" name="TextBox 8"/>
           <p:cNvSpPr txBox="1"/>
           <p:nvPr/>
         </p:nvSpPr>
@@ -7193,7 +7128,7 @@
       </p:sp>
       <p:sp>
         <p:nvSpPr>
-          <p:cNvPr id="18" name="TextBox 17"/>
+          <p:cNvPr id="10" name="TextBox 9"/>
           <p:cNvSpPr txBox="1"/>
           <p:nvPr/>
         </p:nvSpPr>
@@ -7317,7 +7252,7 @@
                 </a:solidFill>
                 <a:latin typeface="Arial"/>
               </a:rPr>
-              <a:t>Limitations and Future Work</a:t>
+              <a:t>Supplemental Graph-Focused Results</a:t>
             </a:r>
           </a:p>
         </p:txBody>
@@ -7352,7 +7287,7 @@
                 </a:solidFill>
                 <a:latin typeface="Arial"/>
               </a:rPr>
-              <a:t>What could be improved with more time</a:t>
+              <a:t>Graph-focused workload: PostgreSQL 5/9, Neo4j 4/9</a:t>
             </a:r>
           </a:p>
         </p:txBody>
@@ -7416,303 +7351,33 @@
           </a:p>
         </p:txBody>
       </p:sp>
-      <p:sp>
-        <p:nvSpPr>
-          <p:cNvPr id="7" name="Rounded Rectangle 6"/>
-          <p:cNvSpPr/>
-          <p:nvPr/>
-        </p:nvSpPr>
-        <p:spPr>
-          <a:xfrm>
-            <a:off x="731520" y="1417320"/>
-            <a:ext cx="4937760" cy="4343400"/>
-          </a:xfrm>
-          <a:prstGeom prst="roundRect">
-            <a:avLst/>
-          </a:prstGeom>
-          <a:solidFill>
-            <a:srgbClr val="FBFBFB"/>
-          </a:solidFill>
-          <a:ln w="15875">
-            <a:solidFill>
-              <a:srgbClr val="E4E4E4"/>
-            </a:solidFill>
-          </a:ln>
-        </p:spPr>
-        <p:style>
-          <a:lnRef idx="1">
-            <a:schemeClr val="accent1"/>
-          </a:lnRef>
-          <a:fillRef idx="3">
-            <a:schemeClr val="accent1"/>
-          </a:fillRef>
-          <a:effectRef idx="2">
-            <a:schemeClr val="accent1"/>
-          </a:effectRef>
-          <a:fontRef idx="minor">
-            <a:schemeClr val="lt1"/>
-          </a:fontRef>
-        </p:style>
-        <p:txBody>
-          <a:bodyPr rtlCol="0" anchor="ctr"/>
-          <a:lstStyle/>
-          <a:p>
-            <a:pPr algn="ctr"/>
-          </a:p>
-        </p:txBody>
-      </p:sp>
-      <p:sp>
-        <p:nvSpPr>
-          <p:cNvPr id="8" name="TextBox 7"/>
-          <p:cNvSpPr txBox="1"/>
-          <p:nvPr/>
-        </p:nvSpPr>
-        <p:spPr>
-          <a:xfrm>
-            <a:off x="1051560" y="1709928"/>
-            <a:ext cx="2743200" cy="320040"/>
-          </a:xfrm>
-          <a:prstGeom prst="rect">
-            <a:avLst/>
-          </a:prstGeom>
-          <a:noFill/>
-        </p:spPr>
-        <p:txBody>
-          <a:bodyPr wrap="square" lIns="73152" rIns="73152" tIns="36576" bIns="36576">
-            <a:spAutoFit/>
-          </a:bodyPr>
-          <a:lstStyle/>
-          <a:p>
-            <a:pPr algn="l"/>
-            <a:r>
-              <a:rPr sz="1800" b="1">
-                <a:solidFill>
-                  <a:srgbClr val="52121E"/>
-                </a:solidFill>
-                <a:latin typeface="Arial"/>
-              </a:rPr>
-              <a:t>Limitations</a:t>
-            </a:r>
-          </a:p>
-        </p:txBody>
-      </p:sp>
-      <p:sp>
-        <p:nvSpPr>
-          <p:cNvPr id="9" name="TextBox 8"/>
-          <p:cNvSpPr txBox="1"/>
-          <p:nvPr/>
-        </p:nvSpPr>
-        <p:spPr>
-          <a:xfrm>
-            <a:off x="1051560" y="2148840"/>
-            <a:ext cx="4251960" cy="2377440"/>
-          </a:xfrm>
-          <a:prstGeom prst="rect">
-            <a:avLst/>
-          </a:prstGeom>
-          <a:noFill/>
-        </p:spPr>
-        <p:txBody>
-          <a:bodyPr wrap="square" lIns="73152" rIns="73152" tIns="36576" bIns="36576">
-            <a:spAutoFit/>
-          </a:bodyPr>
-          <a:lstStyle/>
-          <a:p>
-            <a:pPr algn="l">
-              <a:spcAft>
-                <a:spcPts val="600"/>
-              </a:spcAft>
-              <a:defRPr sz="1800"/>
-            </a:pPr>
-            <a:r>
-              <a:rPr sz="1800" b="0">
-                <a:solidFill>
-                  <a:srgbClr val="1A202C"/>
-                </a:solidFill>
-                <a:latin typeface="Arial"/>
-              </a:rPr>
-              <a:t>- The dataset is a selected OpenAlex subset, not full OpenAlex</a:t>
-            </a:r>
-            <a:br/>
-            <a:r>
-              <a:rPr sz="1800">
-                <a:solidFill>
-                  <a:srgbClr val="1A202C"/>
-                </a:solidFill>
-              </a:rPr>
-              <a:t>- Benchmark results depend on local hardware and cache state</a:t>
-            </a:r>
-            <a:br/>
-            <a:r>
-              <a:rPr sz="1800">
-                <a:solidFill>
-                  <a:srgbClr val="1A202C"/>
-                </a:solidFill>
-              </a:rPr>
-              <a:t>- Neo4j overhead is visible on small datasets</a:t>
-            </a:r>
-            <a:br/>
-            <a:r>
-              <a:rPr sz="1800">
-                <a:solidFill>
-                  <a:srgbClr val="1A202C"/>
-                </a:solidFill>
-              </a:rPr>
-              <a:t>- No advanced full-text/vector search layer was added</a:t>
-            </a:r>
-          </a:p>
-        </p:txBody>
-      </p:sp>
-      <p:sp>
-        <p:nvSpPr>
-          <p:cNvPr id="10" name="Rounded Rectangle 9"/>
-          <p:cNvSpPr/>
-          <p:nvPr/>
-        </p:nvSpPr>
-        <p:spPr>
-          <a:xfrm>
-            <a:off x="6172200" y="1417320"/>
-            <a:ext cx="4937760" cy="4343400"/>
-          </a:xfrm>
-          <a:prstGeom prst="roundRect">
-            <a:avLst/>
-          </a:prstGeom>
-          <a:solidFill>
-            <a:srgbClr val="FFFDFD"/>
-          </a:solidFill>
-          <a:ln w="15875">
-            <a:solidFill>
-              <a:srgbClr val="EAD5D8"/>
-            </a:solidFill>
-          </a:ln>
-        </p:spPr>
-        <p:style>
-          <a:lnRef idx="1">
-            <a:schemeClr val="accent1"/>
-          </a:lnRef>
-          <a:fillRef idx="3">
-            <a:schemeClr val="accent1"/>
-          </a:fillRef>
-          <a:effectRef idx="2">
-            <a:schemeClr val="accent1"/>
-          </a:effectRef>
-          <a:fontRef idx="minor">
-            <a:schemeClr val="lt1"/>
-          </a:fontRef>
-        </p:style>
-        <p:txBody>
-          <a:bodyPr rtlCol="0" anchor="ctr"/>
-          <a:lstStyle/>
-          <a:p>
-            <a:pPr algn="ctr"/>
-          </a:p>
-        </p:txBody>
-      </p:sp>
-      <p:sp>
-        <p:nvSpPr>
-          <p:cNvPr id="11" name="TextBox 10"/>
-          <p:cNvSpPr txBox="1"/>
-          <p:nvPr/>
-        </p:nvSpPr>
-        <p:spPr>
-          <a:xfrm>
-            <a:off x="6492240" y="1709928"/>
-            <a:ext cx="2743200" cy="320040"/>
-          </a:xfrm>
-          <a:prstGeom prst="rect">
-            <a:avLst/>
-          </a:prstGeom>
-          <a:noFill/>
-        </p:spPr>
-        <p:txBody>
-          <a:bodyPr wrap="square" lIns="73152" rIns="73152" tIns="36576" bIns="36576">
-            <a:spAutoFit/>
-          </a:bodyPr>
-          <a:lstStyle/>
-          <a:p>
-            <a:pPr algn="l"/>
-            <a:r>
-              <a:rPr sz="1800" b="1">
-                <a:solidFill>
-                  <a:srgbClr val="52121E"/>
-                </a:solidFill>
-                <a:latin typeface="Arial"/>
-              </a:rPr>
-              <a:t>Future work</a:t>
-            </a:r>
-          </a:p>
-        </p:txBody>
-      </p:sp>
-      <p:sp>
-        <p:nvSpPr>
-          <p:cNvPr id="12" name="TextBox 11"/>
-          <p:cNvSpPr txBox="1"/>
-          <p:nvPr/>
-        </p:nvSpPr>
-        <p:spPr>
-          <a:xfrm>
-            <a:off x="6492240" y="2148840"/>
-            <a:ext cx="4251960" cy="2377440"/>
-          </a:xfrm>
-          <a:prstGeom prst="rect">
-            <a:avLst/>
-          </a:prstGeom>
-          <a:noFill/>
-        </p:spPr>
-        <p:txBody>
-          <a:bodyPr wrap="square" lIns="73152" rIns="73152" tIns="36576" bIns="36576">
-            <a:spAutoFit/>
-          </a:bodyPr>
-          <a:lstStyle/>
-          <a:p>
-            <a:pPr algn="l">
-              <a:spcAft>
-                <a:spcPts val="600"/>
-              </a:spcAft>
-              <a:defRPr sz="1800"/>
-            </a:pPr>
-            <a:r>
-              <a:rPr sz="1800" b="0">
-                <a:solidFill>
-                  <a:srgbClr val="1A202C"/>
-                </a:solidFill>
-                <a:latin typeface="Arial"/>
-              </a:rPr>
-              <a:t>- Increase dataset size</a:t>
-            </a:r>
-            <a:br/>
-            <a:r>
-              <a:rPr sz="1800">
-                <a:solidFill>
-                  <a:srgbClr val="1A202C"/>
-                </a:solidFill>
-              </a:rPr>
-              <a:t>- Add full-text search and vector retrieval</a:t>
-            </a:r>
-            <a:br/>
-            <a:r>
-              <a:rPr sz="1800">
-                <a:solidFill>
-                  <a:srgbClr val="1A202C"/>
-                </a:solidFill>
-              </a:rPr>
-              <a:t>- Tune indexes and constraints further</a:t>
-            </a:r>
-            <a:br/>
-            <a:r>
-              <a:rPr sz="1800">
-                <a:solidFill>
-                  <a:srgbClr val="1A202C"/>
-                </a:solidFill>
-              </a:rPr>
-              <a:t>- Build a simple RAG search demo on top of the databases</a:t>
-            </a:r>
-          </a:p>
-        </p:txBody>
-      </p:sp>
-      <p:sp>
-        <p:nvSpPr>
-          <p:cNvPr id="13" name="Rectangle 12"/>
+      <p:pic>
+        <p:nvPicPr>
+          <p:cNvPr id="7" name="Picture 6" descr="graph_focused_benchmark_summary.png"/>
+          <p:cNvPicPr>
+            <a:picLocks noChangeAspect="1"/>
+          </p:cNvPicPr>
+          <p:nvPr/>
+        </p:nvPicPr>
+        <p:blipFill>
+          <a:blip r:embed="rId3"/>
+          <a:stretch>
+            <a:fillRect/>
+          </a:stretch>
+        </p:blipFill>
+        <p:spPr>
+          <a:xfrm>
+            <a:off x="1732280" y="1261872"/>
+            <a:ext cx="8696960" cy="4892040"/>
+          </a:xfrm>
+          <a:prstGeom prst="rect">
+            <a:avLst/>
+          </a:prstGeom>
+        </p:spPr>
+      </p:pic>
+      <p:sp>
+        <p:nvSpPr>
+          <p:cNvPr id="8" name="Rectangle 7"/>
           <p:cNvSpPr/>
           <p:nvPr/>
         </p:nvSpPr>
@@ -7755,7 +7420,7 @@
       </p:sp>
       <p:sp>
         <p:nvSpPr>
-          <p:cNvPr id="14" name="TextBox 13"/>
+          <p:cNvPr id="9" name="TextBox 8"/>
           <p:cNvSpPr txBox="1"/>
           <p:nvPr/>
         </p:nvSpPr>
@@ -7790,7 +7455,7 @@
       </p:sp>
       <p:sp>
         <p:nvSpPr>
-          <p:cNvPr id="15" name="TextBox 14"/>
+          <p:cNvPr id="10" name="TextBox 9"/>
           <p:cNvSpPr txBox="1"/>
           <p:nvPr/>
         </p:nvSpPr>
@@ -7914,7 +7579,7 @@
                 </a:solidFill>
                 <a:latin typeface="Arial"/>
               </a:rPr>
-              <a:t>Final Conclusions</a:t>
+              <a:t>Interpretation</a:t>
             </a:r>
           </a:p>
         </p:txBody>
@@ -7949,7 +7614,7 @@
                 </a:solidFill>
                 <a:latin typeface="Arial"/>
               </a:rPr>
-              <a:t>From requirements to results</a:t>
+              <a:t>The better database depends on the query type</a:t>
             </a:r>
           </a:p>
         </p:txBody>
@@ -8021,8 +7686,8 @@
         </p:nvSpPr>
         <p:spPr>
           <a:xfrm>
-            <a:off x="868680" y="1325880"/>
-            <a:ext cx="5166360" cy="4526280"/>
+            <a:off x="594360" y="1508760"/>
+            <a:ext cx="3429000" cy="4343400"/>
           </a:xfrm>
           <a:prstGeom prst="roundRect">
             <a:avLst/>
@@ -8066,8 +7731,8 @@
         </p:nvSpPr>
         <p:spPr>
           <a:xfrm>
-            <a:off x="1188720" y="1627632"/>
-            <a:ext cx="3291840" cy="320040"/>
+            <a:off x="822960" y="1783080"/>
+            <a:ext cx="2926080" cy="502920"/>
           </a:xfrm>
           <a:prstGeom prst="rect">
             <a:avLst/>
@@ -8082,13 +7747,13 @@
           <a:p>
             <a:pPr algn="l"/>
             <a:r>
-              <a:rPr sz="1800" b="1">
+              <a:rPr sz="1600" b="1">
                 <a:solidFill>
                   <a:srgbClr val="52121E"/>
                 </a:solidFill>
                 <a:latin typeface="Arial"/>
               </a:rPr>
-              <a:t>What we delivered</a:t>
+              <a:t>PostgreSQL performed best for</a:t>
             </a:r>
           </a:p>
         </p:txBody>
@@ -8101,8 +7766,8 @@
         </p:nvSpPr>
         <p:spPr>
           <a:xfrm>
-            <a:off x="1188720" y="2057400"/>
-            <a:ext cx="4297680" cy="2743200"/>
+            <a:off x="822960" y="2514600"/>
+            <a:ext cx="2971800" cy="2468880"/>
           </a:xfrm>
           <a:prstGeom prst="rect">
             <a:avLst/>
@@ -8119,61 +7784,52 @@
               <a:spcAft>
                 <a:spcPts val="600"/>
               </a:spcAft>
-              <a:defRPr sz="1700"/>
+              <a:defRPr sz="1600"/>
             </a:pPr>
             <a:r>
-              <a:rPr sz="1700" b="0">
+              <a:rPr sz="1600" b="0">
                 <a:solidFill>
                   <a:srgbClr val="1A202C"/>
                 </a:solidFill>
                 <a:latin typeface="Arial"/>
               </a:rPr>
-              <a:t>- OpenAlex ETL pipeline</a:t>
+              <a:t>- Ranking and aggregation</a:t>
             </a:r>
             <a:br/>
             <a:r>
-              <a:rPr sz="1700">
+              <a:rPr sz="1600">
                 <a:solidFill>
                   <a:srgbClr val="1A202C"/>
                 </a:solidFill>
               </a:rPr>
-              <a:t>- PostgreSQL and Neo4j data models</a:t>
+              <a:t>- Small selective lookups</a:t>
             </a:r>
             <a:br/>
             <a:r>
-              <a:rPr sz="1700">
+              <a:rPr sz="1600">
                 <a:solidFill>
                   <a:srgbClr val="1A202C"/>
                 </a:solidFill>
               </a:rPr>
-              <a:t>- Docker-based reproducible setup</a:t>
+              <a:t>- Traditional joins</a:t>
             </a:r>
             <a:br/>
             <a:r>
-              <a:rPr sz="1700">
+              <a:rPr sz="1600">
                 <a:solidFill>
                   <a:srgbClr val="1A202C"/>
                 </a:solidFill>
               </a:rPr>
-              <a:t>- Equivalent SQL and Cypher query set</a:t>
+              <a:t>- Main workload: 10 of 11 wins</a:t>
             </a:r>
             <a:br/>
             <a:r>
-              <a:rPr sz="1700">
+              <a:rPr sz="1600">
                 <a:solidFill>
                   <a:srgbClr val="1A202C"/>
                 </a:solidFill>
               </a:rPr>
-              <a:t>- Benchmark results and interpretation</a:t>
-            </a:r>
-            <a:br/>
-            <a:r>
-              <a:rPr sz="1700">
-                <a:solidFill>
-                  <a:srgbClr val="1A202C"/>
-                </a:solidFill>
-              </a:rPr>
-              <a:t>- Project report and README</a:t>
+              <a:t>- Combined: 15 of 20 wins</a:t>
             </a:r>
           </a:p>
         </p:txBody>
@@ -8186,14 +7842,170 @@
         </p:nvSpPr>
         <p:spPr>
           <a:xfrm>
-            <a:off x="6400800" y="1325880"/>
-            <a:ext cx="4617720" cy="4526280"/>
+            <a:off x="4480560" y="1508760"/>
+            <a:ext cx="3429000" cy="4343400"/>
           </a:xfrm>
           <a:prstGeom prst="roundRect">
             <a:avLst/>
           </a:prstGeom>
           <a:solidFill>
-            <a:srgbClr val="FFFDFD"/>
+            <a:srgbClr val="FBFBFB"/>
+          </a:solidFill>
+          <a:ln w="15875">
+            <a:solidFill>
+              <a:srgbClr val="E4E4E4"/>
+            </a:solidFill>
+          </a:ln>
+        </p:spPr>
+        <p:style>
+          <a:lnRef idx="1">
+            <a:schemeClr val="accent1"/>
+          </a:lnRef>
+          <a:fillRef idx="3">
+            <a:schemeClr val="accent1"/>
+          </a:fillRef>
+          <a:effectRef idx="2">
+            <a:schemeClr val="accent1"/>
+          </a:effectRef>
+          <a:fontRef idx="minor">
+            <a:schemeClr val="lt1"/>
+          </a:fontRef>
+        </p:style>
+        <p:txBody>
+          <a:bodyPr rtlCol="0" anchor="ctr"/>
+          <a:lstStyle/>
+          <a:p>
+            <a:pPr algn="ctr"/>
+          </a:p>
+        </p:txBody>
+      </p:sp>
+      <p:sp>
+        <p:nvSpPr>
+          <p:cNvPr id="11" name="TextBox 10"/>
+          <p:cNvSpPr txBox="1"/>
+          <p:nvPr/>
+        </p:nvSpPr>
+        <p:spPr>
+          <a:xfrm>
+            <a:off x="4709160" y="1783080"/>
+            <a:ext cx="2926080" cy="502920"/>
+          </a:xfrm>
+          <a:prstGeom prst="rect">
+            <a:avLst/>
+          </a:prstGeom>
+          <a:noFill/>
+        </p:spPr>
+        <p:txBody>
+          <a:bodyPr wrap="square" lIns="73152" rIns="73152" tIns="36576" bIns="36576">
+            <a:spAutoFit/>
+          </a:bodyPr>
+          <a:lstStyle/>
+          <a:p>
+            <a:pPr algn="l"/>
+            <a:r>
+              <a:rPr sz="1600" b="1">
+                <a:solidFill>
+                  <a:srgbClr val="52121E"/>
+                </a:solidFill>
+                <a:latin typeface="Arial"/>
+              </a:rPr>
+              <a:t>Neo4j performed best for</a:t>
+            </a:r>
+          </a:p>
+        </p:txBody>
+      </p:sp>
+      <p:sp>
+        <p:nvSpPr>
+          <p:cNvPr id="12" name="TextBox 11"/>
+          <p:cNvSpPr txBox="1"/>
+          <p:nvPr/>
+        </p:nvSpPr>
+        <p:spPr>
+          <a:xfrm>
+            <a:off x="4709160" y="2514600"/>
+            <a:ext cx="2971800" cy="2468880"/>
+          </a:xfrm>
+          <a:prstGeom prst="rect">
+            <a:avLst/>
+          </a:prstGeom>
+          <a:noFill/>
+        </p:spPr>
+        <p:txBody>
+          <a:bodyPr wrap="square" lIns="73152" rIns="73152" tIns="36576" bIns="36576">
+            <a:spAutoFit/>
+          </a:bodyPr>
+          <a:lstStyle/>
+          <a:p>
+            <a:pPr algn="l">
+              <a:spcAft>
+                <a:spcPts val="600"/>
+              </a:spcAft>
+              <a:defRPr sz="1600"/>
+            </a:pPr>
+            <a:r>
+              <a:rPr sz="1600" b="0">
+                <a:solidFill>
+                  <a:srgbClr val="1A202C"/>
+                </a:solidFill>
+                <a:latin typeface="Arial"/>
+              </a:rPr>
+              <a:t>- Author citation network</a:t>
+            </a:r>
+            <a:br/>
+            <a:r>
+              <a:rPr sz="1600">
+                <a:solidFill>
+                  <a:srgbClr val="1A202C"/>
+                </a:solidFill>
+              </a:rPr>
+              <a:t>- Multi-hop citation paths</a:t>
+            </a:r>
+            <a:br/>
+            <a:r>
+              <a:rPr sz="1600">
+                <a:solidFill>
+                  <a:srgbClr val="1A202C"/>
+                </a:solidFill>
+              </a:rPr>
+              <a:t>- Citation + topic overlap</a:t>
+            </a:r>
+            <a:br/>
+            <a:r>
+              <a:rPr sz="1600">
+                <a:solidFill>
+                  <a:srgbClr val="1A202C"/>
+                </a:solidFill>
+              </a:rPr>
+              <a:t>- Graph workload: 4 of 9 wins</a:t>
+            </a:r>
+            <a:br/>
+            <a:r>
+              <a:rPr sz="1600">
+                <a:solidFill>
+                  <a:srgbClr val="1A202C"/>
+                </a:solidFill>
+              </a:rPr>
+              <a:t>- Combined: 5 of 20 wins</a:t>
+            </a:r>
+          </a:p>
+        </p:txBody>
+      </p:sp>
+      <p:sp>
+        <p:nvSpPr>
+          <p:cNvPr id="13" name="Rounded Rectangle 12"/>
+          <p:cNvSpPr/>
+          <p:nvPr/>
+        </p:nvSpPr>
+        <p:spPr>
+          <a:xfrm>
+            <a:off x="8366760" y="1508760"/>
+            <a:ext cx="3429000" cy="4343400"/>
+          </a:xfrm>
+          <a:prstGeom prst="roundRect">
+            <a:avLst/>
+          </a:prstGeom>
+          <a:solidFill>
+            <a:srgbClr val="FBFBFB"/>
           </a:solidFill>
           <a:ln w="15875">
             <a:solidFill>
@@ -8225,14 +8037,14 @@
       </p:sp>
       <p:sp>
         <p:nvSpPr>
-          <p:cNvPr id="11" name="TextBox 10"/>
-          <p:cNvSpPr txBox="1"/>
-          <p:nvPr/>
-        </p:nvSpPr>
-        <p:spPr>
-          <a:xfrm>
-            <a:off x="6720840" y="1627632"/>
-            <a:ext cx="3017520" cy="320040"/>
+          <p:cNvPr id="14" name="TextBox 13"/>
+          <p:cNvSpPr txBox="1"/>
+          <p:nvPr/>
+        </p:nvSpPr>
+        <p:spPr>
+          <a:xfrm>
+            <a:off x="8595360" y="1783080"/>
+            <a:ext cx="2926080" cy="502920"/>
           </a:xfrm>
           <a:prstGeom prst="rect">
             <a:avLst/>
@@ -8247,90 +8059,78 @@
           <a:p>
             <a:pPr algn="l"/>
             <a:r>
-              <a:rPr sz="1800" b="1">
+              <a:rPr sz="1600" b="1">
                 <a:solidFill>
                   <a:srgbClr val="52121E"/>
                 </a:solidFill>
                 <a:latin typeface="Arial"/>
               </a:rPr>
-              <a:t>Final answer</a:t>
-            </a:r>
-          </a:p>
-        </p:txBody>
-      </p:sp>
-      <p:sp>
-        <p:nvSpPr>
-          <p:cNvPr id="12" name="TextBox 11"/>
-          <p:cNvSpPr txBox="1"/>
-          <p:nvPr/>
-        </p:nvSpPr>
-        <p:spPr>
-          <a:xfrm>
-            <a:off x="6720840" y="2148840"/>
-            <a:ext cx="3840480" cy="2011680"/>
-          </a:xfrm>
-          <a:prstGeom prst="rect">
-            <a:avLst/>
-          </a:prstGeom>
-          <a:noFill/>
-        </p:spPr>
-        <p:txBody>
-          <a:bodyPr wrap="square" lIns="73152" rIns="73152" tIns="36576" bIns="36576">
-            <a:spAutoFit/>
-          </a:bodyPr>
-          <a:lstStyle/>
-          <a:p>
-            <a:pPr algn="l"/>
-            <a:r>
-              <a:rPr sz="2000" b="1">
-                <a:solidFill>
-                  <a:srgbClr val="1F2430"/>
-                </a:solidFill>
-                <a:latin typeface="Aptos"/>
-              </a:rPr>
-              <a:t>PostgreSQL is the better fit for structured tabular analysis in the main workload. Neo4j becomes stronger when relationship traversal is central, especially citation networks and shared-topic citation paths.</a:t>
-            </a:r>
-          </a:p>
-        </p:txBody>
-      </p:sp>
-      <p:sp>
-        <p:nvSpPr>
-          <p:cNvPr id="13" name="TextBox 12"/>
-          <p:cNvSpPr txBox="1"/>
-          <p:nvPr/>
-        </p:nvSpPr>
-        <p:spPr>
-          <a:xfrm>
-            <a:off x="6720840" y="4709160"/>
-            <a:ext cx="3749039" cy="548640"/>
-          </a:xfrm>
-          <a:prstGeom prst="rect">
-            <a:avLst/>
-          </a:prstGeom>
-          <a:noFill/>
-        </p:spPr>
-        <p:txBody>
-          <a:bodyPr wrap="square" lIns="73152" rIns="73152" tIns="36576" bIns="36576">
-            <a:spAutoFit/>
-          </a:bodyPr>
-          <a:lstStyle/>
-          <a:p>
-            <a:pPr algn="l"/>
-            <a:r>
-              <a:rPr sz="1500" b="0">
-                <a:solidFill>
-                  <a:srgbClr val="566373"/>
-                </a:solidFill>
-                <a:latin typeface="Aptos"/>
-              </a:rPr>
-              <a:t>The choice depends on the data access pattern, not on one database being universally better.</a:t>
-            </a:r>
-          </a:p>
-        </p:txBody>
-      </p:sp>
-      <p:sp>
-        <p:nvSpPr>
-          <p:cNvPr id="14" name="Rectangle 13"/>
+              <a:t>Main lesson</a:t>
+            </a:r>
+          </a:p>
+        </p:txBody>
+      </p:sp>
+      <p:sp>
+        <p:nvSpPr>
+          <p:cNvPr id="15" name="TextBox 14"/>
+          <p:cNvSpPr txBox="1"/>
+          <p:nvPr/>
+        </p:nvSpPr>
+        <p:spPr>
+          <a:xfrm>
+            <a:off x="8595360" y="2514600"/>
+            <a:ext cx="2971800" cy="2468880"/>
+          </a:xfrm>
+          <a:prstGeom prst="rect">
+            <a:avLst/>
+          </a:prstGeom>
+          <a:noFill/>
+        </p:spPr>
+        <p:txBody>
+          <a:bodyPr wrap="square" lIns="73152" rIns="73152" tIns="36576" bIns="36576">
+            <a:spAutoFit/>
+          </a:bodyPr>
+          <a:lstStyle/>
+          <a:p>
+            <a:pPr algn="l">
+              <a:spcAft>
+                <a:spcPts val="600"/>
+              </a:spcAft>
+              <a:defRPr sz="1600"/>
+            </a:pPr>
+            <a:r>
+              <a:rPr sz="1600" b="0">
+                <a:solidFill>
+                  <a:srgbClr val="1A202C"/>
+                </a:solidFill>
+                <a:latin typeface="Arial"/>
+              </a:rPr>
+              <a:t>- Relational models are efficient for structured analysis.</a:t>
+            </a:r>
+            <a:br/>
+            <a:r>
+              <a:rPr sz="1600">
+                <a:solidFill>
+                  <a:srgbClr val="1A202C"/>
+                </a:solidFill>
+              </a:rPr>
+              <a:t>- Graph models are expressive for relationship-heavy questions.</a:t>
+            </a:r>
+            <a:br/>
+            <a:r>
+              <a:rPr sz="1600">
+                <a:solidFill>
+                  <a:srgbClr val="1A202C"/>
+                </a:solidFill>
+              </a:rPr>
+              <a:t>- Use the model that matches the query shape.</a:t>
+            </a:r>
+          </a:p>
+        </p:txBody>
+      </p:sp>
+      <p:sp>
+        <p:nvSpPr>
+          <p:cNvPr id="16" name="Rectangle 15"/>
           <p:cNvSpPr/>
           <p:nvPr/>
         </p:nvSpPr>
@@ -8373,7 +8173,7 @@
       </p:sp>
       <p:sp>
         <p:nvSpPr>
-          <p:cNvPr id="15" name="TextBox 14"/>
+          <p:cNvPr id="17" name="TextBox 16"/>
           <p:cNvSpPr txBox="1"/>
           <p:nvPr/>
         </p:nvSpPr>
@@ -8408,7 +8208,7 @@
       </p:sp>
       <p:sp>
         <p:nvSpPr>
-          <p:cNvPr id="16" name="TextBox 15"/>
+          <p:cNvPr id="18" name="TextBox 17"/>
           <p:cNvSpPr txBox="1"/>
           <p:nvPr/>
         </p:nvSpPr>
@@ -8511,28 +8311,28 @@
         <p:spPr>
           <a:xfrm>
             <a:off x="502920" y="594360"/>
-            <a:ext cx="8961120" cy="411480"/>
-          </a:xfrm>
-          <a:prstGeom prst="rect">
-            <a:avLst/>
-          </a:prstGeom>
-          <a:noFill/>
-        </p:spPr>
-        <p:txBody>
-          <a:bodyPr wrap="square" lIns="54864" rIns="54864" tIns="27432" bIns="27432">
+            <a:ext cx="8961120" cy="502920"/>
+          </a:xfrm>
+          <a:prstGeom prst="rect">
+            <a:avLst/>
+          </a:prstGeom>
+          <a:noFill/>
+        </p:spPr>
+        <p:txBody>
+          <a:bodyPr wrap="square" lIns="73152" rIns="73152" tIns="36576" bIns="36576">
             <a:spAutoFit/>
           </a:bodyPr>
           <a:lstStyle/>
           <a:p>
             <a:pPr algn="l"/>
             <a:r>
-              <a:rPr sz="2700" b="1">
+              <a:rPr sz="2800" b="1">
                 <a:solidFill>
                   <a:srgbClr val="52121E"/>
                 </a:solidFill>
                 <a:latin typeface="Arial"/>
               </a:rPr>
-              <a:t>Course Connection: Graph Databases</a:t>
+              <a:t>Limitations and Future Work</a:t>
             </a:r>
           </a:p>
         </p:txBody>
@@ -8545,16 +8345,16 @@
         </p:nvSpPr>
         <p:spPr>
           <a:xfrm>
-            <a:off x="530352" y="987552"/>
-            <a:ext cx="8686800" cy="256032"/>
-          </a:xfrm>
-          <a:prstGeom prst="rect">
-            <a:avLst/>
-          </a:prstGeom>
-          <a:noFill/>
-        </p:spPr>
-        <p:txBody>
-          <a:bodyPr wrap="square" lIns="54864" rIns="54864" tIns="27432" bIns="27432">
+            <a:off x="530352" y="1024128"/>
+            <a:ext cx="8046720" cy="292608"/>
+          </a:xfrm>
+          <a:prstGeom prst="rect">
+            <a:avLst/>
+          </a:prstGeom>
+          <a:noFill/>
+        </p:spPr>
+        <p:txBody>
+          <a:bodyPr wrap="square" lIns="73152" rIns="73152" tIns="36576" bIns="36576">
             <a:spAutoFit/>
           </a:bodyPr>
           <a:lstStyle/>
@@ -8567,14 +8367,14 @@
                 </a:solidFill>
                 <a:latin typeface="Arial"/>
               </a:rPr>
-              <a:t>How the lecture concepts appear in our implementation</a:t>
+              <a:t>What could be improved with more time</a:t>
             </a:r>
           </a:p>
         </p:txBody>
       </p:sp>
       <p:pic>
         <p:nvPicPr>
-          <p:cNvPr id="5" name="Picture 4" descr="image.png"/>
+          <p:cNvPr id="5" name="Picture 4" descr="sapienza_seal_transparent.png"/>
           <p:cNvPicPr>
             <a:picLocks noChangeAspect="1"/>
           </p:cNvPicPr>
@@ -8604,63 +8404,28 @@
         </p:nvSpPr>
         <p:spPr>
           <a:xfrm>
-            <a:off x="502920" y="6446520"/>
-            <a:ext cx="4206240" cy="201168"/>
-          </a:xfrm>
-          <a:prstGeom prst="rect">
-            <a:avLst/>
-          </a:prstGeom>
-          <a:noFill/>
-        </p:spPr>
-        <p:txBody>
-          <a:bodyPr wrap="square" lIns="54864" rIns="54864" tIns="27432" bIns="27432">
-            <a:spAutoFit/>
-          </a:bodyPr>
-          <a:lstStyle/>
-          <a:p>
-            <a:pPr algn="l"/>
-            <a:r>
-              <a:rPr sz="800" b="0">
+            <a:off x="11384280" y="6473952"/>
+            <a:ext cx="320040" cy="182880"/>
+          </a:xfrm>
+          <a:prstGeom prst="rect">
+            <a:avLst/>
+          </a:prstGeom>
+          <a:noFill/>
+        </p:spPr>
+        <p:txBody>
+          <a:bodyPr wrap="square" lIns="73152" rIns="73152" tIns="36576" bIns="36576">
+            <a:spAutoFit/>
+          </a:bodyPr>
+          <a:lstStyle/>
+          <a:p>
+            <a:pPr algn="r"/>
+            <a:r>
+              <a:rPr sz="900" b="0">
                 <a:solidFill>
                   <a:srgbClr val="5C6876"/>
                 </a:solidFill>
                 <a:latin typeface="Arial"/>
               </a:rPr>
-              <a:t>OpenAlex AI DBMS Comparison</a:t>
-            </a:r>
-          </a:p>
-        </p:txBody>
-      </p:sp>
-      <p:sp>
-        <p:nvSpPr>
-          <p:cNvPr id="7" name="TextBox 6"/>
-          <p:cNvSpPr txBox="1"/>
-          <p:nvPr/>
-        </p:nvSpPr>
-        <p:spPr>
-          <a:xfrm>
-            <a:off x="11292840" y="6446520"/>
-            <a:ext cx="411480" cy="201168"/>
-          </a:xfrm>
-          <a:prstGeom prst="rect">
-            <a:avLst/>
-          </a:prstGeom>
-          <a:noFill/>
-        </p:spPr>
-        <p:txBody>
-          <a:bodyPr wrap="square" lIns="54864" rIns="54864" tIns="27432" bIns="27432">
-            <a:spAutoFit/>
-          </a:bodyPr>
-          <a:lstStyle/>
-          <a:p>
-            <a:pPr algn="r"/>
-            <a:r>
-              <a:rPr sz="800" b="0">
-                <a:solidFill>
-                  <a:srgbClr val="5C6876"/>
-                </a:solidFill>
-                <a:latin typeface="Arial"/>
-              </a:rPr>
               <a:t>19</a:t>
             </a:r>
           </a:p>
@@ -8668,14 +8433,14 @@
       </p:sp>
       <p:sp>
         <p:nvSpPr>
-          <p:cNvPr id="8" name="Rounded Rectangle 7"/>
+          <p:cNvPr id="7" name="Rounded Rectangle 6"/>
           <p:cNvSpPr/>
           <p:nvPr/>
         </p:nvSpPr>
         <p:spPr>
           <a:xfrm>
-            <a:off x="685800" y="1417320"/>
-            <a:ext cx="3291840" cy="4343400"/>
+            <a:off x="731520" y="1417320"/>
+            <a:ext cx="4937760" cy="4343400"/>
           </a:xfrm>
           <a:prstGeom prst="roundRect">
             <a:avLst/>
@@ -8683,9 +8448,9 @@
           <a:solidFill>
             <a:srgbClr val="FBFBFB"/>
           </a:solidFill>
-          <a:ln w="15240">
+          <a:ln w="15875">
             <a:solidFill>
-              <a:srgbClr val="DCDCDC"/>
+              <a:srgbClr val="E4E4E4"/>
             </a:solidFill>
           </a:ln>
         </p:spPr>
@@ -8713,118 +8478,126 @@
       </p:sp>
       <p:sp>
         <p:nvSpPr>
+          <p:cNvPr id="8" name="TextBox 7"/>
+          <p:cNvSpPr txBox="1"/>
+          <p:nvPr/>
+        </p:nvSpPr>
+        <p:spPr>
+          <a:xfrm>
+            <a:off x="1051560" y="1709928"/>
+            <a:ext cx="2743200" cy="320040"/>
+          </a:xfrm>
+          <a:prstGeom prst="rect">
+            <a:avLst/>
+          </a:prstGeom>
+          <a:noFill/>
+        </p:spPr>
+        <p:txBody>
+          <a:bodyPr wrap="square" lIns="73152" rIns="73152" tIns="36576" bIns="36576">
+            <a:spAutoFit/>
+          </a:bodyPr>
+          <a:lstStyle/>
+          <a:p>
+            <a:pPr algn="l"/>
+            <a:r>
+              <a:rPr sz="1800" b="1">
+                <a:solidFill>
+                  <a:srgbClr val="52121E"/>
+                </a:solidFill>
+                <a:latin typeface="Arial"/>
+              </a:rPr>
+              <a:t>Limitations</a:t>
+            </a:r>
+          </a:p>
+        </p:txBody>
+      </p:sp>
+      <p:sp>
+        <p:nvSpPr>
           <p:cNvPr id="9" name="TextBox 8"/>
           <p:cNvSpPr txBox="1"/>
           <p:nvPr/>
         </p:nvSpPr>
         <p:spPr>
           <a:xfrm>
-            <a:off x="960120" y="1664208"/>
-            <a:ext cx="2103120" cy="274320"/>
-          </a:xfrm>
-          <a:prstGeom prst="rect">
-            <a:avLst/>
-          </a:prstGeom>
-          <a:noFill/>
-        </p:spPr>
-        <p:txBody>
-          <a:bodyPr wrap="square" lIns="54864" rIns="54864" tIns="27432" bIns="27432">
-            <a:spAutoFit/>
-          </a:bodyPr>
-          <a:lstStyle/>
-          <a:p>
-            <a:pPr algn="l"/>
-            <a:r>
-              <a:rPr sz="1700" b="1">
-                <a:solidFill>
-                  <a:srgbClr val="52121E"/>
-                </a:solidFill>
-                <a:latin typeface="Arial"/>
-              </a:rPr>
-              <a:t>Lecture idea</a:t>
-            </a:r>
-          </a:p>
-        </p:txBody>
-      </p:sp>
-      <p:sp>
-        <p:nvSpPr>
-          <p:cNvPr id="10" name="TextBox 9"/>
-          <p:cNvSpPr txBox="1"/>
-          <p:nvPr/>
-        </p:nvSpPr>
-        <p:spPr>
-          <a:xfrm>
-            <a:off x="960120" y="2084831"/>
-            <a:ext cx="2606040" cy="2560320"/>
-          </a:xfrm>
-          <a:prstGeom prst="rect">
-            <a:avLst/>
-          </a:prstGeom>
-          <a:noFill/>
-        </p:spPr>
-        <p:txBody>
-          <a:bodyPr wrap="square" lIns="54864" rIns="54864" tIns="27432" bIns="27432">
+            <a:off x="1051560" y="2148840"/>
+            <a:ext cx="4251960" cy="2377440"/>
+          </a:xfrm>
+          <a:prstGeom prst="rect">
+            <a:avLst/>
+          </a:prstGeom>
+          <a:noFill/>
+        </p:spPr>
+        <p:txBody>
+          <a:bodyPr wrap="square" lIns="73152" rIns="73152" tIns="36576" bIns="36576">
             <a:spAutoFit/>
           </a:bodyPr>
           <a:lstStyle/>
           <a:p>
             <a:pPr algn="l">
               <a:spcAft>
-                <a:spcPts val="500"/>
+                <a:spcPts val="600"/>
               </a:spcAft>
+              <a:defRPr sz="1800"/>
             </a:pPr>
             <a:r>
-              <a:rPr sz="1600" b="0">
+              <a:rPr sz="1800" b="0">
                 <a:solidFill>
                   <a:srgbClr val="1A202C"/>
                 </a:solidFill>
                 <a:latin typeface="Arial"/>
               </a:rPr>
-              <a:t>- Relationships can be represented as explicit graph edges</a:t>
+              <a:t>- The dataset is a selected OpenAlex subset, not full OpenAlex</a:t>
             </a:r>
             <a:br/>
             <a:r>
-              <a:rPr sz="1600" b="0">
+              <a:rPr sz="1800">
                 <a:solidFill>
                   <a:srgbClr val="1A202C"/>
                 </a:solidFill>
-                <a:latin typeface="Arial"/>
-              </a:rPr>
-              <a:t>- Graph data is useful when paths and networks matter</a:t>
+              </a:rPr>
+              <a:t>- Benchmark results depend on local hardware and cache state</a:t>
             </a:r>
             <a:br/>
             <a:r>
-              <a:rPr sz="1600" b="0">
+              <a:rPr sz="1800">
                 <a:solidFill>
                   <a:srgbClr val="1A202C"/>
                 </a:solidFill>
-                <a:latin typeface="Arial"/>
-              </a:rPr>
-              <a:t>- Traversal follows connected nodes and relationships</a:t>
-            </a:r>
-          </a:p>
-        </p:txBody>
-      </p:sp>
-      <p:sp>
-        <p:nvSpPr>
-          <p:cNvPr id="11" name="Rounded Rectangle 10"/>
+              </a:rPr>
+              <a:t>- Neo4j overhead is visible on small datasets</a:t>
+            </a:r>
+            <a:br/>
+            <a:r>
+              <a:rPr sz="1800">
+                <a:solidFill>
+                  <a:srgbClr val="1A202C"/>
+                </a:solidFill>
+              </a:rPr>
+              <a:t>- No advanced full-text/vector search layer was added</a:t>
+            </a:r>
+          </a:p>
+        </p:txBody>
+      </p:sp>
+      <p:sp>
+        <p:nvSpPr>
+          <p:cNvPr id="10" name="Rounded Rectangle 9"/>
           <p:cNvSpPr/>
           <p:nvPr/>
         </p:nvSpPr>
         <p:spPr>
           <a:xfrm>
-            <a:off x="4434840" y="1417320"/>
-            <a:ext cx="3291840" cy="4343400"/>
+            <a:off x="6172200" y="1417320"/>
+            <a:ext cx="4937760" cy="4343400"/>
           </a:xfrm>
           <a:prstGeom prst="roundRect">
             <a:avLst/>
           </a:prstGeom>
           <a:solidFill>
-            <a:srgbClr val="FBFBFB"/>
+            <a:srgbClr val="FFFDFD"/>
           </a:solidFill>
-          <a:ln w="15240">
+          <a:ln w="15875">
             <a:solidFill>
-              <a:srgbClr val="DCDCDC"/>
+              <a:srgbClr val="EAD5D8"/>
             </a:solidFill>
           </a:ln>
         </p:spPr>
@@ -8852,119 +8625,125 @@
       </p:sp>
       <p:sp>
         <p:nvSpPr>
+          <p:cNvPr id="11" name="TextBox 10"/>
+          <p:cNvSpPr txBox="1"/>
+          <p:nvPr/>
+        </p:nvSpPr>
+        <p:spPr>
+          <a:xfrm>
+            <a:off x="6492240" y="1709928"/>
+            <a:ext cx="2743200" cy="320040"/>
+          </a:xfrm>
+          <a:prstGeom prst="rect">
+            <a:avLst/>
+          </a:prstGeom>
+          <a:noFill/>
+        </p:spPr>
+        <p:txBody>
+          <a:bodyPr wrap="square" lIns="73152" rIns="73152" tIns="36576" bIns="36576">
+            <a:spAutoFit/>
+          </a:bodyPr>
+          <a:lstStyle/>
+          <a:p>
+            <a:pPr algn="l"/>
+            <a:r>
+              <a:rPr sz="1800" b="1">
+                <a:solidFill>
+                  <a:srgbClr val="52121E"/>
+                </a:solidFill>
+                <a:latin typeface="Arial"/>
+              </a:rPr>
+              <a:t>Future work</a:t>
+            </a:r>
+          </a:p>
+        </p:txBody>
+      </p:sp>
+      <p:sp>
+        <p:nvSpPr>
           <p:cNvPr id="12" name="TextBox 11"/>
           <p:cNvSpPr txBox="1"/>
           <p:nvPr/>
         </p:nvSpPr>
         <p:spPr>
           <a:xfrm>
-            <a:off x="4709160" y="1664208"/>
-            <a:ext cx="2286000" cy="274320"/>
-          </a:xfrm>
-          <a:prstGeom prst="rect">
-            <a:avLst/>
-          </a:prstGeom>
-          <a:noFill/>
-        </p:spPr>
-        <p:txBody>
-          <a:bodyPr wrap="square" lIns="54864" rIns="54864" tIns="27432" bIns="27432">
-            <a:spAutoFit/>
-          </a:bodyPr>
-          <a:lstStyle/>
-          <a:p>
-            <a:pPr algn="l"/>
-            <a:r>
-              <a:rPr sz="1700" b="1">
-                <a:solidFill>
-                  <a:srgbClr val="52121E"/>
-                </a:solidFill>
-                <a:latin typeface="Arial"/>
-              </a:rPr>
-              <a:t>Our Neo4j model</a:t>
-            </a:r>
-          </a:p>
-        </p:txBody>
-      </p:sp>
-      <p:sp>
-        <p:nvSpPr>
-          <p:cNvPr id="13" name="TextBox 12"/>
-          <p:cNvSpPr txBox="1"/>
-          <p:nvPr/>
-        </p:nvSpPr>
-        <p:spPr>
-          <a:xfrm>
-            <a:off x="4709160" y="2084831"/>
-            <a:ext cx="2606040" cy="2560320"/>
-          </a:xfrm>
-          <a:prstGeom prst="rect">
-            <a:avLst/>
-          </a:prstGeom>
-          <a:noFill/>
-        </p:spPr>
-        <p:txBody>
-          <a:bodyPr wrap="square" lIns="54864" rIns="54864" tIns="27432" bIns="27432">
+            <a:off x="6492240" y="2148840"/>
+            <a:ext cx="4251960" cy="2377440"/>
+          </a:xfrm>
+          <a:prstGeom prst="rect">
+            <a:avLst/>
+          </a:prstGeom>
+          <a:noFill/>
+        </p:spPr>
+        <p:txBody>
+          <a:bodyPr wrap="square" lIns="73152" rIns="73152" tIns="36576" bIns="36576">
             <a:spAutoFit/>
           </a:bodyPr>
           <a:lstStyle/>
           <a:p>
             <a:pPr algn="l">
               <a:spcAft>
-                <a:spcPts val="500"/>
+                <a:spcPts val="600"/>
               </a:spcAft>
+              <a:defRPr sz="1800"/>
             </a:pPr>
             <a:r>
-              <a:rPr sz="1600" b="0">
+              <a:rPr sz="1800" b="0">
                 <a:solidFill>
                   <a:srgbClr val="1A202C"/>
                 </a:solidFill>
                 <a:latin typeface="Arial"/>
               </a:rPr>
-              <a:t>- Nodes: Paper, Author, Topic</a:t>
+              <a:t>- Increase dataset size</a:t>
             </a:r>
             <a:br/>
             <a:r>
-              <a:rPr sz="1600" b="0">
+              <a:rPr sz="1800">
                 <a:solidFill>
                   <a:srgbClr val="1A202C"/>
                 </a:solidFill>
-                <a:latin typeface="Arial"/>
-              </a:rPr>
-              <a:t>- Edges: AUTHORED, HAS_TOPIC, CITES</a:t>
+              </a:rPr>
+              <a:t>- Add full-text search and vector retrieval</a:t>
             </a:r>
             <a:br/>
             <a:r>
-              <a:rPr sz="1600" b="0">
+              <a:rPr sz="1800">
                 <a:solidFill>
                   <a:srgbClr val="1A202C"/>
                 </a:solidFill>
-                <a:latin typeface="Arial"/>
-              </a:rPr>
-              <a:t>- Citation and authorship paths are visible in Neo4j Browser</a:t>
-            </a:r>
-          </a:p>
-        </p:txBody>
-      </p:sp>
-      <p:sp>
-        <p:nvSpPr>
-          <p:cNvPr id="14" name="Rounded Rectangle 13"/>
+              </a:rPr>
+              <a:t>- Tune indexes and constraints further</a:t>
+            </a:r>
+            <a:br/>
+            <a:r>
+              <a:rPr sz="1800">
+                <a:solidFill>
+                  <a:srgbClr val="1A202C"/>
+                </a:solidFill>
+              </a:rPr>
+              <a:t>- Build a simple RAG search demo on top of the databases</a:t>
+            </a:r>
+          </a:p>
+        </p:txBody>
+      </p:sp>
+      <p:sp>
+        <p:nvSpPr>
+          <p:cNvPr id="13" name="Rectangle 12"/>
           <p:cNvSpPr/>
           <p:nvPr/>
         </p:nvSpPr>
         <p:spPr>
           <a:xfrm>
-            <a:off x="8183879" y="1417320"/>
-            <a:ext cx="3291840" cy="4343400"/>
-          </a:xfrm>
-          <a:prstGeom prst="roundRect">
+            <a:off x="502920" y="6382512"/>
+            <a:ext cx="11155680" cy="9144"/>
+          </a:xfrm>
+          <a:prstGeom prst="rect">
             <a:avLst/>
           </a:prstGeom>
           <a:solidFill>
-            <a:srgbClr val="FBFBFB"/>
+            <a:srgbClr val="DCDCDC"/>
           </a:solidFill>
-          <a:ln w="15240">
-            <a:solidFill>
-              <a:srgbClr val="DCDCDC"/>
-            </a:solidFill>
+          <a:ln>
+            <a:noFill/>
           </a:ln>
         </p:spPr>
         <p:style>
@@ -8991,125 +8770,70 @@
       </p:sp>
       <p:sp>
         <p:nvSpPr>
+          <p:cNvPr id="14" name="TextBox 13"/>
+          <p:cNvSpPr txBox="1"/>
+          <p:nvPr/>
+        </p:nvSpPr>
+        <p:spPr>
+          <a:xfrm>
+            <a:off x="502920" y="6446520"/>
+            <a:ext cx="4206240" cy="201168"/>
+          </a:xfrm>
+          <a:prstGeom prst="rect">
+            <a:avLst/>
+          </a:prstGeom>
+          <a:noFill/>
+        </p:spPr>
+        <p:txBody>
+          <a:bodyPr wrap="square" lIns="73152" rIns="73152" tIns="36576" bIns="36576">
+            <a:spAutoFit/>
+          </a:bodyPr>
+          <a:lstStyle/>
+          <a:p>
+            <a:pPr algn="l"/>
+            <a:r>
+              <a:rPr sz="800" b="0">
+                <a:solidFill>
+                  <a:srgbClr val="5C6876"/>
+                </a:solidFill>
+                <a:latin typeface="Arial"/>
+              </a:rPr>
+              <a:t>OpenAlex AI DBMS Comparison</a:t>
+            </a:r>
+          </a:p>
+        </p:txBody>
+      </p:sp>
+      <p:sp>
+        <p:nvSpPr>
           <p:cNvPr id="15" name="TextBox 14"/>
           <p:cNvSpPr txBox="1"/>
           <p:nvPr/>
         </p:nvSpPr>
         <p:spPr>
           <a:xfrm>
-            <a:off x="8458200" y="1664208"/>
-            <a:ext cx="2286000" cy="274320"/>
-          </a:xfrm>
-          <a:prstGeom prst="rect">
-            <a:avLst/>
-          </a:prstGeom>
-          <a:noFill/>
-        </p:spPr>
-        <p:txBody>
-          <a:bodyPr wrap="square" lIns="54864" rIns="54864" tIns="27432" bIns="27432">
-            <a:spAutoFit/>
-          </a:bodyPr>
-          <a:lstStyle/>
-          <a:p>
-            <a:pPr algn="l"/>
-            <a:r>
-              <a:rPr sz="1700" b="1">
-                <a:solidFill>
-                  <a:srgbClr val="52121E"/>
-                </a:solidFill>
-                <a:latin typeface="Arial"/>
-              </a:rPr>
-              <a:t>Project example</a:t>
-            </a:r>
-          </a:p>
-        </p:txBody>
-      </p:sp>
-      <p:sp>
-        <p:nvSpPr>
-          <p:cNvPr id="16" name="TextBox 15"/>
-          <p:cNvSpPr txBox="1"/>
-          <p:nvPr/>
-        </p:nvSpPr>
-        <p:spPr>
-          <a:xfrm>
-            <a:off x="8458200" y="2194560"/>
-            <a:ext cx="2606040" cy="1234440"/>
-          </a:xfrm>
-          <a:prstGeom prst="rect">
-            <a:avLst/>
-          </a:prstGeom>
-          <a:noFill/>
-        </p:spPr>
-        <p:txBody>
-          <a:bodyPr wrap="square" lIns="54864" rIns="54864" tIns="27432" bIns="27432">
-            <a:spAutoFit/>
-          </a:bodyPr>
-          <a:lstStyle/>
-          <a:p>
-            <a:pPr algn="l"/>
-            <a:r>
-              <a:rPr sz="1500" b="1">
-                <a:solidFill>
-                  <a:srgbClr val="1A202C"/>
-                </a:solidFill>
-                <a:latin typeface="Arial"/>
-              </a:rPr>
-              <a:t>(Author)-[:AUTHORED]-&gt;(Paper)</a:t>
-            </a:r>
-            <a:br/>
-            <a:r>
-              <a:rPr sz="1500" b="1">
-                <a:solidFill>
-                  <a:srgbClr val="1A202C"/>
-                </a:solidFill>
-                <a:latin typeface="Arial"/>
-              </a:rPr>
-              <a:t>(Paper)-[:CITES]-&gt;(Paper)</a:t>
-            </a:r>
-            <a:br/>
-            <a:r>
-              <a:rPr sz="1500" b="1">
-                <a:solidFill>
-                  <a:srgbClr val="1A202C"/>
-                </a:solidFill>
-                <a:latin typeface="Arial"/>
-              </a:rPr>
-              <a:t>(Paper)-[:HAS_TOPIC]-&gt;(Topic)</a:t>
-            </a:r>
-          </a:p>
-        </p:txBody>
-      </p:sp>
-      <p:sp>
-        <p:nvSpPr>
-          <p:cNvPr id="17" name="TextBox 16"/>
-          <p:cNvSpPr txBox="1"/>
-          <p:nvPr/>
-        </p:nvSpPr>
-        <p:spPr>
-          <a:xfrm>
-            <a:off x="8458200" y="4069080"/>
-            <a:ext cx="2606040" cy="640080"/>
-          </a:xfrm>
-          <a:prstGeom prst="rect">
-            <a:avLst/>
-          </a:prstGeom>
-          <a:noFill/>
-        </p:spPr>
-        <p:txBody>
-          <a:bodyPr wrap="square" lIns="54864" rIns="54864" tIns="27432" bIns="27432">
-            <a:spAutoFit/>
-          </a:bodyPr>
-          <a:lstStyle/>
-          <a:p>
-            <a:pPr algn="l"/>
-            <a:r>
-              <a:rPr sz="1600" b="0">
-                <a:solidFill>
-                  <a:srgbClr val="1A202C"/>
-                </a:solidFill>
-                <a:latin typeface="Arial"/>
-              </a:rPr>
-              <a:t>This directly applies the property graph model explained in class.</a:t>
+            <a:off x="11292840" y="6446520"/>
+            <a:ext cx="411480" cy="201168"/>
+          </a:xfrm>
+          <a:prstGeom prst="rect">
+            <a:avLst/>
+          </a:prstGeom>
+          <a:noFill/>
+        </p:spPr>
+        <p:txBody>
+          <a:bodyPr wrap="square" lIns="73152" rIns="73152" tIns="36576" bIns="36576">
+            <a:spAutoFit/>
+          </a:bodyPr>
+          <a:lstStyle/>
+          <a:p>
+            <a:pPr algn="r"/>
+            <a:r>
+              <a:rPr sz="800" b="0">
+                <a:solidFill>
+                  <a:srgbClr val="5C6876"/>
+                </a:solidFill>
+                <a:latin typeface="Arial"/>
+              </a:rPr>
+              <a:t>19</a:t>
             </a:r>
           </a:p>
         </p:txBody>
@@ -9713,28 +9437,28 @@
         <p:spPr>
           <a:xfrm>
             <a:off x="502920" y="594360"/>
-            <a:ext cx="8961120" cy="411480"/>
-          </a:xfrm>
-          <a:prstGeom prst="rect">
-            <a:avLst/>
-          </a:prstGeom>
-          <a:noFill/>
-        </p:spPr>
-        <p:txBody>
-          <a:bodyPr wrap="square" lIns="54864" rIns="54864" tIns="27432" bIns="27432">
+            <a:ext cx="8961120" cy="502920"/>
+          </a:xfrm>
+          <a:prstGeom prst="rect">
+            <a:avLst/>
+          </a:prstGeom>
+          <a:noFill/>
+        </p:spPr>
+        <p:txBody>
+          <a:bodyPr wrap="square" lIns="73152" rIns="73152" tIns="36576" bIns="36576">
             <a:spAutoFit/>
           </a:bodyPr>
           <a:lstStyle/>
           <a:p>
             <a:pPr algn="l"/>
             <a:r>
-              <a:rPr sz="2700" b="1">
+              <a:rPr sz="2800" b="1">
                 <a:solidFill>
                   <a:srgbClr val="52121E"/>
                 </a:solidFill>
                 <a:latin typeface="Arial"/>
               </a:rPr>
-              <a:t>Course Connection: Joins vs Traversal</a:t>
+              <a:t>Final Conclusions</a:t>
             </a:r>
           </a:p>
         </p:txBody>
@@ -9747,16 +9471,16 @@
         </p:nvSpPr>
         <p:spPr>
           <a:xfrm>
-            <a:off x="530352" y="987552"/>
-            <a:ext cx="8686800" cy="256032"/>
-          </a:xfrm>
-          <a:prstGeom prst="rect">
-            <a:avLst/>
-          </a:prstGeom>
-          <a:noFill/>
-        </p:spPr>
-        <p:txBody>
-          <a:bodyPr wrap="square" lIns="54864" rIns="54864" tIns="27432" bIns="27432">
+            <a:off x="530352" y="1024128"/>
+            <a:ext cx="8046720" cy="292608"/>
+          </a:xfrm>
+          <a:prstGeom prst="rect">
+            <a:avLst/>
+          </a:prstGeom>
+          <a:noFill/>
+        </p:spPr>
+        <p:txBody>
+          <a:bodyPr wrap="square" lIns="73152" rIns="73152" tIns="36576" bIns="36576">
             <a:spAutoFit/>
           </a:bodyPr>
           <a:lstStyle/>
@@ -9769,14 +9493,14 @@
                 </a:solidFill>
                 <a:latin typeface="Arial"/>
               </a:rPr>
-              <a:t>Same relationship question, two database perspectives</a:t>
+              <a:t>From requirements to results</a:t>
             </a:r>
           </a:p>
         </p:txBody>
       </p:sp>
       <p:pic>
         <p:nvPicPr>
-          <p:cNvPr id="5" name="Picture 4" descr="image.png"/>
+          <p:cNvPr id="5" name="Picture 4" descr="sapienza_seal_transparent.png"/>
           <p:cNvPicPr>
             <a:picLocks noChangeAspect="1"/>
           </p:cNvPicPr>
@@ -9806,63 +9530,28 @@
         </p:nvSpPr>
         <p:spPr>
           <a:xfrm>
-            <a:off x="502920" y="6446520"/>
-            <a:ext cx="4206240" cy="201168"/>
-          </a:xfrm>
-          <a:prstGeom prst="rect">
-            <a:avLst/>
-          </a:prstGeom>
-          <a:noFill/>
-        </p:spPr>
-        <p:txBody>
-          <a:bodyPr wrap="square" lIns="54864" rIns="54864" tIns="27432" bIns="27432">
-            <a:spAutoFit/>
-          </a:bodyPr>
-          <a:lstStyle/>
-          <a:p>
-            <a:pPr algn="l"/>
-            <a:r>
-              <a:rPr sz="800" b="0">
+            <a:off x="11384280" y="6473952"/>
+            <a:ext cx="320040" cy="182880"/>
+          </a:xfrm>
+          <a:prstGeom prst="rect">
+            <a:avLst/>
+          </a:prstGeom>
+          <a:noFill/>
+        </p:spPr>
+        <p:txBody>
+          <a:bodyPr wrap="square" lIns="73152" rIns="73152" tIns="36576" bIns="36576">
+            <a:spAutoFit/>
+          </a:bodyPr>
+          <a:lstStyle/>
+          <a:p>
+            <a:pPr algn="r"/>
+            <a:r>
+              <a:rPr sz="900" b="0">
                 <a:solidFill>
                   <a:srgbClr val="5C6876"/>
                 </a:solidFill>
                 <a:latin typeface="Arial"/>
               </a:rPr>
-              <a:t>OpenAlex AI DBMS Comparison</a:t>
-            </a:r>
-          </a:p>
-        </p:txBody>
-      </p:sp>
-      <p:sp>
-        <p:nvSpPr>
-          <p:cNvPr id="7" name="TextBox 6"/>
-          <p:cNvSpPr txBox="1"/>
-          <p:nvPr/>
-        </p:nvSpPr>
-        <p:spPr>
-          <a:xfrm>
-            <a:off x="11292840" y="6446520"/>
-            <a:ext cx="411480" cy="201168"/>
-          </a:xfrm>
-          <a:prstGeom prst="rect">
-            <a:avLst/>
-          </a:prstGeom>
-          <a:noFill/>
-        </p:spPr>
-        <p:txBody>
-          <a:bodyPr wrap="square" lIns="54864" rIns="54864" tIns="27432" bIns="27432">
-            <a:spAutoFit/>
-          </a:bodyPr>
-          <a:lstStyle/>
-          <a:p>
-            <a:pPr algn="r"/>
-            <a:r>
-              <a:rPr sz="800" b="0">
-                <a:solidFill>
-                  <a:srgbClr val="5C6876"/>
-                </a:solidFill>
-                <a:latin typeface="Arial"/>
-              </a:rPr>
               <a:t>20</a:t>
             </a:r>
           </a:p>
@@ -9870,14 +9559,14 @@
       </p:sp>
       <p:sp>
         <p:nvSpPr>
-          <p:cNvPr id="8" name="Rounded Rectangle 7"/>
+          <p:cNvPr id="7" name="Rounded Rectangle 6"/>
           <p:cNvSpPr/>
           <p:nvPr/>
         </p:nvSpPr>
         <p:spPr>
           <a:xfrm>
-            <a:off x="685800" y="1417320"/>
-            <a:ext cx="5120640" cy="4434840"/>
+            <a:off x="868680" y="1325880"/>
+            <a:ext cx="5166360" cy="4526280"/>
           </a:xfrm>
           <a:prstGeom prst="roundRect">
             <a:avLst/>
@@ -9885,9 +9574,9 @@
           <a:solidFill>
             <a:srgbClr val="FBFBFB"/>
           </a:solidFill>
-          <a:ln w="15240">
+          <a:ln w="15875">
             <a:solidFill>
-              <a:srgbClr val="DCDCDC"/>
+              <a:srgbClr val="E4E4E4"/>
             </a:solidFill>
           </a:ln>
         </p:spPr>
@@ -9915,65 +9604,66 @@
       </p:sp>
       <p:sp>
         <p:nvSpPr>
+          <p:cNvPr id="8" name="TextBox 7"/>
+          <p:cNvSpPr txBox="1"/>
+          <p:nvPr/>
+        </p:nvSpPr>
+        <p:spPr>
+          <a:xfrm>
+            <a:off x="1188720" y="1627632"/>
+            <a:ext cx="3291840" cy="320040"/>
+          </a:xfrm>
+          <a:prstGeom prst="rect">
+            <a:avLst/>
+          </a:prstGeom>
+          <a:noFill/>
+        </p:spPr>
+        <p:txBody>
+          <a:bodyPr wrap="square" lIns="73152" rIns="73152" tIns="36576" bIns="36576">
+            <a:spAutoFit/>
+          </a:bodyPr>
+          <a:lstStyle/>
+          <a:p>
+            <a:pPr algn="l"/>
+            <a:r>
+              <a:rPr sz="1800" b="1">
+                <a:solidFill>
+                  <a:srgbClr val="52121E"/>
+                </a:solidFill>
+                <a:latin typeface="Arial"/>
+              </a:rPr>
+              <a:t>What we delivered</a:t>
+            </a:r>
+          </a:p>
+        </p:txBody>
+      </p:sp>
+      <p:sp>
+        <p:nvSpPr>
           <p:cNvPr id="9" name="TextBox 8"/>
           <p:cNvSpPr txBox="1"/>
           <p:nvPr/>
         </p:nvSpPr>
         <p:spPr>
           <a:xfrm>
-            <a:off x="960120" y="1691640"/>
-            <a:ext cx="3840480" cy="274320"/>
-          </a:xfrm>
-          <a:prstGeom prst="rect">
-            <a:avLst/>
-          </a:prstGeom>
-          <a:noFill/>
-        </p:spPr>
-        <p:txBody>
-          <a:bodyPr wrap="square" lIns="54864" rIns="54864" tIns="27432" bIns="27432">
-            <a:spAutoFit/>
-          </a:bodyPr>
-          <a:lstStyle/>
-          <a:p>
-            <a:pPr algn="l"/>
-            <a:r>
-              <a:rPr sz="1800" b="1">
-                <a:solidFill>
-                  <a:srgbClr val="52121E"/>
-                </a:solidFill>
-                <a:latin typeface="Arial"/>
-              </a:rPr>
-              <a:t>PostgreSQL: relationships through joins</a:t>
-            </a:r>
-          </a:p>
-        </p:txBody>
-      </p:sp>
-      <p:sp>
-        <p:nvSpPr>
-          <p:cNvPr id="10" name="TextBox 9"/>
-          <p:cNvSpPr txBox="1"/>
-          <p:nvPr/>
-        </p:nvSpPr>
-        <p:spPr>
-          <a:xfrm>
-            <a:off x="960120" y="2148840"/>
-            <a:ext cx="4343400" cy="2286000"/>
-          </a:xfrm>
-          <a:prstGeom prst="rect">
-            <a:avLst/>
-          </a:prstGeom>
-          <a:noFill/>
-        </p:spPr>
-        <p:txBody>
-          <a:bodyPr wrap="square" lIns="54864" rIns="54864" tIns="27432" bIns="27432">
+            <a:off x="1188720" y="2057400"/>
+            <a:ext cx="4297680" cy="2743200"/>
+          </a:xfrm>
+          <a:prstGeom prst="rect">
+            <a:avLst/>
+          </a:prstGeom>
+          <a:noFill/>
+        </p:spPr>
+        <p:txBody>
+          <a:bodyPr wrap="square" lIns="73152" rIns="73152" tIns="36576" bIns="36576">
             <a:spAutoFit/>
           </a:bodyPr>
           <a:lstStyle/>
           <a:p>
             <a:pPr algn="l">
               <a:spcAft>
-                <a:spcPts val="500"/>
+                <a:spcPts val="600"/>
               </a:spcAft>
+              <a:defRPr sz="1700"/>
             </a:pPr>
             <a:r>
               <a:rPr sz="1700" b="0">
@@ -9982,86 +9672,76 @@
                 </a:solidFill>
                 <a:latin typeface="Arial"/>
               </a:rPr>
-              <a:t>- Relationships are stored in tables and bridge tables</a:t>
+              <a:t>- OpenAlex ETL pipeline</a:t>
             </a:r>
             <a:br/>
             <a:r>
-              <a:rPr sz="1700" b="0">
+              <a:rPr sz="1700">
                 <a:solidFill>
                   <a:srgbClr val="1A202C"/>
                 </a:solidFill>
-                <a:latin typeface="Arial"/>
-              </a:rPr>
-              <a:t>- Author citation network requires joins across paper_authors, citations, and authors</a:t>
+              </a:rPr>
+              <a:t>- PostgreSQL and Neo4j data models</a:t>
             </a:r>
             <a:br/>
             <a:r>
-              <a:rPr sz="1700" b="0">
+              <a:rPr sz="1700">
                 <a:solidFill>
                   <a:srgbClr val="1A202C"/>
                 </a:solidFill>
-                <a:latin typeface="Arial"/>
-              </a:rPr>
-              <a:t>- Good for structured aggregation, sorting, and filtering</a:t>
-            </a:r>
-          </a:p>
-        </p:txBody>
-      </p:sp>
-      <p:sp>
-        <p:nvSpPr>
-          <p:cNvPr id="11" name="TextBox 10"/>
-          <p:cNvSpPr txBox="1"/>
-          <p:nvPr/>
-        </p:nvSpPr>
-        <p:spPr>
-          <a:xfrm>
-            <a:off x="960120" y="4892040"/>
-            <a:ext cx="4343400" cy="502920"/>
-          </a:xfrm>
-          <a:prstGeom prst="rect">
-            <a:avLst/>
-          </a:prstGeom>
-          <a:noFill/>
-        </p:spPr>
-        <p:txBody>
-          <a:bodyPr wrap="square" lIns="54864" rIns="54864" tIns="27432" bIns="27432">
-            <a:spAutoFit/>
-          </a:bodyPr>
-          <a:lstStyle/>
-          <a:p>
-            <a:pPr algn="l"/>
-            <a:r>
-              <a:rPr sz="1500" b="0">
+              </a:rPr>
+              <a:t>- Docker-based reproducible setup</a:t>
+            </a:r>
+            <a:br/>
+            <a:r>
+              <a:rPr sz="1700">
                 <a:solidFill>
                   <a:srgbClr val="1A202C"/>
                 </a:solidFill>
-                <a:latin typeface="Arial"/>
-              </a:rPr>
-              <a:t>Course link: relational query processing uses operators such as join, selection, grouping, and ordering.</a:t>
-            </a:r>
-          </a:p>
-        </p:txBody>
-      </p:sp>
-      <p:sp>
-        <p:nvSpPr>
-          <p:cNvPr id="12" name="Rounded Rectangle 11"/>
+              </a:rPr>
+              <a:t>- Equivalent SQL and Cypher query set</a:t>
+            </a:r>
+            <a:br/>
+            <a:r>
+              <a:rPr sz="1700">
+                <a:solidFill>
+                  <a:srgbClr val="1A202C"/>
+                </a:solidFill>
+              </a:rPr>
+              <a:t>- Benchmark results and interpretation</a:t>
+            </a:r>
+            <a:br/>
+            <a:r>
+              <a:rPr sz="1700">
+                <a:solidFill>
+                  <a:srgbClr val="1A202C"/>
+                </a:solidFill>
+              </a:rPr>
+              <a:t>- Project report and README</a:t>
+            </a:r>
+          </a:p>
+        </p:txBody>
+      </p:sp>
+      <p:sp>
+        <p:nvSpPr>
+          <p:cNvPr id="10" name="Rounded Rectangle 9"/>
           <p:cNvSpPr/>
           <p:nvPr/>
         </p:nvSpPr>
         <p:spPr>
           <a:xfrm>
-            <a:off x="6355080" y="1417320"/>
-            <a:ext cx="5120640" cy="4434840"/>
+            <a:off x="6400800" y="1325880"/>
+            <a:ext cx="4617720" cy="4526280"/>
           </a:xfrm>
           <a:prstGeom prst="roundRect">
             <a:avLst/>
           </a:prstGeom>
           <a:solidFill>
-            <a:srgbClr val="FBFBFB"/>
+            <a:srgbClr val="FFFDFD"/>
           </a:solidFill>
-          <a:ln w="15240">
+          <a:ln w="15875">
             <a:solidFill>
-              <a:srgbClr val="DCDCDC"/>
+              <a:srgbClr val="EAD5D8"/>
             </a:solidFill>
           </a:ln>
         </p:spPr>
@@ -10089,129 +9769,289 @@
       </p:sp>
       <p:sp>
         <p:nvSpPr>
+          <p:cNvPr id="11" name="TextBox 10"/>
+          <p:cNvSpPr txBox="1"/>
+          <p:nvPr/>
+        </p:nvSpPr>
+        <p:spPr>
+          <a:xfrm>
+            <a:off x="6720840" y="1627632"/>
+            <a:ext cx="3017520" cy="320040"/>
+          </a:xfrm>
+          <a:prstGeom prst="rect">
+            <a:avLst/>
+          </a:prstGeom>
+          <a:noFill/>
+        </p:spPr>
+        <p:txBody>
+          <a:bodyPr wrap="square" lIns="73152" rIns="73152" tIns="36576" bIns="36576">
+            <a:spAutoFit/>
+          </a:bodyPr>
+          <a:lstStyle/>
+          <a:p>
+            <a:pPr algn="l"/>
+            <a:r>
+              <a:rPr sz="1800" b="1">
+                <a:solidFill>
+                  <a:srgbClr val="52121E"/>
+                </a:solidFill>
+                <a:latin typeface="Arial"/>
+              </a:rPr>
+              <a:t>Final answer</a:t>
+            </a:r>
+          </a:p>
+        </p:txBody>
+      </p:sp>
+      <p:sp>
+        <p:nvSpPr>
+          <p:cNvPr id="12" name="TextBox 11"/>
+          <p:cNvSpPr txBox="1"/>
+          <p:nvPr/>
+        </p:nvSpPr>
+        <p:spPr>
+          <a:xfrm>
+            <a:off x="6720840" y="2148840"/>
+            <a:ext cx="3794760" cy="822960"/>
+          </a:xfrm>
+          <a:prstGeom prst="rect">
+            <a:avLst/>
+          </a:prstGeom>
+          <a:noFill/>
+        </p:spPr>
+        <p:txBody>
+          <a:bodyPr wrap="square" lIns="73152" rIns="73152" tIns="36576" bIns="36576">
+            <a:spAutoFit/>
+          </a:bodyPr>
+          <a:lstStyle/>
+          <a:p>
+            <a:pPr algn="l"/>
+            <a:r>
+              <a:rPr sz="1800" b="1">
+                <a:solidFill>
+                  <a:srgbClr val="1A202C"/>
+                </a:solidFill>
+                <a:latin typeface="Arial"/>
+              </a:rPr>
+              <a:t>PostgreSQL wins most tabular analysis.</a:t>
+            </a:r>
+            <a:br/>
+            <a:r>
+              <a:t>Neo4j wins on graph-heavy traversal.</a:t>
+            </a:r>
+          </a:p>
+        </p:txBody>
+      </p:sp>
+      <p:sp>
+        <p:nvSpPr>
           <p:cNvPr id="13" name="TextBox 12"/>
           <p:cNvSpPr txBox="1"/>
           <p:nvPr/>
         </p:nvSpPr>
         <p:spPr>
           <a:xfrm>
-            <a:off x="6629400" y="1691640"/>
-            <a:ext cx="3840480" cy="274320"/>
-          </a:xfrm>
-          <a:prstGeom prst="rect">
-            <a:avLst/>
-          </a:prstGeom>
-          <a:noFill/>
-        </p:spPr>
-        <p:txBody>
-          <a:bodyPr wrap="square" lIns="54864" rIns="54864" tIns="27432" bIns="27432">
-            <a:spAutoFit/>
-          </a:bodyPr>
-          <a:lstStyle/>
-          <a:p>
-            <a:pPr algn="l"/>
-            <a:r>
-              <a:rPr sz="1800" b="1">
-                <a:solidFill>
-                  <a:srgbClr val="52121E"/>
-                </a:solidFill>
-                <a:latin typeface="Arial"/>
-              </a:rPr>
-              <a:t>Neo4j: relationships as edges</a:t>
-            </a:r>
-          </a:p>
-        </p:txBody>
-      </p:sp>
-      <p:sp>
-        <p:nvSpPr>
-          <p:cNvPr id="14" name="TextBox 13"/>
-          <p:cNvSpPr txBox="1"/>
-          <p:nvPr/>
-        </p:nvSpPr>
-        <p:spPr>
-          <a:xfrm>
-            <a:off x="6629400" y="2148840"/>
-            <a:ext cx="4343400" cy="2286000"/>
-          </a:xfrm>
-          <a:prstGeom prst="rect">
-            <a:avLst/>
-          </a:prstGeom>
-          <a:noFill/>
-        </p:spPr>
-        <p:txBody>
-          <a:bodyPr wrap="square" lIns="54864" rIns="54864" tIns="27432" bIns="27432">
+            <a:off x="6720840" y="3310128"/>
+            <a:ext cx="3794760" cy="1417320"/>
+          </a:xfrm>
+          <a:prstGeom prst="rect">
+            <a:avLst/>
+          </a:prstGeom>
+          <a:noFill/>
+        </p:spPr>
+        <p:txBody>
+          <a:bodyPr wrap="square" lIns="73152" rIns="73152" tIns="36576" bIns="36576">
             <a:spAutoFit/>
           </a:bodyPr>
           <a:lstStyle/>
           <a:p>
             <a:pPr algn="l">
               <a:spcAft>
-                <a:spcPts val="500"/>
+                <a:spcPts val="600"/>
               </a:spcAft>
+              <a:defRPr sz="1500"/>
             </a:pPr>
             <a:r>
-              <a:rPr sz="1700" b="0">
+              <a:rPr sz="1500" b="0">
                 <a:solidFill>
                   <a:srgbClr val="1A202C"/>
                 </a:solidFill>
                 <a:latin typeface="Arial"/>
               </a:rPr>
-              <a:t>- Relationships are stored directly as graph edges</a:t>
+              <a:t>- Main workload: PostgreSQL 10/11</a:t>
             </a:r>
             <a:br/>
             <a:r>
-              <a:rPr sz="1700" b="0">
+              <a:rPr sz="1500">
                 <a:solidFill>
                   <a:srgbClr val="1A202C"/>
                 </a:solidFill>
-                <a:latin typeface="Arial"/>
-              </a:rPr>
-              <a:t>- Cypher expresses paths with MATCH patterns</a:t>
+              </a:rPr>
+              <a:t>- Graph-focused workload: Neo4j 4/9</a:t>
             </a:r>
             <a:br/>
             <a:r>
-              <a:rPr sz="1700" b="0">
+              <a:rPr sz="1500">
                 <a:solidFill>
                   <a:srgbClr val="1A202C"/>
                 </a:solidFill>
-                <a:latin typeface="Arial"/>
-              </a:rPr>
-              <a:t>- Good for citation paths and author networks</a:t>
-            </a:r>
-          </a:p>
-        </p:txBody>
-      </p:sp>
-      <p:sp>
-        <p:nvSpPr>
-          <p:cNvPr id="15" name="TextBox 14"/>
-          <p:cNvSpPr txBox="1"/>
-          <p:nvPr/>
-        </p:nvSpPr>
-        <p:spPr>
-          <a:xfrm>
-            <a:off x="6629400" y="4892040"/>
-            <a:ext cx="4343400" cy="502920"/>
-          </a:xfrm>
-          <a:prstGeom prst="rect">
-            <a:avLst/>
-          </a:prstGeom>
-          <a:noFill/>
-        </p:spPr>
-        <p:txBody>
-          <a:bodyPr wrap="square" lIns="54864" rIns="54864" tIns="27432" bIns="27432">
+              </a:rPr>
+              <a:t>- Combined result: PostgreSQL 15/20, Neo4j 5/20</a:t>
+            </a:r>
+            <a:br/>
+            <a:r>
+              <a:rPr sz="1500">
+                <a:solidFill>
+                  <a:srgbClr val="1A202C"/>
+                </a:solidFill>
+              </a:rPr>
+              <a:t>- The best choice depends on query shape</a:t>
+            </a:r>
+          </a:p>
+        </p:txBody>
+      </p:sp>
+      <p:sp>
+        <p:nvSpPr>
+          <p:cNvPr id="14" name="TextBox 13"/>
+          <p:cNvSpPr txBox="1"/>
+          <p:nvPr/>
+        </p:nvSpPr>
+        <p:spPr>
+          <a:xfrm>
+            <a:off x="6720840" y="5166360"/>
+            <a:ext cx="3749039" cy="320040"/>
+          </a:xfrm>
+          <a:prstGeom prst="rect">
+            <a:avLst/>
+          </a:prstGeom>
+          <a:noFill/>
+        </p:spPr>
+        <p:txBody>
+          <a:bodyPr wrap="square" lIns="73152" rIns="73152" tIns="36576" bIns="36576">
             <a:spAutoFit/>
           </a:bodyPr>
           <a:lstStyle/>
           <a:p>
             <a:pPr algn="l"/>
             <a:r>
-              <a:rPr sz="1500" b="0">
-                <a:solidFill>
-                  <a:srgbClr val="1A202C"/>
-                </a:solidFill>
-                <a:latin typeface="Arial"/>
-              </a:rPr>
-              <a:t>Course link: graph databases query by traversing paths instead of reconstructing paths through joins.</a:t>
+              <a:rPr sz="1500" b="1">
+                <a:solidFill>
+                  <a:srgbClr val="52121E"/>
+                </a:solidFill>
+                <a:latin typeface="Arial"/>
+              </a:rPr>
+              <a:t>Balanced conclusion: no system is universally better.</a:t>
+            </a:r>
+          </a:p>
+        </p:txBody>
+      </p:sp>
+      <p:sp>
+        <p:nvSpPr>
+          <p:cNvPr id="15" name="Rectangle 14"/>
+          <p:cNvSpPr/>
+          <p:nvPr/>
+        </p:nvSpPr>
+        <p:spPr>
+          <a:xfrm>
+            <a:off x="502920" y="6382512"/>
+            <a:ext cx="11155680" cy="9144"/>
+          </a:xfrm>
+          <a:prstGeom prst="rect">
+            <a:avLst/>
+          </a:prstGeom>
+          <a:solidFill>
+            <a:srgbClr val="DCDCDC"/>
+          </a:solidFill>
+          <a:ln>
+            <a:noFill/>
+          </a:ln>
+        </p:spPr>
+        <p:style>
+          <a:lnRef idx="1">
+            <a:schemeClr val="accent1"/>
+          </a:lnRef>
+          <a:fillRef idx="3">
+            <a:schemeClr val="accent1"/>
+          </a:fillRef>
+          <a:effectRef idx="2">
+            <a:schemeClr val="accent1"/>
+          </a:effectRef>
+          <a:fontRef idx="minor">
+            <a:schemeClr val="lt1"/>
+          </a:fontRef>
+        </p:style>
+        <p:txBody>
+          <a:bodyPr rtlCol="0" anchor="ctr"/>
+          <a:lstStyle/>
+          <a:p>
+            <a:pPr algn="ctr"/>
+          </a:p>
+        </p:txBody>
+      </p:sp>
+      <p:sp>
+        <p:nvSpPr>
+          <p:cNvPr id="16" name="TextBox 15"/>
+          <p:cNvSpPr txBox="1"/>
+          <p:nvPr/>
+        </p:nvSpPr>
+        <p:spPr>
+          <a:xfrm>
+            <a:off x="502920" y="6446520"/>
+            <a:ext cx="4206240" cy="201168"/>
+          </a:xfrm>
+          <a:prstGeom prst="rect">
+            <a:avLst/>
+          </a:prstGeom>
+          <a:noFill/>
+        </p:spPr>
+        <p:txBody>
+          <a:bodyPr wrap="square" lIns="73152" rIns="73152" tIns="36576" bIns="36576">
+            <a:spAutoFit/>
+          </a:bodyPr>
+          <a:lstStyle/>
+          <a:p>
+            <a:pPr algn="l"/>
+            <a:r>
+              <a:rPr sz="800" b="0">
+                <a:solidFill>
+                  <a:srgbClr val="5C6876"/>
+                </a:solidFill>
+                <a:latin typeface="Arial"/>
+              </a:rPr>
+              <a:t>OpenAlex AI DBMS Comparison</a:t>
+            </a:r>
+          </a:p>
+        </p:txBody>
+      </p:sp>
+      <p:sp>
+        <p:nvSpPr>
+          <p:cNvPr id="17" name="TextBox 16"/>
+          <p:cNvSpPr txBox="1"/>
+          <p:nvPr/>
+        </p:nvSpPr>
+        <p:spPr>
+          <a:xfrm>
+            <a:off x="11292840" y="6446520"/>
+            <a:ext cx="411480" cy="201168"/>
+          </a:xfrm>
+          <a:prstGeom prst="rect">
+            <a:avLst/>
+          </a:prstGeom>
+          <a:noFill/>
+        </p:spPr>
+        <p:txBody>
+          <a:bodyPr wrap="square" lIns="73152" rIns="73152" tIns="36576" bIns="36576">
+            <a:spAutoFit/>
+          </a:bodyPr>
+          <a:lstStyle/>
+          <a:p>
+            <a:pPr algn="r"/>
+            <a:r>
+              <a:rPr sz="800" b="0">
+                <a:solidFill>
+                  <a:srgbClr val="5C6876"/>
+                </a:solidFill>
+                <a:latin typeface="Arial"/>
+              </a:rPr>
+              <a:t>20</a:t>
             </a:r>
           </a:p>
         </p:txBody>
@@ -10286,28 +10126,28 @@
         <p:spPr>
           <a:xfrm>
             <a:off x="502920" y="594360"/>
-            <a:ext cx="8961120" cy="411480"/>
-          </a:xfrm>
-          <a:prstGeom prst="rect">
-            <a:avLst/>
-          </a:prstGeom>
-          <a:noFill/>
-        </p:spPr>
-        <p:txBody>
-          <a:bodyPr wrap="square" lIns="54864" rIns="54864" tIns="27432" bIns="27432">
+            <a:ext cx="8961120" cy="502920"/>
+          </a:xfrm>
+          <a:prstGeom prst="rect">
+            <a:avLst/>
+          </a:prstGeom>
+          <a:noFill/>
+        </p:spPr>
+        <p:txBody>
+          <a:bodyPr wrap="square" lIns="73152" rIns="73152" tIns="36576" bIns="36576">
             <a:spAutoFit/>
           </a:bodyPr>
           <a:lstStyle/>
           <a:p>
             <a:pPr algn="l"/>
             <a:r>
-              <a:rPr sz="2700" b="1">
+              <a:rPr sz="2800" b="1">
                 <a:solidFill>
                   <a:srgbClr val="52121E"/>
                 </a:solidFill>
                 <a:latin typeface="Arial"/>
               </a:rPr>
-              <a:t>Course Connection: Scope Choices</a:t>
+              <a:t>Backup: Project Scope Choice</a:t>
             </a:r>
           </a:p>
         </p:txBody>
@@ -10320,16 +10160,16 @@
         </p:nvSpPr>
         <p:spPr>
           <a:xfrm>
-            <a:off x="530352" y="987552"/>
-            <a:ext cx="8686800" cy="256032"/>
-          </a:xfrm>
-          <a:prstGeom prst="rect">
-            <a:avLst/>
-          </a:prstGeom>
-          <a:noFill/>
-        </p:spPr>
-        <p:txBody>
-          <a:bodyPr wrap="square" lIns="54864" rIns="54864" tIns="27432" bIns="27432">
+            <a:off x="530352" y="1024128"/>
+            <a:ext cx="8046720" cy="292608"/>
+          </a:xfrm>
+          <a:prstGeom prst="rect">
+            <a:avLst/>
+          </a:prstGeom>
+          <a:noFill/>
+        </p:spPr>
+        <p:txBody>
+          <a:bodyPr wrap="square" lIns="73152" rIns="73152" tIns="36576" bIns="36576">
             <a:spAutoFit/>
           </a:bodyPr>
           <a:lstStyle/>
@@ -10342,14 +10182,14 @@
                 </a:solidFill>
                 <a:latin typeface="Arial"/>
               </a:rPr>
-              <a:t>Why the project uses property graphs, not every course topic</a:t>
+              <a:t>Why this is not an OLAP/data-warehouse project</a:t>
             </a:r>
           </a:p>
         </p:txBody>
       </p:sp>
       <p:pic>
         <p:nvPicPr>
-          <p:cNvPr id="5" name="Picture 4" descr="image.png"/>
+          <p:cNvPr id="5" name="Picture 4" descr="sapienza_seal_transparent.png"/>
           <p:cNvPicPr>
             <a:picLocks noChangeAspect="1"/>
           </p:cNvPicPr>
@@ -10379,63 +10219,28 @@
         </p:nvSpPr>
         <p:spPr>
           <a:xfrm>
-            <a:off x="502920" y="6446520"/>
-            <a:ext cx="4206240" cy="201168"/>
-          </a:xfrm>
-          <a:prstGeom prst="rect">
-            <a:avLst/>
-          </a:prstGeom>
-          <a:noFill/>
-        </p:spPr>
-        <p:txBody>
-          <a:bodyPr wrap="square" lIns="54864" rIns="54864" tIns="27432" bIns="27432">
-            <a:spAutoFit/>
-          </a:bodyPr>
-          <a:lstStyle/>
-          <a:p>
-            <a:pPr algn="l"/>
-            <a:r>
-              <a:rPr sz="800" b="0">
+            <a:off x="11384280" y="6473952"/>
+            <a:ext cx="320040" cy="182880"/>
+          </a:xfrm>
+          <a:prstGeom prst="rect">
+            <a:avLst/>
+          </a:prstGeom>
+          <a:noFill/>
+        </p:spPr>
+        <p:txBody>
+          <a:bodyPr wrap="square" lIns="73152" rIns="73152" tIns="36576" bIns="36576">
+            <a:spAutoFit/>
+          </a:bodyPr>
+          <a:lstStyle/>
+          <a:p>
+            <a:pPr algn="r"/>
+            <a:r>
+              <a:rPr sz="900" b="0">
                 <a:solidFill>
                   <a:srgbClr val="5C6876"/>
                 </a:solidFill>
                 <a:latin typeface="Arial"/>
               </a:rPr>
-              <a:t>OpenAlex AI DBMS Comparison</a:t>
-            </a:r>
-          </a:p>
-        </p:txBody>
-      </p:sp>
-      <p:sp>
-        <p:nvSpPr>
-          <p:cNvPr id="7" name="TextBox 6"/>
-          <p:cNvSpPr txBox="1"/>
-          <p:nvPr/>
-        </p:nvSpPr>
-        <p:spPr>
-          <a:xfrm>
-            <a:off x="11292840" y="6446520"/>
-            <a:ext cx="411480" cy="201168"/>
-          </a:xfrm>
-          <a:prstGeom prst="rect">
-            <a:avLst/>
-          </a:prstGeom>
-          <a:noFill/>
-        </p:spPr>
-        <p:txBody>
-          <a:bodyPr wrap="square" lIns="54864" rIns="54864" tIns="27432" bIns="27432">
-            <a:spAutoFit/>
-          </a:bodyPr>
-          <a:lstStyle/>
-          <a:p>
-            <a:pPr algn="r"/>
-            <a:r>
-              <a:rPr sz="800" b="0">
-                <a:solidFill>
-                  <a:srgbClr val="5C6876"/>
-                </a:solidFill>
-                <a:latin typeface="Arial"/>
-              </a:rPr>
               <a:t>21</a:t>
             </a:r>
           </a:p>
@@ -10443,14 +10248,14 @@
       </p:sp>
       <p:sp>
         <p:nvSpPr>
-          <p:cNvPr id="8" name="Rounded Rectangle 7"/>
+          <p:cNvPr id="7" name="Rounded Rectangle 6"/>
           <p:cNvSpPr/>
           <p:nvPr/>
         </p:nvSpPr>
         <p:spPr>
           <a:xfrm>
-            <a:off x="685800" y="1417320"/>
-            <a:ext cx="3337560" cy="4434840"/>
+            <a:off x="777240" y="1417320"/>
+            <a:ext cx="4983480" cy="4526280"/>
           </a:xfrm>
           <a:prstGeom prst="roundRect">
             <a:avLst/>
@@ -10458,9 +10263,9 @@
           <a:solidFill>
             <a:srgbClr val="FBFBFB"/>
           </a:solidFill>
-          <a:ln w="15240">
+          <a:ln w="15875">
             <a:solidFill>
-              <a:srgbClr val="DCDCDC"/>
+              <a:srgbClr val="E4E4E4"/>
             </a:solidFill>
           </a:ln>
         </p:spPr>
@@ -10488,118 +10293,126 @@
       </p:sp>
       <p:sp>
         <p:nvSpPr>
+          <p:cNvPr id="8" name="TextBox 7"/>
+          <p:cNvSpPr txBox="1"/>
+          <p:nvPr/>
+        </p:nvSpPr>
+        <p:spPr>
+          <a:xfrm>
+            <a:off x="1097280" y="1719072"/>
+            <a:ext cx="2926080" cy="320040"/>
+          </a:xfrm>
+          <a:prstGeom prst="rect">
+            <a:avLst/>
+          </a:prstGeom>
+          <a:noFill/>
+        </p:spPr>
+        <p:txBody>
+          <a:bodyPr wrap="square" lIns="73152" rIns="73152" tIns="36576" bIns="36576">
+            <a:spAutoFit/>
+          </a:bodyPr>
+          <a:lstStyle/>
+          <a:p>
+            <a:pPr algn="l"/>
+            <a:r>
+              <a:rPr sz="1800" b="1">
+                <a:solidFill>
+                  <a:srgbClr val="52121E"/>
+                </a:solidFill>
+                <a:latin typeface="Arial"/>
+              </a:rPr>
+              <a:t>Approved scope</a:t>
+            </a:r>
+          </a:p>
+        </p:txBody>
+      </p:sp>
+      <p:sp>
+        <p:nvSpPr>
           <p:cNvPr id="9" name="TextBox 8"/>
           <p:cNvSpPr txBox="1"/>
           <p:nvPr/>
         </p:nvSpPr>
         <p:spPr>
           <a:xfrm>
-            <a:off x="960120" y="1691640"/>
-            <a:ext cx="2286000" cy="274320"/>
-          </a:xfrm>
-          <a:prstGeom prst="rect">
-            <a:avLst/>
-          </a:prstGeom>
-          <a:noFill/>
-        </p:spPr>
-        <p:txBody>
-          <a:bodyPr wrap="square" lIns="54864" rIns="54864" tIns="27432" bIns="27432">
-            <a:spAutoFit/>
-          </a:bodyPr>
-          <a:lstStyle/>
-          <a:p>
-            <a:pPr algn="l"/>
-            <a:r>
-              <a:rPr sz="1800" b="1">
-                <a:solidFill>
-                  <a:srgbClr val="52121E"/>
-                </a:solidFill>
-                <a:latin typeface="Arial"/>
-              </a:rPr>
-              <a:t>RDF databases</a:t>
-            </a:r>
-          </a:p>
-        </p:txBody>
-      </p:sp>
-      <p:sp>
-        <p:nvSpPr>
-          <p:cNvPr id="10" name="TextBox 9"/>
-          <p:cNvSpPr txBox="1"/>
-          <p:nvPr/>
-        </p:nvSpPr>
-        <p:spPr>
-          <a:xfrm>
-            <a:off x="960120" y="2148840"/>
-            <a:ext cx="2651760" cy="2514600"/>
-          </a:xfrm>
-          <a:prstGeom prst="rect">
-            <a:avLst/>
-          </a:prstGeom>
-          <a:noFill/>
-        </p:spPr>
-        <p:txBody>
-          <a:bodyPr wrap="square" lIns="54864" rIns="54864" tIns="27432" bIns="27432">
+            <a:off x="1097280" y="2148840"/>
+            <a:ext cx="4160520" cy="2331720"/>
+          </a:xfrm>
+          <a:prstGeom prst="rect">
+            <a:avLst/>
+          </a:prstGeom>
+          <a:noFill/>
+        </p:spPr>
+        <p:txBody>
+          <a:bodyPr wrap="square" lIns="73152" rIns="73152" tIns="36576" bIns="36576">
             <a:spAutoFit/>
           </a:bodyPr>
           <a:lstStyle/>
           <a:p>
             <a:pPr algn="l">
               <a:spcAft>
-                <a:spcPts val="500"/>
+                <a:spcPts val="600"/>
               </a:spcAft>
+              <a:defRPr sz="1700"/>
             </a:pPr>
             <a:r>
-              <a:rPr sz="1600" b="0">
+              <a:rPr sz="1700" b="0">
                 <a:solidFill>
                   <a:srgbClr val="1A202C"/>
                 </a:solidFill>
                 <a:latin typeface="Arial"/>
               </a:rPr>
-              <a:t>- RDF uses triples and semantic vocabularies</a:t>
+              <a:t>- Project type: DBMS / NoSQL comparison</a:t>
             </a:r>
             <a:br/>
             <a:r>
-              <a:rPr sz="1600" b="0">
+              <a:rPr sz="1700">
                 <a:solidFill>
                   <a:srgbClr val="1A202C"/>
                 </a:solidFill>
-                <a:latin typeface="Arial"/>
-              </a:rPr>
-              <a:t>- Useful for ontology-oriented data</a:t>
+              </a:rPr>
+              <a:t>- Systems compared: PostgreSQL 16 and Neo4j 5</a:t>
             </a:r>
             <a:br/>
             <a:r>
-              <a:rPr sz="1600" b="0">
+              <a:rPr sz="1700">
                 <a:solidFill>
                   <a:srgbClr val="1A202C"/>
                 </a:solidFill>
-                <a:latin typeface="Arial"/>
-              </a:rPr>
-              <a:t>- We did not use RDF because the project compares PostgreSQL with Neo4j property graphs</a:t>
-            </a:r>
-          </a:p>
-        </p:txBody>
-      </p:sp>
-      <p:sp>
-        <p:nvSpPr>
-          <p:cNvPr id="11" name="Rounded Rectangle 10"/>
+              </a:rPr>
+              <a:t>- Same OpenAlex CSV dataset loaded into both systems</a:t>
+            </a:r>
+            <a:br/>
+            <a:r>
+              <a:rPr sz="1700">
+                <a:solidFill>
+                  <a:srgbClr val="1A202C"/>
+                </a:solidFill>
+              </a:rPr>
+              <a:t>- Evaluation: modeling, query expression, and benchmark behavior</a:t>
+            </a:r>
+          </a:p>
+        </p:txBody>
+      </p:sp>
+      <p:sp>
+        <p:nvSpPr>
+          <p:cNvPr id="10" name="Rounded Rectangle 9"/>
           <p:cNvSpPr/>
           <p:nvPr/>
         </p:nvSpPr>
         <p:spPr>
           <a:xfrm>
-            <a:off x="4480560" y="1417320"/>
-            <a:ext cx="3337560" cy="4434840"/>
+            <a:off x="6263640" y="1417320"/>
+            <a:ext cx="4983480" cy="4526280"/>
           </a:xfrm>
           <a:prstGeom prst="roundRect">
             <a:avLst/>
           </a:prstGeom>
           <a:solidFill>
-            <a:srgbClr val="FBFBFB"/>
+            <a:srgbClr val="FFFDFD"/>
           </a:solidFill>
-          <a:ln w="15240">
+          <a:ln w="15875">
             <a:solidFill>
-              <a:srgbClr val="DCDCDC"/>
+              <a:srgbClr val="EAD5D8"/>
             </a:solidFill>
           </a:ln>
         </p:spPr>
@@ -10627,35 +10440,70 @@
       </p:sp>
       <p:sp>
         <p:nvSpPr>
+          <p:cNvPr id="11" name="TextBox 10"/>
+          <p:cNvSpPr txBox="1"/>
+          <p:nvPr/>
+        </p:nvSpPr>
+        <p:spPr>
+          <a:xfrm>
+            <a:off x="6583680" y="1719072"/>
+            <a:ext cx="2926080" cy="320040"/>
+          </a:xfrm>
+          <a:prstGeom prst="rect">
+            <a:avLst/>
+          </a:prstGeom>
+          <a:noFill/>
+        </p:spPr>
+        <p:txBody>
+          <a:bodyPr wrap="square" lIns="73152" rIns="73152" tIns="36576" bIns="36576">
+            <a:spAutoFit/>
+          </a:bodyPr>
+          <a:lstStyle/>
+          <a:p>
+            <a:pPr algn="l"/>
+            <a:r>
+              <a:rPr sz="1800" b="1">
+                <a:solidFill>
+                  <a:srgbClr val="52121E"/>
+                </a:solidFill>
+                <a:latin typeface="Arial"/>
+              </a:rPr>
+              <a:t>Therefore</a:t>
+            </a:r>
+          </a:p>
+        </p:txBody>
+      </p:sp>
+      <p:sp>
+        <p:nvSpPr>
           <p:cNvPr id="12" name="TextBox 11"/>
           <p:cNvSpPr txBox="1"/>
           <p:nvPr/>
         </p:nvSpPr>
         <p:spPr>
           <a:xfrm>
-            <a:off x="4754880" y="1691640"/>
-            <a:ext cx="2377440" cy="274320"/>
-          </a:xfrm>
-          <a:prstGeom prst="rect">
-            <a:avLst/>
-          </a:prstGeom>
-          <a:noFill/>
-        </p:spPr>
-        <p:txBody>
-          <a:bodyPr wrap="square" lIns="54864" rIns="54864" tIns="27432" bIns="27432">
+            <a:off x="6583680" y="2148840"/>
+            <a:ext cx="4160520" cy="1508760"/>
+          </a:xfrm>
+          <a:prstGeom prst="rect">
+            <a:avLst/>
+          </a:prstGeom>
+          <a:noFill/>
+        </p:spPr>
+        <p:txBody>
+          <a:bodyPr wrap="square" lIns="73152" rIns="73152" tIns="36576" bIns="36576">
             <a:spAutoFit/>
           </a:bodyPr>
           <a:lstStyle/>
           <a:p>
             <a:pPr algn="l"/>
             <a:r>
-              <a:rPr sz="1800" b="1">
-                <a:solidFill>
-                  <a:srgbClr val="52121E"/>
-                </a:solidFill>
-                <a:latin typeface="Arial"/>
-              </a:rPr>
-              <a:t>Data warehousing</a:t>
+              <a:rPr sz="1900" b="1">
+                <a:solidFill>
+                  <a:srgbClr val="1A202C"/>
+                </a:solidFill>
+                <a:latin typeface="Arial"/>
+              </a:rPr>
+              <a:t>We did not design a DFM, Star schema, Snowflake schema, or OLAP sessions because those belong to a Data Warehousing project. Our equivalent analysis uses SQL and Cypher workloads instead.</a:t>
             </a:r>
           </a:p>
         </p:txBody>
@@ -10668,78 +10516,52 @@
         </p:nvSpPr>
         <p:spPr>
           <a:xfrm>
-            <a:off x="4754880" y="2148840"/>
-            <a:ext cx="2651760" cy="2514600"/>
-          </a:xfrm>
-          <a:prstGeom prst="rect">
-            <a:avLst/>
-          </a:prstGeom>
-          <a:noFill/>
-        </p:spPr>
-        <p:txBody>
-          <a:bodyPr wrap="square" lIns="54864" rIns="54864" tIns="27432" bIns="27432">
-            <a:spAutoFit/>
-          </a:bodyPr>
-          <a:lstStyle/>
-          <a:p>
-            <a:pPr algn="l">
-              <a:spcAft>
-                <a:spcPts val="500"/>
-              </a:spcAft>
-            </a:pPr>
+            <a:off x="6583680" y="4160520"/>
+            <a:ext cx="4160520" cy="822960"/>
+          </a:xfrm>
+          <a:prstGeom prst="rect">
+            <a:avLst/>
+          </a:prstGeom>
+          <a:noFill/>
+        </p:spPr>
+        <p:txBody>
+          <a:bodyPr wrap="square" lIns="73152" rIns="73152" tIns="36576" bIns="36576">
+            <a:spAutoFit/>
+          </a:bodyPr>
+          <a:lstStyle/>
+          <a:p>
+            <a:pPr algn="l"/>
             <a:r>
               <a:rPr sz="1600" b="0">
                 <a:solidFill>
-                  <a:srgbClr val="1A202C"/>
-                </a:solidFill>
-                <a:latin typeface="Arial"/>
-              </a:rPr>
-              <a:t>- DW focuses on fact tables, dimensions, star schemas, and OLAP</a:t>
-            </a:r>
-            <a:br/>
-            <a:r>
-              <a:rPr sz="1600" b="0">
-                <a:solidFill>
-                  <a:srgbClr val="1A202C"/>
-                </a:solidFill>
-                <a:latin typeface="Arial"/>
-              </a:rPr>
-              <a:t>- Our approved topic is DBMS comparison</a:t>
-            </a:r>
-            <a:br/>
-            <a:r>
-              <a:rPr sz="1600" b="0">
-                <a:solidFill>
-                  <a:srgbClr val="1A202C"/>
-                </a:solidFill>
-                <a:latin typeface="Arial"/>
-              </a:rPr>
-              <a:t>- So we do not present this as a warehouse project</a:t>
-            </a:r>
-          </a:p>
-        </p:txBody>
-      </p:sp>
-      <p:sp>
-        <p:nvSpPr>
-          <p:cNvPr id="14" name="Rounded Rectangle 13"/>
+                  <a:srgbClr val="5C6876"/>
+                </a:solidFill>
+                <a:latin typeface="Arial"/>
+              </a:rPr>
+              <a:t>If asked: the comparable concept in this project is not OLAP cubing, but relational joins versus graph traversal over the same scholarly network.</a:t>
+            </a:r>
+          </a:p>
+        </p:txBody>
+      </p:sp>
+      <p:sp>
+        <p:nvSpPr>
+          <p:cNvPr id="14" name="Rectangle 13"/>
           <p:cNvSpPr/>
           <p:nvPr/>
         </p:nvSpPr>
         <p:spPr>
           <a:xfrm>
-            <a:off x="8275320" y="1417320"/>
-            <a:ext cx="3337560" cy="4434840"/>
-          </a:xfrm>
-          <a:prstGeom prst="roundRect">
+            <a:off x="502920" y="6382512"/>
+            <a:ext cx="11155680" cy="9144"/>
+          </a:xfrm>
+          <a:prstGeom prst="rect">
             <a:avLst/>
           </a:prstGeom>
           <a:solidFill>
-            <a:srgbClr val="FBFBFB"/>
+            <a:srgbClr val="DCDCDC"/>
           </a:solidFill>
-          <a:ln w="15240">
-            <a:solidFill>
-              <a:srgbClr val="DCDCDC"/>
-            </a:solidFill>
+          <a:ln>
+            <a:noFill/>
           </a:ln>
         </p:spPr>
         <p:style>
@@ -10772,29 +10594,29 @@
         </p:nvSpPr>
         <p:spPr>
           <a:xfrm>
-            <a:off x="8549640" y="1691640"/>
-            <a:ext cx="2377440" cy="274320"/>
-          </a:xfrm>
-          <a:prstGeom prst="rect">
-            <a:avLst/>
-          </a:prstGeom>
-          <a:noFill/>
-        </p:spPr>
-        <p:txBody>
-          <a:bodyPr wrap="square" lIns="54864" rIns="54864" tIns="27432" bIns="27432">
+            <a:off x="502920" y="6446520"/>
+            <a:ext cx="4206240" cy="201168"/>
+          </a:xfrm>
+          <a:prstGeom prst="rect">
+            <a:avLst/>
+          </a:prstGeom>
+          <a:noFill/>
+        </p:spPr>
+        <p:txBody>
+          <a:bodyPr wrap="square" lIns="73152" rIns="73152" tIns="36576" bIns="36576">
             <a:spAutoFit/>
           </a:bodyPr>
           <a:lstStyle/>
           <a:p>
             <a:pPr algn="l"/>
             <a:r>
-              <a:rPr sz="1800" b="1">
-                <a:solidFill>
-                  <a:srgbClr val="52121E"/>
-                </a:solidFill>
-                <a:latin typeface="Arial"/>
-              </a:rPr>
-              <a:t>Query evaluation</a:t>
+              <a:rPr sz="800" b="0">
+                <a:solidFill>
+                  <a:srgbClr val="5C6876"/>
+                </a:solidFill>
+                <a:latin typeface="Arial"/>
+              </a:rPr>
+              <a:t>OpenAlex AI DBMS Comparison</a:t>
             </a:r>
           </a:p>
         </p:txBody>
@@ -10807,717 +10629,29 @@
         </p:nvSpPr>
         <p:spPr>
           <a:xfrm>
-            <a:off x="8549640" y="2148840"/>
-            <a:ext cx="2651760" cy="2514600"/>
-          </a:xfrm>
-          <a:prstGeom prst="rect">
-            <a:avLst/>
-          </a:prstGeom>
-          <a:noFill/>
-        </p:spPr>
-        <p:txBody>
-          <a:bodyPr wrap="square" lIns="54864" rIns="54864" tIns="27432" bIns="27432">
-            <a:spAutoFit/>
-          </a:bodyPr>
-          <a:lstStyle/>
-          <a:p>
-            <a:pPr algn="l">
-              <a:spcAft>
-                <a:spcPts val="500"/>
-              </a:spcAft>
-            </a:pPr>
-            <a:r>
-              <a:rPr sz="1600" b="0">
-                <a:solidFill>
-                  <a:srgbClr val="1A202C"/>
-                </a:solidFill>
-                <a:latin typeface="Arial"/>
-              </a:rPr>
-              <a:t>- Benchmarks connect to operator evaluation</a:t>
-            </a:r>
-            <a:br/>
-            <a:r>
-              <a:rPr sz="1600" b="0">
-                <a:solidFill>
-                  <a:srgbClr val="1A202C"/>
-                </a:solidFill>
-                <a:latin typeface="Arial"/>
-              </a:rPr>
-              <a:t>- PostgreSQL uses EXPLAIN ANALYZE</a:t>
-            </a:r>
-            <a:br/>
-            <a:r>
-              <a:rPr sz="1600" b="0">
-                <a:solidFill>
-                  <a:srgbClr val="1A202C"/>
-                </a:solidFill>
-                <a:latin typeface="Arial"/>
-              </a:rPr>
-              <a:t>- Neo4j uses PROFILE</a:t>
-            </a:r>
-            <a:br/>
-            <a:r>
-              <a:rPr sz="1600" b="0">
-                <a:solidFill>
-                  <a:srgbClr val="1A202C"/>
-                </a:solidFill>
-                <a:latin typeface="Arial"/>
-              </a:rPr>
-              <a:t>- Indexes and constraints influence access paths</a:t>
-            </a:r>
-          </a:p>
-        </p:txBody>
-      </p:sp>
-    </p:spTree>
-  </p:cSld>
-  <p:clrMapOvr>
-    <a:masterClrMapping/>
-  </p:clrMapOvr>
-</p:sld>
-</file>
-
-<file path=ppt/slides/slide22.xml><?xml version="1.0" encoding="utf-8"?>
-<p:sld xmlns:a="http://schemas.openxmlformats.org/drawingml/2006/main" xmlns:p="http://schemas.openxmlformats.org/presentationml/2006/main" xmlns:r="http://schemas.openxmlformats.org/officeDocument/2006/relationships">
-  <p:cSld>
-    <p:bg>
-      <p:bgPr>
-        <a:solidFill>
-          <a:srgbClr val="FFFFFF"/>
-        </a:solidFill>
-        <a:effectLst/>
-      </p:bgPr>
-    </p:bg>
-    <p:spTree>
-      <p:nvGrpSpPr>
-        <p:cNvPr id="1" name=""/>
-        <p:cNvGrpSpPr/>
-        <p:nvPr/>
-      </p:nvGrpSpPr>
-      <p:grpSpPr/>
-      <p:sp>
-        <p:nvSpPr>
-          <p:cNvPr id="2" name="Rectangle 1"/>
-          <p:cNvSpPr/>
-          <p:nvPr/>
-        </p:nvSpPr>
-        <p:spPr>
-          <a:xfrm>
-            <a:off x="0" y="0"/>
-            <a:ext cx="12191695" cy="310896"/>
-          </a:xfrm>
-          <a:prstGeom prst="rect">
-            <a:avLst/>
-          </a:prstGeom>
-          <a:solidFill>
-            <a:srgbClr val="822332"/>
-          </a:solidFill>
-          <a:ln>
-            <a:noFill/>
-          </a:ln>
-        </p:spPr>
-        <p:style>
-          <a:lnRef idx="1">
-            <a:schemeClr val="accent1"/>
-          </a:lnRef>
-          <a:fillRef idx="3">
-            <a:schemeClr val="accent1"/>
-          </a:fillRef>
-          <a:effectRef idx="2">
-            <a:schemeClr val="accent1"/>
-          </a:effectRef>
-          <a:fontRef idx="minor">
-            <a:schemeClr val="lt1"/>
-          </a:fontRef>
-        </p:style>
-        <p:txBody>
-          <a:bodyPr rtlCol="0" anchor="ctr"/>
-          <a:lstStyle/>
-          <a:p>
-            <a:pPr algn="ctr"/>
-          </a:p>
-        </p:txBody>
-      </p:sp>
-      <p:pic>
-        <p:nvPicPr>
-          <p:cNvPr id="3" name="Picture 2" descr="image.png"/>
-          <p:cNvPicPr>
-            <a:picLocks noChangeAspect="1"/>
-          </p:cNvPicPr>
-          <p:nvPr/>
-        </p:nvPicPr>
-        <p:blipFill>
-          <a:blip r:embed="rId2"/>
-          <a:stretch>
-            <a:fillRect/>
-          </a:stretch>
-        </p:blipFill>
-        <p:spPr>
-          <a:xfrm>
-            <a:off x="10287000" y="438912"/>
-            <a:ext cx="530352" cy="530352"/>
-          </a:xfrm>
-          <a:prstGeom prst="rect">
-            <a:avLst/>
-          </a:prstGeom>
-        </p:spPr>
-      </p:pic>
-      <p:sp>
-        <p:nvSpPr>
-          <p:cNvPr id="4" name="TextBox 3"/>
-          <p:cNvSpPr txBox="1"/>
-          <p:nvPr/>
-        </p:nvSpPr>
-        <p:spPr>
-          <a:xfrm>
-            <a:off x="502920" y="530352"/>
-            <a:ext cx="8961120" cy="384048"/>
-          </a:xfrm>
-          <a:prstGeom prst="rect">
-            <a:avLst/>
-          </a:prstGeom>
-          <a:noFill/>
-        </p:spPr>
-        <p:txBody>
-          <a:bodyPr wrap="none">
-            <a:spAutoFit/>
-          </a:bodyPr>
-          <a:lstStyle/>
-          <a:p>
-            <a:r>
-              <a:rPr sz="2500" b="1">
-                <a:solidFill>
-                  <a:srgbClr val="822332"/>
-                </a:solidFill>
-                <a:latin typeface="Aptos Display"/>
-              </a:rPr>
-              <a:t>Supplemental Benchmark: Graph-Focused Workload</a:t>
-            </a:r>
-          </a:p>
-        </p:txBody>
-      </p:sp>
-      <p:sp>
-        <p:nvSpPr>
-          <p:cNvPr id="5" name="TextBox 4"/>
-          <p:cNvSpPr txBox="1"/>
-          <p:nvPr/>
-        </p:nvSpPr>
-        <p:spPr>
-          <a:xfrm>
-            <a:off x="512064" y="932688"/>
-            <a:ext cx="8686800" cy="256032"/>
-          </a:xfrm>
-          <a:prstGeom prst="rect">
-            <a:avLst/>
-          </a:prstGeom>
-          <a:noFill/>
-        </p:spPr>
-        <p:txBody>
-          <a:bodyPr wrap="none">
-            <a:spAutoFit/>
-          </a:bodyPr>
-          <a:lstStyle/>
-          <a:p>
-            <a:r>
-              <a:rPr sz="1000">
-                <a:solidFill>
-                  <a:srgbClr val="566373"/>
-                </a:solidFill>
-                <a:latin typeface="Aptos"/>
-              </a:rPr>
-              <a:t>Extra query pairs added to test whether Neo4j improves on more graph-shaped questions</a:t>
-            </a:r>
-          </a:p>
-        </p:txBody>
-      </p:sp>
-      <p:sp>
-        <p:nvSpPr>
-          <p:cNvPr id="6" name="Rounded Rectangle 5"/>
-          <p:cNvSpPr/>
-          <p:nvPr/>
-        </p:nvSpPr>
-        <p:spPr>
-          <a:xfrm>
-            <a:off x="658368" y="1481328"/>
-            <a:ext cx="2880360" cy="3977639"/>
-          </a:xfrm>
-          <a:prstGeom prst="roundRect">
-            <a:avLst/>
-          </a:prstGeom>
-          <a:solidFill>
-            <a:srgbClr val="FFFFFF"/>
-          </a:solidFill>
-          <a:ln w="12700">
-            <a:solidFill>
-              <a:srgbClr val="E0D2D6"/>
-            </a:solidFill>
-          </a:ln>
-        </p:spPr>
-        <p:style>
-          <a:lnRef idx="1">
-            <a:schemeClr val="accent1"/>
-          </a:lnRef>
-          <a:fillRef idx="3">
-            <a:schemeClr val="accent1"/>
-          </a:fillRef>
-          <a:effectRef idx="2">
-            <a:schemeClr val="accent1"/>
-          </a:effectRef>
-          <a:fontRef idx="minor">
-            <a:schemeClr val="lt1"/>
-          </a:fontRef>
-        </p:style>
-        <p:txBody>
-          <a:bodyPr rtlCol="0" anchor="ctr"/>
-          <a:lstStyle/>
-          <a:p>
-            <a:pPr algn="ctr"/>
-          </a:p>
-        </p:txBody>
-      </p:sp>
-      <p:sp>
-        <p:nvSpPr>
-          <p:cNvPr id="7" name="TextBox 6"/>
-          <p:cNvSpPr txBox="1"/>
-          <p:nvPr/>
-        </p:nvSpPr>
-        <p:spPr>
-          <a:xfrm>
-            <a:off x="859536" y="1682496"/>
-            <a:ext cx="2478024" cy="3657599"/>
-          </a:xfrm>
-          <a:prstGeom prst="rect">
-            <a:avLst/>
-          </a:prstGeom>
-          <a:noFill/>
-        </p:spPr>
-        <p:txBody>
-          <a:bodyPr wrap="square">
-            <a:spAutoFit/>
-          </a:bodyPr>
-          <a:lstStyle/>
-          <a:p>
-            <a:r>
-              <a:rPr sz="1400" b="1">
-                <a:solidFill>
-                  <a:srgbClr val="822332"/>
-                </a:solidFill>
-                <a:latin typeface="Aptos"/>
-              </a:rPr>
-              <a:t>What changed</a:t>
-            </a:r>
-          </a:p>
-          <a:p>
-            <a:pPr>
-              <a:spcBef>
-                <a:spcPts val="500"/>
-              </a:spcBef>
-            </a:pPr>
-            <a:r>
-              <a:rPr sz="1100">
-                <a:solidFill>
-                  <a:srgbClr val="1F2430"/>
-                </a:solidFill>
-                <a:latin typeface="Aptos"/>
-              </a:rPr>
-              <a:t>- Original 11-query benchmark kept unchanged</a:t>
-            </a:r>
-          </a:p>
-          <a:p>
-            <a:pPr>
-              <a:spcBef>
-                <a:spcPts val="500"/>
-              </a:spcBef>
-            </a:pPr>
-            <a:r>
-              <a:rPr sz="1100">
-                <a:solidFill>
-                  <a:srgbClr val="1F2430"/>
-                </a:solidFill>
-                <a:latin typeface="Aptos"/>
-              </a:rPr>
-              <a:t>- Added 7 supplemental graph-focused query pairs</a:t>
-            </a:r>
-          </a:p>
-          <a:p>
-            <a:pPr>
-              <a:spcBef>
-                <a:spcPts val="500"/>
-              </a:spcBef>
-            </a:pPr>
-            <a:r>
-              <a:rPr sz="1100">
-                <a:solidFill>
-                  <a:srgbClr val="1F2430"/>
-                </a:solidFill>
-                <a:latin typeface="Aptos"/>
-              </a:rPr>
-              <a:t>- Workload includes neighborhoods, two-hop citation paths, and topic-overlap citation networks</a:t>
-            </a:r>
-          </a:p>
-        </p:txBody>
-      </p:sp>
-      <p:sp>
-        <p:nvSpPr>
-          <p:cNvPr id="8" name="Rounded Rectangle 7"/>
-          <p:cNvSpPr/>
-          <p:nvPr/>
-        </p:nvSpPr>
-        <p:spPr>
-          <a:xfrm>
-            <a:off x="3794760" y="1481328"/>
-            <a:ext cx="3063240" cy="3977639"/>
-          </a:xfrm>
-          <a:prstGeom prst="roundRect">
-            <a:avLst/>
-          </a:prstGeom>
-          <a:solidFill>
-            <a:srgbClr val="FFFFFF"/>
-          </a:solidFill>
-          <a:ln w="12700">
-            <a:solidFill>
-              <a:srgbClr val="E0D2D6"/>
-            </a:solidFill>
-          </a:ln>
-        </p:spPr>
-        <p:style>
-          <a:lnRef idx="1">
-            <a:schemeClr val="accent1"/>
-          </a:lnRef>
-          <a:fillRef idx="3">
-            <a:schemeClr val="accent1"/>
-          </a:fillRef>
-          <a:effectRef idx="2">
-            <a:schemeClr val="accent1"/>
-          </a:effectRef>
-          <a:fontRef idx="minor">
-            <a:schemeClr val="lt1"/>
-          </a:fontRef>
-        </p:style>
-        <p:txBody>
-          <a:bodyPr rtlCol="0" anchor="ctr"/>
-          <a:lstStyle/>
-          <a:p>
-            <a:pPr algn="ctr"/>
-          </a:p>
-        </p:txBody>
-      </p:sp>
-      <p:sp>
-        <p:nvSpPr>
-          <p:cNvPr id="9" name="TextBox 8"/>
-          <p:cNvSpPr txBox="1"/>
-          <p:nvPr/>
-        </p:nvSpPr>
-        <p:spPr>
-          <a:xfrm>
-            <a:off x="3995928" y="1682496"/>
-            <a:ext cx="2660904" cy="3657599"/>
-          </a:xfrm>
-          <a:prstGeom prst="rect">
-            <a:avLst/>
-          </a:prstGeom>
-          <a:noFill/>
-        </p:spPr>
-        <p:txBody>
-          <a:bodyPr wrap="square">
-            <a:spAutoFit/>
-          </a:bodyPr>
-          <a:lstStyle/>
-          <a:p>
-            <a:r>
-              <a:rPr sz="1400" b="1">
-                <a:solidFill>
-                  <a:srgbClr val="822332"/>
-                </a:solidFill>
-                <a:latin typeface="Aptos"/>
-              </a:rPr>
-              <a:t>Measured result</a:t>
-            </a:r>
-          </a:p>
-          <a:p>
-            <a:pPr>
-              <a:spcBef>
-                <a:spcPts val="500"/>
-              </a:spcBef>
-            </a:pPr>
-            <a:r>
-              <a:rPr sz="1100">
-                <a:solidFill>
-                  <a:srgbClr val="1F2430"/>
-                </a:solidFill>
-                <a:latin typeface="Aptos"/>
-              </a:rPr>
-              <a:t>- PostgreSQL still wins small anchored lookups</a:t>
-            </a:r>
-          </a:p>
-          <a:p>
-            <a:pPr>
-              <a:spcBef>
-                <a:spcPts val="500"/>
-              </a:spcBef>
-            </a:pPr>
-            <a:r>
-              <a:rPr sz="1100">
-                <a:solidFill>
-                  <a:srgbClr val="1F2430"/>
-                </a:solidFill>
-                <a:latin typeface="Aptos"/>
-              </a:rPr>
-              <a:t>- Neo4j wins two-hop author citation network: 39.2 ms vs 43.0 ms</a:t>
-            </a:r>
-          </a:p>
-          <a:p>
-            <a:pPr>
-              <a:spcBef>
-                <a:spcPts val="500"/>
-              </a:spcBef>
-            </a:pPr>
-            <a:r>
-              <a:rPr sz="1100">
-                <a:solidFill>
-                  <a:srgbClr val="1F2430"/>
-                </a:solidFill>
-                <a:latin typeface="Aptos"/>
-              </a:rPr>
-              <a:t>- Neo4j wins author citation + shared topic: 338.0 ms vs 783.0 ms</a:t>
-            </a:r>
-          </a:p>
-        </p:txBody>
-      </p:sp>
-      <p:sp>
-        <p:nvSpPr>
-          <p:cNvPr id="10" name="Rounded Rectangle 9"/>
-          <p:cNvSpPr/>
-          <p:nvPr/>
-        </p:nvSpPr>
-        <p:spPr>
-          <a:xfrm>
-            <a:off x="7114032" y="1481328"/>
-            <a:ext cx="3337560" cy="3977639"/>
-          </a:xfrm>
-          <a:prstGeom prst="roundRect">
-            <a:avLst/>
-          </a:prstGeom>
-          <a:solidFill>
-            <a:srgbClr val="FFFFFF"/>
-          </a:solidFill>
-          <a:ln w="12700">
-            <a:solidFill>
-              <a:srgbClr val="E0D2D6"/>
-            </a:solidFill>
-          </a:ln>
-        </p:spPr>
-        <p:style>
-          <a:lnRef idx="1">
-            <a:schemeClr val="accent1"/>
-          </a:lnRef>
-          <a:fillRef idx="3">
-            <a:schemeClr val="accent1"/>
-          </a:fillRef>
-          <a:effectRef idx="2">
-            <a:schemeClr val="accent1"/>
-          </a:effectRef>
-          <a:fontRef idx="minor">
-            <a:schemeClr val="lt1"/>
-          </a:fontRef>
-        </p:style>
-        <p:txBody>
-          <a:bodyPr rtlCol="0" anchor="ctr"/>
-          <a:lstStyle/>
-          <a:p>
-            <a:pPr algn="ctr"/>
-          </a:p>
-        </p:txBody>
-      </p:sp>
-      <p:sp>
-        <p:nvSpPr>
-          <p:cNvPr id="11" name="TextBox 10"/>
-          <p:cNvSpPr txBox="1"/>
-          <p:nvPr/>
-        </p:nvSpPr>
-        <p:spPr>
-          <a:xfrm>
-            <a:off x="7315200" y="1682496"/>
-            <a:ext cx="2935224" cy="3657599"/>
-          </a:xfrm>
-          <a:prstGeom prst="rect">
-            <a:avLst/>
-          </a:prstGeom>
-          <a:noFill/>
-        </p:spPr>
-        <p:txBody>
-          <a:bodyPr wrap="square">
-            <a:spAutoFit/>
-          </a:bodyPr>
-          <a:lstStyle/>
-          <a:p>
-            <a:r>
-              <a:rPr sz="1400" b="1">
-                <a:solidFill>
-                  <a:srgbClr val="822332"/>
-                </a:solidFill>
-                <a:latin typeface="Aptos"/>
-              </a:rPr>
-              <a:t>Interpretation</a:t>
-            </a:r>
-          </a:p>
-          <a:p>
-            <a:pPr>
-              <a:spcBef>
-                <a:spcPts val="500"/>
-              </a:spcBef>
-            </a:pPr>
-            <a:r>
-              <a:rPr sz="1100">
-                <a:solidFill>
-                  <a:srgbClr val="1F2430"/>
-                </a:solidFill>
-                <a:latin typeface="Aptos"/>
-              </a:rPr>
-              <a:t>- Neo4j is not automatically faster for every graph-looking query</a:t>
-            </a:r>
-          </a:p>
-          <a:p>
-            <a:pPr>
-              <a:spcBef>
-                <a:spcPts val="500"/>
-              </a:spcBef>
-            </a:pPr>
-            <a:r>
-              <a:rPr sz="1100">
-                <a:solidFill>
-                  <a:srgbClr val="1F2430"/>
-                </a:solidFill>
-                <a:latin typeface="Aptos"/>
-              </a:rPr>
-              <a:t>- Advantage appears when traversal combines several relationship types</a:t>
-            </a:r>
-          </a:p>
-          <a:p>
-            <a:pPr>
-              <a:spcBef>
-                <a:spcPts val="500"/>
-              </a:spcBef>
-            </a:pPr>
-            <a:r>
-              <a:rPr sz="1100">
-                <a:solidFill>
-                  <a:srgbClr val="1F2430"/>
-                </a:solidFill>
-                <a:latin typeface="Aptos"/>
-              </a:rPr>
-              <a:t>- This supports the balanced model-choice conclusion</a:t>
-            </a:r>
-          </a:p>
-        </p:txBody>
-      </p:sp>
-      <p:sp>
-        <p:nvSpPr>
-          <p:cNvPr id="12" name="Rectangle 11"/>
-          <p:cNvSpPr/>
-          <p:nvPr/>
-        </p:nvSpPr>
-        <p:spPr>
-          <a:xfrm>
-            <a:off x="457200" y="6309360"/>
-            <a:ext cx="10058400" cy="12700"/>
-          </a:xfrm>
-          <a:prstGeom prst="rect">
-            <a:avLst/>
-          </a:prstGeom>
-          <a:solidFill>
-            <a:srgbClr val="E6E6E6"/>
-          </a:solidFill>
-          <a:ln>
-            <a:noFill/>
-          </a:ln>
-        </p:spPr>
-        <p:style>
-          <a:lnRef idx="1">
-            <a:schemeClr val="accent1"/>
-          </a:lnRef>
-          <a:fillRef idx="3">
-            <a:schemeClr val="accent1"/>
-          </a:fillRef>
-          <a:effectRef idx="2">
-            <a:schemeClr val="accent1"/>
-          </a:effectRef>
-          <a:fontRef idx="minor">
-            <a:schemeClr val="lt1"/>
-          </a:fontRef>
-        </p:style>
-        <p:txBody>
-          <a:bodyPr rtlCol="0" anchor="ctr"/>
-          <a:lstStyle/>
-          <a:p>
-            <a:pPr algn="ctr"/>
-          </a:p>
-        </p:txBody>
-      </p:sp>
-      <p:sp>
-        <p:nvSpPr>
-          <p:cNvPr id="13" name="TextBox 12"/>
-          <p:cNvSpPr txBox="1"/>
-          <p:nvPr/>
-        </p:nvSpPr>
-        <p:spPr>
-          <a:xfrm>
-            <a:off x="502920" y="6419088"/>
-            <a:ext cx="4114800" cy="182880"/>
-          </a:xfrm>
-          <a:prstGeom prst="rect">
-            <a:avLst/>
-          </a:prstGeom>
-          <a:noFill/>
-        </p:spPr>
-        <p:txBody>
-          <a:bodyPr wrap="none">
-            <a:spAutoFit/>
-          </a:bodyPr>
-          <a:lstStyle/>
-          <a:p>
-            <a:r>
-              <a:rPr sz="600">
-                <a:solidFill>
-                  <a:srgbClr val="566373"/>
-                </a:solidFill>
-                <a:latin typeface="Aptos"/>
-              </a:rPr>
-              <a:t>OpenAlex AI DBMS Comparison</a:t>
-            </a:r>
-          </a:p>
-        </p:txBody>
-      </p:sp>
-      <p:sp>
-        <p:nvSpPr>
-          <p:cNvPr id="14" name="TextBox 13"/>
-          <p:cNvSpPr txBox="1"/>
-          <p:nvPr/>
-        </p:nvSpPr>
-        <p:spPr>
-          <a:xfrm>
-            <a:off x="10378440" y="6400800"/>
-            <a:ext cx="228600" cy="182880"/>
-          </a:xfrm>
-          <a:prstGeom prst="rect">
-            <a:avLst/>
-          </a:prstGeom>
-          <a:noFill/>
-        </p:spPr>
-        <p:txBody>
-          <a:bodyPr wrap="none">
+            <a:off x="11292840" y="6446520"/>
+            <a:ext cx="411480" cy="201168"/>
+          </a:xfrm>
+          <a:prstGeom prst="rect">
+            <a:avLst/>
+          </a:prstGeom>
+          <a:noFill/>
+        </p:spPr>
+        <p:txBody>
+          <a:bodyPr wrap="square" lIns="73152" rIns="73152" tIns="36576" bIns="36576">
             <a:spAutoFit/>
           </a:bodyPr>
           <a:lstStyle/>
           <a:p>
             <a:pPr algn="r"/>
             <a:r>
-              <a:rPr sz="700">
-                <a:solidFill>
-                  <a:srgbClr val="566373"/>
-                </a:solidFill>
-                <a:latin typeface="Aptos"/>
-              </a:rPr>
-              <a:t>22</a:t>
+              <a:rPr sz="800" b="0">
+                <a:solidFill>
+                  <a:srgbClr val="5C6876"/>
+                </a:solidFill>
+                <a:latin typeface="Arial"/>
+              </a:rPr>
+              <a:t>21</a:t>
             </a:r>
           </a:p>
         </p:txBody>
@@ -15352,7 +14486,7 @@
                 </a:solidFill>
                 <a:latin typeface="Arial"/>
               </a:rPr>
-              <a:t>Implementation Setup</a:t>
+              <a:t>Same Data, Two Representations</a:t>
             </a:r>
           </a:p>
         </p:txBody>
@@ -15387,7 +14521,7 @@
                 </a:solidFill>
                 <a:latin typeface="Arial"/>
               </a:rPr>
-              <a:t>Local reproducible environment with Docker Compose</a:t>
+              <a:t>Why the model changes the query shape</a:t>
             </a:r>
           </a:p>
         </p:txBody>
@@ -15451,54 +14585,9 @@
           </a:p>
         </p:txBody>
       </p:sp>
-      <p:sp>
-        <p:nvSpPr>
-          <p:cNvPr id="7" name="Rectangle 6"/>
-          <p:cNvSpPr/>
-          <p:nvPr/>
-        </p:nvSpPr>
-        <p:spPr>
-          <a:xfrm>
-            <a:off x="707367" y="1389888"/>
-            <a:ext cx="10838225" cy="1792224"/>
-          </a:xfrm>
-          <a:prstGeom prst="rect">
-            <a:avLst/>
-          </a:prstGeom>
-          <a:solidFill>
-            <a:srgbClr val="FFFFFF"/>
-          </a:solidFill>
-          <a:ln w="15875">
-            <a:solidFill>
-              <a:srgbClr val="DCDCDC"/>
-            </a:solidFill>
-          </a:ln>
-        </p:spPr>
-        <p:style>
-          <a:lnRef idx="1">
-            <a:schemeClr val="accent1"/>
-          </a:lnRef>
-          <a:fillRef idx="3">
-            <a:schemeClr val="accent1"/>
-          </a:fillRef>
-          <a:effectRef idx="2">
-            <a:schemeClr val="accent1"/>
-          </a:effectRef>
-          <a:fontRef idx="minor">
-            <a:schemeClr val="lt1"/>
-          </a:fontRef>
-        </p:style>
-        <p:txBody>
-          <a:bodyPr rtlCol="0" anchor="ctr"/>
-          <a:lstStyle/>
-          <a:p>
-            <a:pPr algn="ctr"/>
-          </a:p>
-        </p:txBody>
-      </p:sp>
       <p:pic>
         <p:nvPicPr>
-          <p:cNvPr id="8" name="Picture 7" descr="docker1.png"/>
+          <p:cNvPr id="7" name="Picture 6" descr="relational_vs_graph_mapping.png"/>
           <p:cNvPicPr>
             <a:picLocks noChangeAspect="1"/>
           </p:cNvPicPr>
@@ -15512,8 +14601,8 @@
         </p:blipFill>
         <p:spPr>
           <a:xfrm>
-            <a:off x="734799" y="1417320"/>
-            <a:ext cx="10783361" cy="1737360"/>
+            <a:off x="1407159" y="1051560"/>
+            <a:ext cx="9347200" cy="5257800"/>
           </a:xfrm>
           <a:prstGeom prst="rect">
             <a:avLst/>
@@ -15522,352 +14611,7 @@
       </p:pic>
       <p:sp>
         <p:nvSpPr>
-          <p:cNvPr id="9" name="Rounded Rectangle 8"/>
-          <p:cNvSpPr/>
-          <p:nvPr/>
-        </p:nvSpPr>
-        <p:spPr>
-          <a:xfrm>
-            <a:off x="960120" y="3703320"/>
-            <a:ext cx="2926080" cy="1005840"/>
-          </a:xfrm>
-          <a:prstGeom prst="roundRect">
-            <a:avLst/>
-          </a:prstGeom>
-          <a:solidFill>
-            <a:srgbClr val="FBFBFB"/>
-          </a:solidFill>
-          <a:ln w="15875">
-            <a:solidFill>
-              <a:srgbClr val="E4E4E4"/>
-            </a:solidFill>
-          </a:ln>
-        </p:spPr>
-        <p:style>
-          <a:lnRef idx="1">
-            <a:schemeClr val="accent1"/>
-          </a:lnRef>
-          <a:fillRef idx="3">
-            <a:schemeClr val="accent1"/>
-          </a:fillRef>
-          <a:effectRef idx="2">
-            <a:schemeClr val="accent1"/>
-          </a:effectRef>
-          <a:fontRef idx="minor">
-            <a:schemeClr val="lt1"/>
-          </a:fontRef>
-        </p:style>
-        <p:txBody>
-          <a:bodyPr rtlCol="0" anchor="ctr"/>
-          <a:lstStyle/>
-          <a:p>
-            <a:pPr algn="ctr"/>
-          </a:p>
-        </p:txBody>
-      </p:sp>
-      <p:sp>
-        <p:nvSpPr>
-          <p:cNvPr id="10" name="TextBox 9"/>
-          <p:cNvSpPr txBox="1"/>
-          <p:nvPr/>
-        </p:nvSpPr>
-        <p:spPr>
-          <a:xfrm>
-            <a:off x="1234440" y="3886200"/>
-            <a:ext cx="2103120" cy="274320"/>
-          </a:xfrm>
-          <a:prstGeom prst="rect">
-            <a:avLst/>
-          </a:prstGeom>
-          <a:noFill/>
-        </p:spPr>
-        <p:txBody>
-          <a:bodyPr wrap="square" lIns="73152" rIns="73152" tIns="36576" bIns="36576">
-            <a:spAutoFit/>
-          </a:bodyPr>
-          <a:lstStyle/>
-          <a:p>
-            <a:pPr algn="l"/>
-            <a:r>
-              <a:rPr sz="1800" b="1">
-                <a:solidFill>
-                  <a:srgbClr val="52121E"/>
-                </a:solidFill>
-                <a:latin typeface="Arial"/>
-              </a:rPr>
-              <a:t>PostgreSQL 16</a:t>
-            </a:r>
-          </a:p>
-        </p:txBody>
-      </p:sp>
-      <p:sp>
-        <p:nvSpPr>
-          <p:cNvPr id="11" name="TextBox 10"/>
-          <p:cNvSpPr txBox="1"/>
-          <p:nvPr/>
-        </p:nvSpPr>
-        <p:spPr>
-          <a:xfrm>
-            <a:off x="1234440" y="4251960"/>
-            <a:ext cx="2103120" cy="228600"/>
-          </a:xfrm>
-          <a:prstGeom prst="rect">
-            <a:avLst/>
-          </a:prstGeom>
-          <a:noFill/>
-        </p:spPr>
-        <p:txBody>
-          <a:bodyPr wrap="square" lIns="73152" rIns="73152" tIns="36576" bIns="36576">
-            <a:spAutoFit/>
-          </a:bodyPr>
-          <a:lstStyle/>
-          <a:p>
-            <a:pPr algn="l"/>
-            <a:r>
-              <a:rPr sz="1400" b="0">
-                <a:solidFill>
-                  <a:srgbClr val="1A202C"/>
-                </a:solidFill>
-                <a:latin typeface="Arial"/>
-              </a:rPr>
-              <a:t>Relational DBMS</a:t>
-            </a:r>
-          </a:p>
-        </p:txBody>
-      </p:sp>
-      <p:sp>
-        <p:nvSpPr>
-          <p:cNvPr id="12" name="Rounded Rectangle 11"/>
-          <p:cNvSpPr/>
-          <p:nvPr/>
-        </p:nvSpPr>
-        <p:spPr>
-          <a:xfrm>
-            <a:off x="4617720" y="3703320"/>
-            <a:ext cx="2926080" cy="1005840"/>
-          </a:xfrm>
-          <a:prstGeom prst="roundRect">
-            <a:avLst/>
-          </a:prstGeom>
-          <a:solidFill>
-            <a:srgbClr val="FBFBFB"/>
-          </a:solidFill>
-          <a:ln w="15875">
-            <a:solidFill>
-              <a:srgbClr val="E4E4E4"/>
-            </a:solidFill>
-          </a:ln>
-        </p:spPr>
-        <p:style>
-          <a:lnRef idx="1">
-            <a:schemeClr val="accent1"/>
-          </a:lnRef>
-          <a:fillRef idx="3">
-            <a:schemeClr val="accent1"/>
-          </a:fillRef>
-          <a:effectRef idx="2">
-            <a:schemeClr val="accent1"/>
-          </a:effectRef>
-          <a:fontRef idx="minor">
-            <a:schemeClr val="lt1"/>
-          </a:fontRef>
-        </p:style>
-        <p:txBody>
-          <a:bodyPr rtlCol="0" anchor="ctr"/>
-          <a:lstStyle/>
-          <a:p>
-            <a:pPr algn="ctr"/>
-          </a:p>
-        </p:txBody>
-      </p:sp>
-      <p:sp>
-        <p:nvSpPr>
-          <p:cNvPr id="13" name="TextBox 12"/>
-          <p:cNvSpPr txBox="1"/>
-          <p:nvPr/>
-        </p:nvSpPr>
-        <p:spPr>
-          <a:xfrm>
-            <a:off x="4892040" y="3886200"/>
-            <a:ext cx="2103120" cy="274320"/>
-          </a:xfrm>
-          <a:prstGeom prst="rect">
-            <a:avLst/>
-          </a:prstGeom>
-          <a:noFill/>
-        </p:spPr>
-        <p:txBody>
-          <a:bodyPr wrap="square" lIns="73152" rIns="73152" tIns="36576" bIns="36576">
-            <a:spAutoFit/>
-          </a:bodyPr>
-          <a:lstStyle/>
-          <a:p>
-            <a:pPr algn="l"/>
-            <a:r>
-              <a:rPr sz="1800" b="1">
-                <a:solidFill>
-                  <a:srgbClr val="52121E"/>
-                </a:solidFill>
-                <a:latin typeface="Arial"/>
-              </a:rPr>
-              <a:t>Neo4j 5</a:t>
-            </a:r>
-          </a:p>
-        </p:txBody>
-      </p:sp>
-      <p:sp>
-        <p:nvSpPr>
-          <p:cNvPr id="14" name="TextBox 13"/>
-          <p:cNvSpPr txBox="1"/>
-          <p:nvPr/>
-        </p:nvSpPr>
-        <p:spPr>
-          <a:xfrm>
-            <a:off x="4892040" y="4251960"/>
-            <a:ext cx="2103120" cy="228600"/>
-          </a:xfrm>
-          <a:prstGeom prst="rect">
-            <a:avLst/>
-          </a:prstGeom>
-          <a:noFill/>
-        </p:spPr>
-        <p:txBody>
-          <a:bodyPr wrap="square" lIns="73152" rIns="73152" tIns="36576" bIns="36576">
-            <a:spAutoFit/>
-          </a:bodyPr>
-          <a:lstStyle/>
-          <a:p>
-            <a:pPr algn="l"/>
-            <a:r>
-              <a:rPr sz="1400" b="0">
-                <a:solidFill>
-                  <a:srgbClr val="1A202C"/>
-                </a:solidFill>
-                <a:latin typeface="Arial"/>
-              </a:rPr>
-              <a:t>Graph database</a:t>
-            </a:r>
-          </a:p>
-        </p:txBody>
-      </p:sp>
-      <p:sp>
-        <p:nvSpPr>
-          <p:cNvPr id="15" name="Rounded Rectangle 14"/>
-          <p:cNvSpPr/>
-          <p:nvPr/>
-        </p:nvSpPr>
-        <p:spPr>
-          <a:xfrm>
-            <a:off x="8275320" y="3703320"/>
-            <a:ext cx="2926080" cy="1005840"/>
-          </a:xfrm>
-          <a:prstGeom prst="roundRect">
-            <a:avLst/>
-          </a:prstGeom>
-          <a:solidFill>
-            <a:srgbClr val="FBFBFB"/>
-          </a:solidFill>
-          <a:ln w="15875">
-            <a:solidFill>
-              <a:srgbClr val="E4E4E4"/>
-            </a:solidFill>
-          </a:ln>
-        </p:spPr>
-        <p:style>
-          <a:lnRef idx="1">
-            <a:schemeClr val="accent1"/>
-          </a:lnRef>
-          <a:fillRef idx="3">
-            <a:schemeClr val="accent1"/>
-          </a:fillRef>
-          <a:effectRef idx="2">
-            <a:schemeClr val="accent1"/>
-          </a:effectRef>
-          <a:fontRef idx="minor">
-            <a:schemeClr val="lt1"/>
-          </a:fontRef>
-        </p:style>
-        <p:txBody>
-          <a:bodyPr rtlCol="0" anchor="ctr"/>
-          <a:lstStyle/>
-          <a:p>
-            <a:pPr algn="ctr"/>
-          </a:p>
-        </p:txBody>
-      </p:sp>
-      <p:sp>
-        <p:nvSpPr>
-          <p:cNvPr id="16" name="TextBox 15"/>
-          <p:cNvSpPr txBox="1"/>
-          <p:nvPr/>
-        </p:nvSpPr>
-        <p:spPr>
-          <a:xfrm>
-            <a:off x="8549640" y="3886200"/>
-            <a:ext cx="2103120" cy="274320"/>
-          </a:xfrm>
-          <a:prstGeom prst="rect">
-            <a:avLst/>
-          </a:prstGeom>
-          <a:noFill/>
-        </p:spPr>
-        <p:txBody>
-          <a:bodyPr wrap="square" lIns="73152" rIns="73152" tIns="36576" bIns="36576">
-            <a:spAutoFit/>
-          </a:bodyPr>
-          <a:lstStyle/>
-          <a:p>
-            <a:pPr algn="l"/>
-            <a:r>
-              <a:rPr sz="1800" b="1">
-                <a:solidFill>
-                  <a:srgbClr val="52121E"/>
-                </a:solidFill>
-                <a:latin typeface="Arial"/>
-              </a:rPr>
-              <a:t>Adminer</a:t>
-            </a:r>
-          </a:p>
-        </p:txBody>
-      </p:sp>
-      <p:sp>
-        <p:nvSpPr>
-          <p:cNvPr id="17" name="TextBox 16"/>
-          <p:cNvSpPr txBox="1"/>
-          <p:nvPr/>
-        </p:nvSpPr>
-        <p:spPr>
-          <a:xfrm>
-            <a:off x="8549640" y="4251960"/>
-            <a:ext cx="2103120" cy="228600"/>
-          </a:xfrm>
-          <a:prstGeom prst="rect">
-            <a:avLst/>
-          </a:prstGeom>
-          <a:noFill/>
-        </p:spPr>
-        <p:txBody>
-          <a:bodyPr wrap="square" lIns="73152" rIns="73152" tIns="36576" bIns="36576">
-            <a:spAutoFit/>
-          </a:bodyPr>
-          <a:lstStyle/>
-          <a:p>
-            <a:pPr algn="l"/>
-            <a:r>
-              <a:rPr sz="1400" b="0">
-                <a:solidFill>
-                  <a:srgbClr val="1A202C"/>
-                </a:solidFill>
-                <a:latin typeface="Arial"/>
-              </a:rPr>
-              <a:t>PostgreSQL UI</a:t>
-            </a:r>
-          </a:p>
-        </p:txBody>
-      </p:sp>
-      <p:sp>
-        <p:nvSpPr>
-          <p:cNvPr id="18" name="Rectangle 17"/>
+          <p:cNvPr id="8" name="Rectangle 7"/>
           <p:cNvSpPr/>
           <p:nvPr/>
         </p:nvSpPr>
@@ -15910,7 +14654,7 @@
       </p:sp>
       <p:sp>
         <p:nvSpPr>
-          <p:cNvPr id="19" name="TextBox 18"/>
+          <p:cNvPr id="9" name="TextBox 8"/>
           <p:cNvSpPr txBox="1"/>
           <p:nvPr/>
         </p:nvSpPr>
@@ -15945,7 +14689,7 @@
       </p:sp>
       <p:sp>
         <p:nvSpPr>
-          <p:cNvPr id="20" name="TextBox 19"/>
+          <p:cNvPr id="10" name="TextBox 9"/>
           <p:cNvSpPr txBox="1"/>
           <p:nvPr/>
         </p:nvSpPr>
